--- a/docs/Presentacion_ISY1101_TiendaPerritos.pptx
+++ b/docs/Presentacion_ISY1101_TiendaPerritos.pptx
@@ -599,7 +599,7 @@
           <a:p>
             <a:r>
               <a:rPr lang="en-US" dirty="0"/>
-              <a:t>Cerrar resumiendo el logro: automatizamos el ciclo completo desde el código hasta la nube, con pruebas, contenedores, CI/CD y orquestación en EKS. Agradecer y abrir a preguntas. Estar preparado para defender cualquier decisión técnica.</a:t>
+              <a:t>Cerrar resumiendo: automatizamos el ciclo completo desde el código hasta la nube. Agradecer y abrir a preguntas. Estar preparado para defender cualquier decisión técnica.</a:t>
             </a:r>
             <a:endParaRPr lang="en-US" dirty="0"/>
           </a:p>
@@ -687,7 +687,7 @@
           <a:p>
             <a:r>
               <a:rPr lang="en-US" dirty="0"/>
-              <a:t>Presentar brevemente el recorrido: arquitectura, contenedores, pipeline, despliegue en la nube, orquestación y seguridad. Cerrar con la demostración en vivo.</a:t>
+              <a:t>Presentar el recorrido: arquitectura, contenedores, pipeline, despliegue en la nube, orquestación y seguridad. Cerrar con la demostración en vivo.</a:t>
             </a:r>
             <a:endParaRPr lang="en-US" dirty="0"/>
           </a:p>
@@ -775,7 +775,7 @@
           <a:p>
             <a:r>
               <a:rPr lang="en-US" dirty="0"/>
-              <a:t>Explicar el flujo de izquierda a derecha. El usuario accede por el LoadBalancer, que reparte a las réplicas del frontend. El frontend nginx reenvía las peticiones /api/ al backend Node.js en el puerto 3001, y el backend consulta MySQL en el puerto 3306. Elegimos AWS. Solo el frontend es público; backend y base de datos son internos, por seguridad.</a:t>
+              <a:t>Explicar el flujo de izquierda a derecha. El usuario accede por el LoadBalancer, que reparte a las réplicas del frontend. El frontend nginx reenvía las peticiones /api/ al backend Node.js en el puerto 3001, y el backend consulta MySQL en el 3306. Elegimos AWS. Solo el frontend es público; backend y base de datos son internos, por seguridad.</a:t>
             </a:r>
             <a:endParaRPr lang="en-US" dirty="0"/>
           </a:p>
@@ -863,7 +863,7 @@
           <a:p>
             <a:r>
               <a:rPr lang="en-US" dirty="0"/>
-              <a:t>Cada componente tiene su propia imagen. El backend usa Dockerfile multietapa (separa dependencias de ejecución) con usuario no-root, para una imagen más liviana y segura. Usamos imágenes base alpine (minimalistas) y .dockerignore. Para el desarrollo local, docker-compose levanta frontend, backend y base de datos juntos en una red interna, permitiendo probar toda la plataforma con un comando.</a:t>
+              <a:t>Cada componente tiene su propia imagen. El backend usa Dockerfile multietapa (separa dependencias de ejecución) con usuario no-root, para una imagen más liviana y segura. Usamos imágenes base alpine (minimalistas) y .dockerignore. Para el desarrollo local, docker-compose levanta los tres componentes juntos en una red interna, permitiendo probar toda la plataforma con un comando.</a:t>
             </a:r>
             <a:endParaRPr lang="en-US" dirty="0"/>
           </a:p>
@@ -1039,7 +1039,7 @@
           <a:p>
             <a:r>
               <a:rPr lang="en-US" dirty="0"/>
-              <a:t>Aquí mostramos el resultado: las imágenes están en Amazon ECR, la aplicación corre en un cluster EKS de 2 nodos con 5 pods (2 frontend, 2 backend, 1 base de datos), y un LoadBalancer expone la app públicamente. En la demostración abriremos la URL para mostrar la tienda funcionando en la nube.</a:t>
+              <a:t>Aquí mostramos el resultado: 3 imágenes en Amazon ECR, la aplicación corriendo en un cluster EKS de 2 nodos con 5 pods (2 frontend, 2 backend, 1 base de datos), y un LoadBalancer que expone la app públicamente. En la demostración abriremos la URL para mostrar la tienda funcionando en la nube.</a:t>
             </a:r>
             <a:endParaRPr lang="en-US" dirty="0"/>
           </a:p>
@@ -1127,7 +1127,7 @@
           <a:p>
             <a:r>
               <a:rPr lang="en-US" dirty="0"/>
-              <a:t>¿Por qué EKS en vez de un despliegue manual? Kubernetes automatiza tareas críticas: el HPA escala el frontend de 2 a 6 réplicas según la CPU; las probes reinician automáticamente los pods caídos; el servicio balancea la carga; y tener varias réplicas garantiza alta disponibilidad. Todo esto sería imposible con un despliegue manual.</a:t>
+              <a:t>¿Por qué EKS en vez de un despliegue manual? Kubernetes automatiza tareas críticas: el HPA escala el frontend de 2 a 6 réplicas según la CPU; las probes reinician los pods caídos; el servicio balancea la carga; y tener varias réplicas garantiza alta disponibilidad. Esto sería inviable con un despliegue manual.</a:t>
             </a:r>
             <a:endParaRPr lang="en-US" dirty="0"/>
           </a:p>
@@ -1215,7 +1215,7 @@
           <a:p>
             <a:r>
               <a:rPr lang="en-US" dirty="0"/>
-              <a:t>En seguridad aplicamos: imágenes endurecidas (alpine, multietapa, no-root); exposición mínima de puertos, con solo el frontend público y el backend y la base de datos como servicios internos; y gestión de secretos fuera del código con GitHub Secrets y Kubernetes Secrets. Para observabilidad tenemos los logs del pipeline en GitHub Actions y las métricas de CPU/memoria de los recursos.</a:t>
+              <a:t>En seguridad: imágenes endurecidas (alpine, multietapa, no-root); exposición mínima de puertos, con solo el frontend público y el backend y la base de datos internos; y secretos fuera del código con GitHub Secrets y Kubernetes Secrets. Para observabilidad, los logs del pipeline en Actions y las métricas de CPU/memoria.</a:t>
             </a:r>
             <a:endParaRPr lang="en-US" dirty="0"/>
           </a:p>
@@ -1303,7 +1303,7 @@
           <a:p>
             <a:r>
               <a:rPr lang="en-US" dirty="0"/>
-              <a:t>Guion de la demo en vivo: mostrar el repositorio, levantar la plataforma con docker-compose, mostrar un pipeline corriendo en Actions, las imágenes en ECR, la tienda funcionando por la URL pública, y los pods/servicios en la consola de AWS. Tener las pestañas abiertas de antemano.</a:t>
+              <a:t>Guion de la demo: mostrar el repositorio, levantar la plataforma con docker-compose, mostrar un pipeline corriendo en Actions, las imágenes en ECR, la tienda por la URL pública, y los pods/servicios en la consola de AWS. Tener las pestañas abiertas de antemano.</a:t>
             </a:r>
             <a:endParaRPr lang="en-US" dirty="0"/>
           </a:p>
@@ -1658,7 +1658,7 @@
     <p:bg>
       <p:bgPr>
         <a:solidFill>
-          <a:srgbClr val="0B2545"/>
+          <a:srgbClr val="0A1E33"/>
         </a:solidFill>
       </p:bgPr>
     </p:bg>
@@ -1684,20 +1684,203 @@
         </p:nvSpPr>
         <p:spPr>
           <a:xfrm>
-            <a:off x="548640" y="1828800"/>
-            <a:ext cx="822960" cy="822960"/>
+            <a:off x="9418320" y="-2011680"/>
+            <a:ext cx="5029200" cy="5029200"/>
+          </a:xfrm>
+          <a:prstGeom prst="ellipse">
+            <a:avLst/>
+          </a:prstGeom>
+          <a:solidFill>
+            <a:srgbClr val="102A46"/>
+          </a:solidFill>
+          <a:ln/>
+        </p:spPr>
+      </p:sp>
+      <p:sp>
+        <p:nvSpPr>
+          <p:cNvPr id="3" name="Shape 1"/>
+          <p:cNvSpPr/>
+          <p:nvPr/>
+        </p:nvSpPr>
+        <p:spPr>
+          <a:xfrm>
+            <a:off x="-1645920" y="4206240"/>
+            <a:ext cx="4572000" cy="4572000"/>
+          </a:xfrm>
+          <a:prstGeom prst="ellipse">
+            <a:avLst/>
+          </a:prstGeom>
+          <a:solidFill>
+            <a:srgbClr val="102A46"/>
+          </a:solidFill>
+          <a:ln/>
+        </p:spPr>
+      </p:sp>
+      <p:sp>
+        <p:nvSpPr>
+          <p:cNvPr id="4" name="Shape 2"/>
+          <p:cNvSpPr/>
+          <p:nvPr/>
+        </p:nvSpPr>
+        <p:spPr>
+          <a:xfrm>
+            <a:off x="731520" y="1554480"/>
+            <a:ext cx="1188720" cy="1188720"/>
           </a:xfrm>
           <a:prstGeom prst="roundRect">
             <a:avLst>
-              <a:gd name="adj" fmla="val 13333"/>
+              <a:gd name="adj" fmla="val 21538"/>
             </a:avLst>
           </a:prstGeom>
           <a:solidFill>
-            <a:srgbClr val="02C39A"/>
+            <a:srgbClr val="10D6A3"/>
+          </a:solidFill>
+          <a:ln/>
+          <a:effectLst>
+            <a:outerShdw sx="100000" sy="100000" kx="0" ky="0" algn="bl" rotWithShape="0" blurRad="152400" dist="50800" dir="5400000">
+              <a:srgbClr val="000000">
+                <a:alpha val="50000"/>
+              </a:srgbClr>
+            </a:outerShdw>
+          </a:effectLst>
+        </p:spPr>
+      </p:sp>
+      <p:sp>
+        <p:nvSpPr>
+          <p:cNvPr id="5" name="Text 3"/>
+          <p:cNvSpPr/>
+          <p:nvPr/>
+        </p:nvSpPr>
+        <p:spPr>
+          <a:xfrm>
+            <a:off x="731520" y="1554480"/>
+            <a:ext cx="1188720" cy="1188720"/>
+          </a:xfrm>
+          <a:prstGeom prst="rect">
+            <a:avLst/>
+          </a:prstGeom>
+          <a:noFill/>
+          <a:ln/>
+        </p:spPr>
+        <p:txBody>
+          <a:bodyPr wrap="square" rtlCol="0" anchor="ctr"/>
+          <a:lstStyle/>
+          <a:p>
+            <a:pPr algn="ctr" indent="0" marL="0">
+              <a:buNone/>
+            </a:pPr>
+            <a:r>
+              <a:rPr lang="en-US" sz="5200" dirty="0">
+                <a:solidFill>
+                  <a:srgbClr val="000000"/>
+                </a:solidFill>
+              </a:rPr>
+              <a:t>🐶</a:t>
+            </a:r>
+            <a:endParaRPr lang="en-US" sz="5200" dirty="0"/>
+          </a:p>
+        </p:txBody>
+      </p:sp>
+      <p:sp>
+        <p:nvSpPr>
+          <p:cNvPr id="6" name="Text 4"/>
+          <p:cNvSpPr/>
+          <p:nvPr/>
+        </p:nvSpPr>
+        <p:spPr>
+          <a:xfrm>
+            <a:off x="731520" y="3017520"/>
+            <a:ext cx="10607040" cy="1005840"/>
+          </a:xfrm>
+          <a:prstGeom prst="rect">
+            <a:avLst/>
+          </a:prstGeom>
+          <a:noFill/>
+          <a:ln/>
+        </p:spPr>
+        <p:txBody>
+          <a:bodyPr wrap="square" rtlCol="0" anchor="ctr"/>
+          <a:lstStyle/>
+          <a:p>
+            <a:pPr indent="0" marL="0">
+              <a:buNone/>
+            </a:pPr>
+            <a:r>
+              <a:rPr lang="en-US" sz="5400" b="1" dirty="0">
+                <a:solidFill>
+                  <a:srgbClr val="FFFFFF"/>
+                </a:solidFill>
+                <a:latin typeface="Calibri" pitchFamily="34" charset="0"/>
+                <a:ea typeface="Calibri" pitchFamily="34" charset="-122"/>
+                <a:cs typeface="Calibri" pitchFamily="34" charset="-120"/>
+              </a:rPr>
+              <a:t>Tienda de Perritos</a:t>
+            </a:r>
+            <a:endParaRPr lang="en-US" sz="5400" dirty="0"/>
+          </a:p>
+        </p:txBody>
+      </p:sp>
+      <p:sp>
+        <p:nvSpPr>
+          <p:cNvPr id="7" name="Text 5"/>
+          <p:cNvSpPr/>
+          <p:nvPr/>
+        </p:nvSpPr>
+        <p:spPr>
+          <a:xfrm>
+            <a:off x="758952" y="4114800"/>
+            <a:ext cx="10607040" cy="548640"/>
+          </a:xfrm>
+          <a:prstGeom prst="rect">
+            <a:avLst/>
+          </a:prstGeom>
+          <a:noFill/>
+          <a:ln/>
+        </p:spPr>
+        <p:txBody>
+          <a:bodyPr wrap="square" rtlCol="0" anchor="ctr"/>
+          <a:lstStyle/>
+          <a:p>
+            <a:pPr indent="0" marL="0">
+              <a:buNone/>
+            </a:pPr>
+            <a:r>
+              <a:rPr lang="en-US" sz="2200" dirty="0">
+                <a:solidFill>
+                  <a:srgbClr val="10D6A3"/>
+                </a:solidFill>
+                <a:latin typeface="Calibri" pitchFamily="34" charset="0"/>
+                <a:ea typeface="Calibri" pitchFamily="34" charset="-122"/>
+                <a:cs typeface="Calibri" pitchFamily="34" charset="-120"/>
+              </a:rPr>
+              <a:t>Plataforma DevOps con CI/CD y despliegue en AWS EKS</a:t>
+            </a:r>
+            <a:endParaRPr lang="en-US" sz="2200" dirty="0"/>
+          </a:p>
+        </p:txBody>
+      </p:sp>
+      <p:sp>
+        <p:nvSpPr>
+          <p:cNvPr id="8" name="Shape 6"/>
+          <p:cNvSpPr/>
+          <p:nvPr/>
+        </p:nvSpPr>
+        <p:spPr>
+          <a:xfrm>
+            <a:off x="731520" y="5257800"/>
+            <a:ext cx="7863840" cy="960120"/>
+          </a:xfrm>
+          <a:prstGeom prst="roundRect">
+            <a:avLst>
+              <a:gd name="adj" fmla="val 9524"/>
+            </a:avLst>
+          </a:prstGeom>
+          <a:solidFill>
+            <a:srgbClr val="102A46"/>
           </a:solidFill>
           <a:ln w="12700">
             <a:solidFill>
-              <a:srgbClr val="02C39A"/>
+              <a:srgbClr val="2A5578"/>
             </a:solidFill>
             <a:prstDash val="solid"/>
           </a:ln>
@@ -1705,128 +1888,14 @@
       </p:sp>
       <p:sp>
         <p:nvSpPr>
-          <p:cNvPr id="3" name="Text 1"/>
-          <p:cNvSpPr/>
-          <p:nvPr/>
-        </p:nvSpPr>
-        <p:spPr>
-          <a:xfrm>
-            <a:off x="548640" y="1828800"/>
-            <a:ext cx="822960" cy="822960"/>
-          </a:xfrm>
-          <a:prstGeom prst="rect">
-            <a:avLst/>
-          </a:prstGeom>
-          <a:noFill/>
-          <a:ln/>
-        </p:spPr>
-        <p:txBody>
-          <a:bodyPr wrap="square" rtlCol="0" anchor="ctr"/>
-          <a:lstStyle/>
-          <a:p>
-            <a:pPr algn="ctr" indent="0" marL="0">
-              <a:buNone/>
-            </a:pPr>
-            <a:r>
-              <a:rPr lang="en-US" sz="3400" dirty="0">
-                <a:solidFill>
-                  <a:srgbClr val="000000"/>
-                </a:solidFill>
-              </a:rPr>
-              <a:t>🐶</a:t>
-            </a:r>
-            <a:endParaRPr lang="en-US" sz="3400" dirty="0"/>
-          </a:p>
-        </p:txBody>
-      </p:sp>
-      <p:sp>
-        <p:nvSpPr>
-          <p:cNvPr id="4" name="Text 2"/>
-          <p:cNvSpPr/>
-          <p:nvPr/>
-        </p:nvSpPr>
-        <p:spPr>
-          <a:xfrm>
-            <a:off x="548640" y="2743200"/>
-            <a:ext cx="10515600" cy="914400"/>
-          </a:xfrm>
-          <a:prstGeom prst="rect">
-            <a:avLst/>
-          </a:prstGeom>
-          <a:noFill/>
-          <a:ln/>
-        </p:spPr>
-        <p:txBody>
-          <a:bodyPr wrap="square" rtlCol="0" anchor="ctr"/>
-          <a:lstStyle/>
-          <a:p>
-            <a:pPr indent="0" marL="0">
-              <a:buNone/>
-            </a:pPr>
-            <a:r>
-              <a:rPr lang="en-US" sz="4800" b="1" dirty="0">
-                <a:solidFill>
-                  <a:srgbClr val="FFFFFF"/>
-                </a:solidFill>
-                <a:latin typeface="Cambria" pitchFamily="34" charset="0"/>
-                <a:ea typeface="Cambria" pitchFamily="34" charset="-122"/>
-                <a:cs typeface="Cambria" pitchFamily="34" charset="-120"/>
-              </a:rPr>
-              <a:t>Tienda de Perritos</a:t>
-            </a:r>
-            <a:endParaRPr lang="en-US" sz="4800" dirty="0"/>
-          </a:p>
-        </p:txBody>
-      </p:sp>
-      <p:sp>
-        <p:nvSpPr>
-          <p:cNvPr id="5" name="Text 3"/>
-          <p:cNvSpPr/>
-          <p:nvPr/>
-        </p:nvSpPr>
-        <p:spPr>
-          <a:xfrm>
-            <a:off x="566928" y="3657600"/>
-            <a:ext cx="10515600" cy="548640"/>
-          </a:xfrm>
-          <a:prstGeom prst="rect">
-            <a:avLst/>
-          </a:prstGeom>
-          <a:noFill/>
-          <a:ln/>
-        </p:spPr>
-        <p:txBody>
-          <a:bodyPr wrap="square" rtlCol="0" anchor="ctr"/>
-          <a:lstStyle/>
-          <a:p>
-            <a:pPr indent="0" marL="0">
-              <a:buNone/>
-            </a:pPr>
-            <a:r>
-              <a:rPr lang="en-US" sz="2200" dirty="0">
-                <a:solidFill>
-                  <a:srgbClr val="CADCFC"/>
-                </a:solidFill>
-                <a:latin typeface="Calibri" pitchFamily="34" charset="0"/>
-                <a:ea typeface="Calibri" pitchFamily="34" charset="-122"/>
-                <a:cs typeface="Calibri" pitchFamily="34" charset="-120"/>
-              </a:rPr>
-              <a:t>Plataforma DevOps con CI/CD y despliegue en AWS EKS</a:t>
-            </a:r>
-            <a:endParaRPr lang="en-US" sz="2200" dirty="0"/>
-          </a:p>
-        </p:txBody>
-      </p:sp>
-      <p:sp>
-        <p:nvSpPr>
-          <p:cNvPr id="6" name="Text 4"/>
-          <p:cNvSpPr/>
-          <p:nvPr/>
-        </p:nvSpPr>
-        <p:spPr>
-          <a:xfrm>
-            <a:off x="566928" y="5120640"/>
-            <a:ext cx="10515600" cy="914400"/>
+          <p:cNvPr id="9" name="Text 7"/>
+          <p:cNvSpPr/>
+          <p:nvPr/>
+        </p:nvSpPr>
+        <p:spPr>
+          <a:xfrm>
+            <a:off x="960120" y="5257800"/>
+            <a:ext cx="7406640" cy="960120"/>
           </a:xfrm>
           <a:prstGeom prst="rect">
             <a:avLst/>
@@ -1840,30 +1909,30 @@
           <a:p>
             <a:pPr indent="0" marL="0">
               <a:lnSpc>
-                <a:spcPct val="120000"/>
+                <a:spcPct val="125000"/>
               </a:lnSpc>
               <a:buNone/>
             </a:pPr>
             <a:r>
-              <a:rPr lang="en-US" sz="1400" dirty="0">
-                <a:solidFill>
-                  <a:srgbClr val="9FB3C8"/>
-                </a:solidFill>
-                <a:latin typeface="Calibri" pitchFamily="34" charset="0"/>
-                <a:ea typeface="Calibri" pitchFamily="34" charset="-122"/>
-                <a:cs typeface="Calibri" pitchFamily="34" charset="-120"/>
-              </a:rPr>
-              <a:t>Evaluación Final Transversal — Introducción a Herramientas DevOps (ISY1101)
+              <a:rPr lang="en-US" sz="1300" dirty="0">
+                <a:solidFill>
+                  <a:srgbClr val="CFE0F2"/>
+                </a:solidFill>
+                <a:latin typeface="Calibri" pitchFamily="34" charset="0"/>
+                <a:ea typeface="Calibri" pitchFamily="34" charset="-122"/>
+                <a:cs typeface="Calibri" pitchFamily="34" charset="-120"/>
+              </a:rPr>
+              <a:t>Evaluación Final Transversal · Introducción a Herramientas DevOps (ISY1101)
 </a:t>
             </a:r>
             <a:pPr indent="0" marL="0">
               <a:lnSpc>
-                <a:spcPct val="120000"/>
+                <a:spcPct val="125000"/>
               </a:lnSpc>
               <a:buNone/>
             </a:pPr>
             <a:r>
-              <a:rPr lang="en-US" sz="1400" b="1" dirty="0">
+              <a:rPr lang="en-US" sz="1600" b="1" dirty="0">
                 <a:solidFill>
                   <a:srgbClr val="FFFFFF"/>
                 </a:solidFill>
@@ -1871,9 +1940,9 @@
                 <a:ea typeface="Calibri" pitchFamily="34" charset="-122"/>
                 <a:cs typeface="Calibri" pitchFamily="34" charset="-120"/>
               </a:rPr>
-              <a:t>Integrantes: Marco Parra · Luis Inostroza</a:t>
-            </a:r>
-            <a:endParaRPr lang="en-US" sz="1400" dirty="0"/>
+              <a:t>Marco Parra   ·   Luis Inostroza</a:t>
+            </a:r>
+            <a:endParaRPr lang="en-US" sz="1300" dirty="0"/>
           </a:p>
         </p:txBody>
       </p:sp>
@@ -1891,7 +1960,7 @@
     <p:bg>
       <p:bgPr>
         <a:solidFill>
-          <a:srgbClr val="0B2545"/>
+          <a:srgbClr val="0A1E33"/>
         </a:solidFill>
       </p:bgPr>
     </p:bg>
@@ -1911,14 +1980,54 @@
       </p:grpSpPr>
       <p:sp>
         <p:nvSpPr>
-          <p:cNvPr id="2" name="Text 0"/>
-          <p:cNvSpPr/>
-          <p:nvPr/>
-        </p:nvSpPr>
-        <p:spPr>
-          <a:xfrm>
-            <a:off x="548640" y="1463040"/>
-            <a:ext cx="11064240" cy="822960"/>
+          <p:cNvPr id="2" name="Shape 0"/>
+          <p:cNvSpPr/>
+          <p:nvPr/>
+        </p:nvSpPr>
+        <p:spPr>
+          <a:xfrm>
+            <a:off x="9418320" y="-2011680"/>
+            <a:ext cx="5029200" cy="5029200"/>
+          </a:xfrm>
+          <a:prstGeom prst="ellipse">
+            <a:avLst/>
+          </a:prstGeom>
+          <a:solidFill>
+            <a:srgbClr val="102A46"/>
+          </a:solidFill>
+          <a:ln/>
+        </p:spPr>
+      </p:sp>
+      <p:sp>
+        <p:nvSpPr>
+          <p:cNvPr id="3" name="Shape 1"/>
+          <p:cNvSpPr/>
+          <p:nvPr/>
+        </p:nvSpPr>
+        <p:spPr>
+          <a:xfrm>
+            <a:off x="-1645920" y="4206240"/>
+            <a:ext cx="4572000" cy="4572000"/>
+          </a:xfrm>
+          <a:prstGeom prst="ellipse">
+            <a:avLst/>
+          </a:prstGeom>
+          <a:solidFill>
+            <a:srgbClr val="102A46"/>
+          </a:solidFill>
+          <a:ln/>
+        </p:spPr>
+      </p:sp>
+      <p:sp>
+        <p:nvSpPr>
+          <p:cNvPr id="4" name="Text 2"/>
+          <p:cNvSpPr/>
+          <p:nvPr/>
+        </p:nvSpPr>
+        <p:spPr>
+          <a:xfrm>
+            <a:off x="731520" y="1554480"/>
+            <a:ext cx="10607040" cy="914400"/>
           </a:xfrm>
           <a:prstGeom prst="rect">
             <a:avLst/>
@@ -1934,30 +2043,30 @@
               <a:buNone/>
             </a:pPr>
             <a:r>
-              <a:rPr lang="en-US" sz="4000" b="1" dirty="0">
+              <a:rPr lang="en-US" sz="4400" b="1" dirty="0">
                 <a:solidFill>
                   <a:srgbClr val="FFFFFF"/>
                 </a:solidFill>
-                <a:latin typeface="Cambria" pitchFamily="34" charset="0"/>
-                <a:ea typeface="Cambria" pitchFamily="34" charset="-122"/>
-                <a:cs typeface="Cambria" pitchFamily="34" charset="-120"/>
+                <a:latin typeface="Calibri" pitchFamily="34" charset="0"/>
+                <a:ea typeface="Calibri" pitchFamily="34" charset="-122"/>
+                <a:cs typeface="Calibri" pitchFamily="34" charset="-120"/>
               </a:rPr>
               <a:t>Conclusión</a:t>
             </a:r>
-            <a:endParaRPr lang="en-US" sz="4000" dirty="0"/>
-          </a:p>
-        </p:txBody>
-      </p:sp>
-      <p:sp>
-        <p:nvSpPr>
-          <p:cNvPr id="3" name="Text 1"/>
-          <p:cNvSpPr/>
-          <p:nvPr/>
-        </p:nvSpPr>
-        <p:spPr>
-          <a:xfrm>
-            <a:off x="548640" y="2560320"/>
-            <a:ext cx="10789920" cy="1280160"/>
+            <a:endParaRPr lang="en-US" sz="4400" dirty="0"/>
+          </a:p>
+        </p:txBody>
+      </p:sp>
+      <p:sp>
+        <p:nvSpPr>
+          <p:cNvPr id="5" name="Text 3"/>
+          <p:cNvSpPr/>
+          <p:nvPr/>
+        </p:nvSpPr>
+        <p:spPr>
+          <a:xfrm>
+            <a:off x="731520" y="2651760"/>
+            <a:ext cx="10607040" cy="1280160"/>
           </a:xfrm>
           <a:prstGeom prst="rect">
             <a:avLst/>
@@ -1971,14 +2080,14 @@
           <a:p>
             <a:pPr indent="0" marL="0">
               <a:lnSpc>
-                <a:spcPct val="120000"/>
+                <a:spcPct val="125000"/>
               </a:lnSpc>
               <a:buNone/>
             </a:pPr>
             <a:r>
-              <a:rPr lang="en-US" sz="1800" b="1" dirty="0">
-                <a:solidFill>
-                  <a:srgbClr val="CADCFC"/>
+              <a:rPr lang="en-US" sz="1900" b="1" dirty="0">
+                <a:solidFill>
+                  <a:srgbClr val="CFE0F2"/>
                 </a:solidFill>
                 <a:latin typeface="Calibri" pitchFamily="34" charset="0"/>
                 <a:ea typeface="Calibri" pitchFamily="34" charset="-122"/>
@@ -1987,19 +2096,19 @@
               <a:t>Automatizamos el ciclo completo de una plataforma Frontend + Backend + Base de datos:
 </a:t>
             </a:r>
-            <a:endParaRPr lang="en-US" sz="1800" dirty="0"/>
+            <a:endParaRPr lang="en-US" sz="1900" dirty="0"/>
           </a:p>
           <a:p>
             <a:pPr indent="0" marL="0">
               <a:lnSpc>
-                <a:spcPct val="120000"/>
+                <a:spcPct val="125000"/>
               </a:lnSpc>
               <a:buNone/>
             </a:pPr>
             <a:r>
-              <a:rPr lang="en-US" sz="1800" dirty="0">
-                <a:solidFill>
-                  <a:srgbClr val="CADCFC"/>
+              <a:rPr lang="en-US" sz="1900" dirty="0">
+                <a:solidFill>
+                  <a:srgbClr val="CFE0F2"/>
                 </a:solidFill>
                 <a:latin typeface="Calibri" pitchFamily="34" charset="0"/>
                 <a:ea typeface="Calibri" pitchFamily="34" charset="-122"/>
@@ -2007,46 +2116,75 @@
               </a:rPr>
               <a:t>del código a la nube, con pruebas, contenedores, CI/CD y orquestación en AWS EKS.</a:t>
             </a:r>
-            <a:endParaRPr lang="en-US" sz="1800" dirty="0"/>
-          </a:p>
-        </p:txBody>
-      </p:sp>
-      <p:sp>
-        <p:nvSpPr>
-          <p:cNvPr id="4" name="Text 2"/>
-          <p:cNvSpPr/>
-          <p:nvPr/>
-        </p:nvSpPr>
-        <p:spPr>
-          <a:xfrm>
-            <a:off x="548640" y="4572000"/>
-            <a:ext cx="10789920" cy="640080"/>
-          </a:xfrm>
-          <a:prstGeom prst="rect">
-            <a:avLst/>
-          </a:prstGeom>
-          <a:noFill/>
-          <a:ln/>
-        </p:spPr>
-        <p:txBody>
-          <a:bodyPr wrap="square" rtlCol="0" anchor="ctr"/>
-          <a:lstStyle/>
-          <a:p>
-            <a:pPr indent="0" marL="0">
-              <a:buNone/>
-            </a:pPr>
-            <a:r>
-              <a:rPr lang="en-US" sz="2400" b="1" dirty="0">
-                <a:solidFill>
-                  <a:srgbClr val="02C39A"/>
-                </a:solidFill>
-                <a:latin typeface="Cambria" pitchFamily="34" charset="0"/>
-                <a:ea typeface="Cambria" pitchFamily="34" charset="-122"/>
-                <a:cs typeface="Cambria" pitchFamily="34" charset="-120"/>
-              </a:rPr>
-              <a:t>¡Gracias!  ·  Preguntas</a:t>
-            </a:r>
-            <a:endParaRPr lang="en-US" sz="2400" dirty="0"/>
+            <a:endParaRPr lang="en-US" sz="1900" dirty="0"/>
+          </a:p>
+        </p:txBody>
+      </p:sp>
+      <p:sp>
+        <p:nvSpPr>
+          <p:cNvPr id="6" name="Shape 4"/>
+          <p:cNvSpPr/>
+          <p:nvPr/>
+        </p:nvSpPr>
+        <p:spPr>
+          <a:xfrm>
+            <a:off x="731520" y="4480560"/>
+            <a:ext cx="4754880" cy="868680"/>
+          </a:xfrm>
+          <a:prstGeom prst="roundRect">
+            <a:avLst>
+              <a:gd name="adj" fmla="val 12632"/>
+            </a:avLst>
+          </a:prstGeom>
+          <a:solidFill>
+            <a:srgbClr val="10D6A3"/>
+          </a:solidFill>
+          <a:ln/>
+          <a:effectLst>
+            <a:outerShdw sx="100000" sy="100000" kx="0" ky="0" algn="bl" rotWithShape="0" blurRad="127000" dist="50800" dir="5400000">
+              <a:srgbClr val="000000">
+                <a:alpha val="45000"/>
+              </a:srgbClr>
+            </a:outerShdw>
+          </a:effectLst>
+        </p:spPr>
+      </p:sp>
+      <p:sp>
+        <p:nvSpPr>
+          <p:cNvPr id="7" name="Text 5"/>
+          <p:cNvSpPr/>
+          <p:nvPr/>
+        </p:nvSpPr>
+        <p:spPr>
+          <a:xfrm>
+            <a:off x="731520" y="4480560"/>
+            <a:ext cx="4754880" cy="868680"/>
+          </a:xfrm>
+          <a:prstGeom prst="rect">
+            <a:avLst/>
+          </a:prstGeom>
+          <a:noFill/>
+          <a:ln/>
+        </p:spPr>
+        <p:txBody>
+          <a:bodyPr wrap="square" rtlCol="0" anchor="ctr"/>
+          <a:lstStyle/>
+          <a:p>
+            <a:pPr algn="ctr" indent="0" marL="0">
+              <a:buNone/>
+            </a:pPr>
+            <a:r>
+              <a:rPr lang="en-US" sz="2200" b="1" dirty="0">
+                <a:solidFill>
+                  <a:srgbClr val="0A1E33"/>
+                </a:solidFill>
+                <a:latin typeface="Calibri" pitchFamily="34" charset="0"/>
+                <a:ea typeface="Calibri" pitchFamily="34" charset="-122"/>
+                <a:cs typeface="Calibri" pitchFamily="34" charset="-120"/>
+              </a:rPr>
+              <a:t>¡Gracias!   ·   Preguntas</a:t>
+            </a:r>
+            <a:endParaRPr lang="en-US" sz="2200" dirty="0"/>
           </a:p>
         </p:txBody>
       </p:sp>
@@ -2064,7 +2202,7 @@
     <p:bg>
       <p:bgPr>
         <a:solidFill>
-          <a:srgbClr val="FFFFFF"/>
+          <a:srgbClr val="0A1E33"/>
         </a:solidFill>
       </p:bgPr>
     </p:bg>
@@ -2084,14 +2222,34 @@
       </p:grpSpPr>
       <p:sp>
         <p:nvSpPr>
-          <p:cNvPr id="2" name="Text 0"/>
-          <p:cNvSpPr/>
-          <p:nvPr/>
-        </p:nvSpPr>
-        <p:spPr>
-          <a:xfrm>
-            <a:off x="548640" y="365760"/>
-            <a:ext cx="11064240" cy="731520"/>
+          <p:cNvPr id="2" name="Shape 0"/>
+          <p:cNvSpPr/>
+          <p:nvPr/>
+        </p:nvSpPr>
+        <p:spPr>
+          <a:xfrm>
+            <a:off x="9418320" y="-2011680"/>
+            <a:ext cx="5029200" cy="5029200"/>
+          </a:xfrm>
+          <a:prstGeom prst="ellipse">
+            <a:avLst/>
+          </a:prstGeom>
+          <a:solidFill>
+            <a:srgbClr val="102A46"/>
+          </a:solidFill>
+          <a:ln/>
+        </p:spPr>
+      </p:sp>
+      <p:sp>
+        <p:nvSpPr>
+          <p:cNvPr id="3" name="Text 1"/>
+          <p:cNvSpPr/>
+          <p:nvPr/>
+        </p:nvSpPr>
+        <p:spPr>
+          <a:xfrm>
+            <a:off x="548640" y="457200"/>
+            <a:ext cx="10058400" cy="685800"/>
           </a:xfrm>
           <a:prstGeom prst="rect">
             <a:avLst/>
@@ -2107,57 +2265,84 @@
               <a:buNone/>
             </a:pPr>
             <a:r>
-              <a:rPr lang="en-US" sz="3200" b="1" dirty="0">
-                <a:solidFill>
-                  <a:srgbClr val="13315C"/>
-                </a:solidFill>
-                <a:latin typeface="Cambria" pitchFamily="34" charset="0"/>
-                <a:ea typeface="Cambria" pitchFamily="34" charset="-122"/>
-                <a:cs typeface="Cambria" pitchFamily="34" charset="-120"/>
+              <a:rPr lang="en-US" sz="3000" b="1" dirty="0">
+                <a:solidFill>
+                  <a:srgbClr val="FFFFFF"/>
+                </a:solidFill>
+                <a:latin typeface="Calibri" pitchFamily="34" charset="0"/>
+                <a:ea typeface="Calibri" pitchFamily="34" charset="-122"/>
+                <a:cs typeface="Calibri" pitchFamily="34" charset="-120"/>
               </a:rPr>
               <a:t>Agenda</a:t>
             </a:r>
-            <a:endParaRPr lang="en-US" sz="3200" dirty="0"/>
-          </a:p>
-        </p:txBody>
-      </p:sp>
-      <p:sp>
-        <p:nvSpPr>
-          <p:cNvPr id="3" name="Shape 1"/>
-          <p:cNvSpPr/>
-          <p:nvPr/>
-        </p:nvSpPr>
-        <p:spPr>
-          <a:xfrm>
-            <a:off x="731520" y="1554480"/>
-            <a:ext cx="640080" cy="640080"/>
+            <a:endParaRPr lang="en-US" sz="3000" dirty="0"/>
+          </a:p>
+        </p:txBody>
+      </p:sp>
+      <p:sp>
+        <p:nvSpPr>
+          <p:cNvPr id="4" name="Shape 2"/>
+          <p:cNvSpPr/>
+          <p:nvPr/>
+        </p:nvSpPr>
+        <p:spPr>
+          <a:xfrm>
+            <a:off x="731520" y="1600200"/>
+            <a:ext cx="5257800" cy="1234440"/>
           </a:xfrm>
           <a:prstGeom prst="roundRect">
             <a:avLst>
-              <a:gd name="adj" fmla="val 14286"/>
+              <a:gd name="adj" fmla="val 7407"/>
             </a:avLst>
           </a:prstGeom>
           <a:solidFill>
-            <a:srgbClr val="1C7293"/>
+            <a:srgbClr val="163A5C"/>
           </a:solidFill>
           <a:ln w="12700">
             <a:solidFill>
-              <a:srgbClr val="1C7293"/>
+              <a:srgbClr val="2A5578"/>
             </a:solidFill>
             <a:prstDash val="solid"/>
           </a:ln>
-        </p:spPr>
-      </p:sp>
-      <p:sp>
-        <p:nvSpPr>
-          <p:cNvPr id="4" name="Text 2"/>
-          <p:cNvSpPr/>
-          <p:nvPr/>
-        </p:nvSpPr>
-        <p:spPr>
-          <a:xfrm>
-            <a:off x="731520" y="1554480"/>
-            <a:ext cx="640080" cy="640080"/>
+          <a:effectLst>
+            <a:outerShdw sx="100000" sy="100000" kx="0" ky="0" algn="bl" rotWithShape="0" blurRad="114300" dist="50800" dir="5400000">
+              <a:srgbClr val="000000">
+                <a:alpha val="45000"/>
+              </a:srgbClr>
+            </a:outerShdw>
+          </a:effectLst>
+        </p:spPr>
+      </p:sp>
+      <p:sp>
+        <p:nvSpPr>
+          <p:cNvPr id="5" name="Shape 3"/>
+          <p:cNvSpPr/>
+          <p:nvPr/>
+        </p:nvSpPr>
+        <p:spPr>
+          <a:xfrm>
+            <a:off x="1005840" y="1920240"/>
+            <a:ext cx="594360" cy="594360"/>
+          </a:xfrm>
+          <a:prstGeom prst="ellipse">
+            <a:avLst/>
+          </a:prstGeom>
+          <a:solidFill>
+            <a:srgbClr val="10D6A3"/>
+          </a:solidFill>
+          <a:ln/>
+        </p:spPr>
+      </p:sp>
+      <p:sp>
+        <p:nvSpPr>
+          <p:cNvPr id="6" name="Text 4"/>
+          <p:cNvSpPr/>
+          <p:nvPr/>
+        </p:nvSpPr>
+        <p:spPr>
+          <a:xfrm>
+            <a:off x="1005840" y="1920240"/>
+            <a:ext cx="594360" cy="594360"/>
           </a:xfrm>
           <a:prstGeom prst="rect">
             <a:avLst/>
@@ -2173,96 +2358,123 @@
               <a:buNone/>
             </a:pPr>
             <a:r>
-              <a:rPr lang="en-US" sz="2400" b="1" dirty="0">
+              <a:rPr lang="en-US" sz="2200" b="1" dirty="0">
+                <a:solidFill>
+                  <a:srgbClr val="0A1E33"/>
+                </a:solidFill>
+                <a:latin typeface="Calibri" pitchFamily="34" charset="0"/>
+                <a:ea typeface="Calibri" pitchFamily="34" charset="-122"/>
+                <a:cs typeface="Calibri" pitchFamily="34" charset="-120"/>
+              </a:rPr>
+              <a:t>1</a:t>
+            </a:r>
+            <a:endParaRPr lang="en-US" sz="2200" dirty="0"/>
+          </a:p>
+        </p:txBody>
+      </p:sp>
+      <p:sp>
+        <p:nvSpPr>
+          <p:cNvPr id="7" name="Text 5"/>
+          <p:cNvSpPr/>
+          <p:nvPr/>
+        </p:nvSpPr>
+        <p:spPr>
+          <a:xfrm>
+            <a:off x="1828800" y="1600200"/>
+            <a:ext cx="4023360" cy="1234440"/>
+          </a:xfrm>
+          <a:prstGeom prst="rect">
+            <a:avLst/>
+          </a:prstGeom>
+          <a:noFill/>
+          <a:ln/>
+        </p:spPr>
+        <p:txBody>
+          <a:bodyPr wrap="square" rtlCol="0" anchor="ctr"/>
+          <a:lstStyle/>
+          <a:p>
+            <a:pPr indent="0" marL="0">
+              <a:buNone/>
+            </a:pPr>
+            <a:r>
+              <a:rPr lang="en-US" sz="1700" b="1" dirty="0">
                 <a:solidFill>
                   <a:srgbClr val="FFFFFF"/>
                 </a:solidFill>
-                <a:latin typeface="Cambria" pitchFamily="34" charset="0"/>
-                <a:ea typeface="Cambria" pitchFamily="34" charset="-122"/>
-                <a:cs typeface="Cambria" pitchFamily="34" charset="-120"/>
-              </a:rPr>
-              <a:t>1</a:t>
-            </a:r>
-            <a:endParaRPr lang="en-US" sz="2400" dirty="0"/>
-          </a:p>
-        </p:txBody>
-      </p:sp>
-      <p:sp>
-        <p:nvSpPr>
-          <p:cNvPr id="5" name="Text 3"/>
-          <p:cNvSpPr/>
-          <p:nvPr/>
-        </p:nvSpPr>
-        <p:spPr>
-          <a:xfrm>
-            <a:off x="1554480" y="1554480"/>
-            <a:ext cx="4480560" cy="640080"/>
-          </a:xfrm>
-          <a:prstGeom prst="rect">
-            <a:avLst/>
-          </a:prstGeom>
-          <a:noFill/>
-          <a:ln/>
-        </p:spPr>
-        <p:txBody>
-          <a:bodyPr wrap="square" rtlCol="0" anchor="ctr"/>
-          <a:lstStyle/>
-          <a:p>
-            <a:pPr indent="0" marL="0">
-              <a:buNone/>
-            </a:pPr>
-            <a:r>
-              <a:rPr lang="en-US" sz="1800" b="1" dirty="0">
-                <a:solidFill>
-                  <a:srgbClr val="1A2330"/>
-                </a:solidFill>
                 <a:latin typeface="Calibri" pitchFamily="34" charset="0"/>
                 <a:ea typeface="Calibri" pitchFamily="34" charset="-122"/>
                 <a:cs typeface="Calibri" pitchFamily="34" charset="-120"/>
               </a:rPr>
               <a:t>Arquitectura de la solución</a:t>
             </a:r>
-            <a:endParaRPr lang="en-US" sz="1800" dirty="0"/>
-          </a:p>
-        </p:txBody>
-      </p:sp>
-      <p:sp>
-        <p:nvSpPr>
-          <p:cNvPr id="6" name="Shape 4"/>
-          <p:cNvSpPr/>
-          <p:nvPr/>
-        </p:nvSpPr>
-        <p:spPr>
-          <a:xfrm>
-            <a:off x="731520" y="3017520"/>
-            <a:ext cx="640080" cy="640080"/>
+            <a:endParaRPr lang="en-US" sz="1700" dirty="0"/>
+          </a:p>
+        </p:txBody>
+      </p:sp>
+      <p:sp>
+        <p:nvSpPr>
+          <p:cNvPr id="8" name="Shape 6"/>
+          <p:cNvSpPr/>
+          <p:nvPr/>
+        </p:nvSpPr>
+        <p:spPr>
+          <a:xfrm>
+            <a:off x="731520" y="3081528"/>
+            <a:ext cx="5257800" cy="1234440"/>
           </a:xfrm>
           <a:prstGeom prst="roundRect">
             <a:avLst>
-              <a:gd name="adj" fmla="val 14286"/>
+              <a:gd name="adj" fmla="val 7407"/>
             </a:avLst>
           </a:prstGeom>
           <a:solidFill>
-            <a:srgbClr val="1C7293"/>
+            <a:srgbClr val="163A5C"/>
           </a:solidFill>
           <a:ln w="12700">
             <a:solidFill>
-              <a:srgbClr val="1C7293"/>
+              <a:srgbClr val="2A5578"/>
             </a:solidFill>
             <a:prstDash val="solid"/>
           </a:ln>
-        </p:spPr>
-      </p:sp>
-      <p:sp>
-        <p:nvSpPr>
-          <p:cNvPr id="7" name="Text 5"/>
-          <p:cNvSpPr/>
-          <p:nvPr/>
-        </p:nvSpPr>
-        <p:spPr>
-          <a:xfrm>
-            <a:off x="731520" y="3017520"/>
-            <a:ext cx="640080" cy="640080"/>
+          <a:effectLst>
+            <a:outerShdw sx="100000" sy="100000" kx="0" ky="0" algn="bl" rotWithShape="0" blurRad="114300" dist="50800" dir="5400000">
+              <a:srgbClr val="000000">
+                <a:alpha val="45000"/>
+              </a:srgbClr>
+            </a:outerShdw>
+          </a:effectLst>
+        </p:spPr>
+      </p:sp>
+      <p:sp>
+        <p:nvSpPr>
+          <p:cNvPr id="9" name="Shape 7"/>
+          <p:cNvSpPr/>
+          <p:nvPr/>
+        </p:nvSpPr>
+        <p:spPr>
+          <a:xfrm>
+            <a:off x="1005840" y="3401568"/>
+            <a:ext cx="594360" cy="594360"/>
+          </a:xfrm>
+          <a:prstGeom prst="ellipse">
+            <a:avLst/>
+          </a:prstGeom>
+          <a:solidFill>
+            <a:srgbClr val="10D6A3"/>
+          </a:solidFill>
+          <a:ln/>
+        </p:spPr>
+      </p:sp>
+      <p:sp>
+        <p:nvSpPr>
+          <p:cNvPr id="10" name="Text 8"/>
+          <p:cNvSpPr/>
+          <p:nvPr/>
+        </p:nvSpPr>
+        <p:spPr>
+          <a:xfrm>
+            <a:off x="1005840" y="3401568"/>
+            <a:ext cx="594360" cy="594360"/>
           </a:xfrm>
           <a:prstGeom prst="rect">
             <a:avLst/>
@@ -2278,96 +2490,123 @@
               <a:buNone/>
             </a:pPr>
             <a:r>
-              <a:rPr lang="en-US" sz="2400" b="1" dirty="0">
+              <a:rPr lang="en-US" sz="2200" b="1" dirty="0">
+                <a:solidFill>
+                  <a:srgbClr val="0A1E33"/>
+                </a:solidFill>
+                <a:latin typeface="Calibri" pitchFamily="34" charset="0"/>
+                <a:ea typeface="Calibri" pitchFamily="34" charset="-122"/>
+                <a:cs typeface="Calibri" pitchFamily="34" charset="-120"/>
+              </a:rPr>
+              <a:t>2</a:t>
+            </a:r>
+            <a:endParaRPr lang="en-US" sz="2200" dirty="0"/>
+          </a:p>
+        </p:txBody>
+      </p:sp>
+      <p:sp>
+        <p:nvSpPr>
+          <p:cNvPr id="11" name="Text 9"/>
+          <p:cNvSpPr/>
+          <p:nvPr/>
+        </p:nvSpPr>
+        <p:spPr>
+          <a:xfrm>
+            <a:off x="1828800" y="3081528"/>
+            <a:ext cx="4023360" cy="1234440"/>
+          </a:xfrm>
+          <a:prstGeom prst="rect">
+            <a:avLst/>
+          </a:prstGeom>
+          <a:noFill/>
+          <a:ln/>
+        </p:spPr>
+        <p:txBody>
+          <a:bodyPr wrap="square" rtlCol="0" anchor="ctr"/>
+          <a:lstStyle/>
+          <a:p>
+            <a:pPr indent="0" marL="0">
+              <a:buNone/>
+            </a:pPr>
+            <a:r>
+              <a:rPr lang="en-US" sz="1700" b="1" dirty="0">
                 <a:solidFill>
                   <a:srgbClr val="FFFFFF"/>
                 </a:solidFill>
-                <a:latin typeface="Cambria" pitchFamily="34" charset="0"/>
-                <a:ea typeface="Cambria" pitchFamily="34" charset="-122"/>
-                <a:cs typeface="Cambria" pitchFamily="34" charset="-120"/>
-              </a:rPr>
-              <a:t>2</a:t>
-            </a:r>
-            <a:endParaRPr lang="en-US" sz="2400" dirty="0"/>
-          </a:p>
-        </p:txBody>
-      </p:sp>
-      <p:sp>
-        <p:nvSpPr>
-          <p:cNvPr id="8" name="Text 6"/>
-          <p:cNvSpPr/>
-          <p:nvPr/>
-        </p:nvSpPr>
-        <p:spPr>
-          <a:xfrm>
-            <a:off x="1554480" y="3017520"/>
-            <a:ext cx="4480560" cy="640080"/>
-          </a:xfrm>
-          <a:prstGeom prst="rect">
-            <a:avLst/>
-          </a:prstGeom>
-          <a:noFill/>
-          <a:ln/>
-        </p:spPr>
-        <p:txBody>
-          <a:bodyPr wrap="square" rtlCol="0" anchor="ctr"/>
-          <a:lstStyle/>
-          <a:p>
-            <a:pPr indent="0" marL="0">
-              <a:buNone/>
-            </a:pPr>
-            <a:r>
-              <a:rPr lang="en-US" sz="1800" b="1" dirty="0">
-                <a:solidFill>
-                  <a:srgbClr val="1A2330"/>
-                </a:solidFill>
                 <a:latin typeface="Calibri" pitchFamily="34" charset="0"/>
                 <a:ea typeface="Calibri" pitchFamily="34" charset="-122"/>
                 <a:cs typeface="Calibri" pitchFamily="34" charset="-120"/>
               </a:rPr>
               <a:t>Contenerización (Docker)</a:t>
             </a:r>
-            <a:endParaRPr lang="en-US" sz="1800" dirty="0"/>
-          </a:p>
-        </p:txBody>
-      </p:sp>
-      <p:sp>
-        <p:nvSpPr>
-          <p:cNvPr id="9" name="Shape 7"/>
-          <p:cNvSpPr/>
-          <p:nvPr/>
-        </p:nvSpPr>
-        <p:spPr>
-          <a:xfrm>
-            <a:off x="731520" y="4480560"/>
-            <a:ext cx="640080" cy="640080"/>
+            <a:endParaRPr lang="en-US" sz="1700" dirty="0"/>
+          </a:p>
+        </p:txBody>
+      </p:sp>
+      <p:sp>
+        <p:nvSpPr>
+          <p:cNvPr id="12" name="Shape 10"/>
+          <p:cNvSpPr/>
+          <p:nvPr/>
+        </p:nvSpPr>
+        <p:spPr>
+          <a:xfrm>
+            <a:off x="731520" y="4562856"/>
+            <a:ext cx="5257800" cy="1234440"/>
           </a:xfrm>
           <a:prstGeom prst="roundRect">
             <a:avLst>
-              <a:gd name="adj" fmla="val 14286"/>
+              <a:gd name="adj" fmla="val 7407"/>
             </a:avLst>
           </a:prstGeom>
           <a:solidFill>
-            <a:srgbClr val="1C7293"/>
+            <a:srgbClr val="163A5C"/>
           </a:solidFill>
           <a:ln w="12700">
             <a:solidFill>
-              <a:srgbClr val="1C7293"/>
+              <a:srgbClr val="2A5578"/>
             </a:solidFill>
             <a:prstDash val="solid"/>
           </a:ln>
-        </p:spPr>
-      </p:sp>
-      <p:sp>
-        <p:nvSpPr>
-          <p:cNvPr id="10" name="Text 8"/>
-          <p:cNvSpPr/>
-          <p:nvPr/>
-        </p:nvSpPr>
-        <p:spPr>
-          <a:xfrm>
-            <a:off x="731520" y="4480560"/>
-            <a:ext cx="640080" cy="640080"/>
+          <a:effectLst>
+            <a:outerShdw sx="100000" sy="100000" kx="0" ky="0" algn="bl" rotWithShape="0" blurRad="114300" dist="50800" dir="5400000">
+              <a:srgbClr val="000000">
+                <a:alpha val="45000"/>
+              </a:srgbClr>
+            </a:outerShdw>
+          </a:effectLst>
+        </p:spPr>
+      </p:sp>
+      <p:sp>
+        <p:nvSpPr>
+          <p:cNvPr id="13" name="Shape 11"/>
+          <p:cNvSpPr/>
+          <p:nvPr/>
+        </p:nvSpPr>
+        <p:spPr>
+          <a:xfrm>
+            <a:off x="1005840" y="4882896"/>
+            <a:ext cx="594360" cy="594360"/>
+          </a:xfrm>
+          <a:prstGeom prst="ellipse">
+            <a:avLst/>
+          </a:prstGeom>
+          <a:solidFill>
+            <a:srgbClr val="10D6A3"/>
+          </a:solidFill>
+          <a:ln/>
+        </p:spPr>
+      </p:sp>
+      <p:sp>
+        <p:nvSpPr>
+          <p:cNvPr id="14" name="Text 12"/>
+          <p:cNvSpPr/>
+          <p:nvPr/>
+        </p:nvSpPr>
+        <p:spPr>
+          <a:xfrm>
+            <a:off x="1005840" y="4882896"/>
+            <a:ext cx="594360" cy="594360"/>
           </a:xfrm>
           <a:prstGeom prst="rect">
             <a:avLst/>
@@ -2383,96 +2622,123 @@
               <a:buNone/>
             </a:pPr>
             <a:r>
-              <a:rPr lang="en-US" sz="2400" b="1" dirty="0">
+              <a:rPr lang="en-US" sz="2200" b="1" dirty="0">
+                <a:solidFill>
+                  <a:srgbClr val="0A1E33"/>
+                </a:solidFill>
+                <a:latin typeface="Calibri" pitchFamily="34" charset="0"/>
+                <a:ea typeface="Calibri" pitchFamily="34" charset="-122"/>
+                <a:cs typeface="Calibri" pitchFamily="34" charset="-120"/>
+              </a:rPr>
+              <a:t>3</a:t>
+            </a:r>
+            <a:endParaRPr lang="en-US" sz="2200" dirty="0"/>
+          </a:p>
+        </p:txBody>
+      </p:sp>
+      <p:sp>
+        <p:nvSpPr>
+          <p:cNvPr id="15" name="Text 13"/>
+          <p:cNvSpPr/>
+          <p:nvPr/>
+        </p:nvSpPr>
+        <p:spPr>
+          <a:xfrm>
+            <a:off x="1828800" y="4562856"/>
+            <a:ext cx="4023360" cy="1234440"/>
+          </a:xfrm>
+          <a:prstGeom prst="rect">
+            <a:avLst/>
+          </a:prstGeom>
+          <a:noFill/>
+          <a:ln/>
+        </p:spPr>
+        <p:txBody>
+          <a:bodyPr wrap="square" rtlCol="0" anchor="ctr"/>
+          <a:lstStyle/>
+          <a:p>
+            <a:pPr indent="0" marL="0">
+              <a:buNone/>
+            </a:pPr>
+            <a:r>
+              <a:rPr lang="en-US" sz="1700" b="1" dirty="0">
                 <a:solidFill>
                   <a:srgbClr val="FFFFFF"/>
                 </a:solidFill>
-                <a:latin typeface="Cambria" pitchFamily="34" charset="0"/>
-                <a:ea typeface="Cambria" pitchFamily="34" charset="-122"/>
-                <a:cs typeface="Cambria" pitchFamily="34" charset="-120"/>
-              </a:rPr>
-              <a:t>3</a:t>
-            </a:r>
-            <a:endParaRPr lang="en-US" sz="2400" dirty="0"/>
-          </a:p>
-        </p:txBody>
-      </p:sp>
-      <p:sp>
-        <p:nvSpPr>
-          <p:cNvPr id="11" name="Text 9"/>
-          <p:cNvSpPr/>
-          <p:nvPr/>
-        </p:nvSpPr>
-        <p:spPr>
-          <a:xfrm>
-            <a:off x="1554480" y="4480560"/>
-            <a:ext cx="4480560" cy="640080"/>
-          </a:xfrm>
-          <a:prstGeom prst="rect">
-            <a:avLst/>
-          </a:prstGeom>
-          <a:noFill/>
-          <a:ln/>
-        </p:spPr>
-        <p:txBody>
-          <a:bodyPr wrap="square" rtlCol="0" anchor="ctr"/>
-          <a:lstStyle/>
-          <a:p>
-            <a:pPr indent="0" marL="0">
-              <a:buNone/>
-            </a:pPr>
-            <a:r>
-              <a:rPr lang="en-US" sz="1800" b="1" dirty="0">
-                <a:solidFill>
-                  <a:srgbClr val="1A2330"/>
-                </a:solidFill>
                 <a:latin typeface="Calibri" pitchFamily="34" charset="0"/>
                 <a:ea typeface="Calibri" pitchFamily="34" charset="-122"/>
                 <a:cs typeface="Calibri" pitchFamily="34" charset="-120"/>
               </a:rPr>
               <a:t>Pipeline CI/CD</a:t>
             </a:r>
-            <a:endParaRPr lang="en-US" sz="1800" dirty="0"/>
-          </a:p>
-        </p:txBody>
-      </p:sp>
-      <p:sp>
-        <p:nvSpPr>
-          <p:cNvPr id="12" name="Shape 10"/>
-          <p:cNvSpPr/>
-          <p:nvPr/>
-        </p:nvSpPr>
-        <p:spPr>
-          <a:xfrm>
-            <a:off x="6309360" y="1554480"/>
-            <a:ext cx="640080" cy="640080"/>
+            <a:endParaRPr lang="en-US" sz="1700" dirty="0"/>
+          </a:p>
+        </p:txBody>
+      </p:sp>
+      <p:sp>
+        <p:nvSpPr>
+          <p:cNvPr id="16" name="Shape 14"/>
+          <p:cNvSpPr/>
+          <p:nvPr/>
+        </p:nvSpPr>
+        <p:spPr>
+          <a:xfrm>
+            <a:off x="6355080" y="1600200"/>
+            <a:ext cx="5257800" cy="1234440"/>
           </a:xfrm>
           <a:prstGeom prst="roundRect">
             <a:avLst>
-              <a:gd name="adj" fmla="val 14286"/>
+              <a:gd name="adj" fmla="val 7407"/>
             </a:avLst>
           </a:prstGeom>
           <a:solidFill>
-            <a:srgbClr val="1C7293"/>
+            <a:srgbClr val="163A5C"/>
           </a:solidFill>
           <a:ln w="12700">
             <a:solidFill>
-              <a:srgbClr val="1C7293"/>
+              <a:srgbClr val="2A5578"/>
             </a:solidFill>
             <a:prstDash val="solid"/>
           </a:ln>
-        </p:spPr>
-      </p:sp>
-      <p:sp>
-        <p:nvSpPr>
-          <p:cNvPr id="13" name="Text 11"/>
-          <p:cNvSpPr/>
-          <p:nvPr/>
-        </p:nvSpPr>
-        <p:spPr>
-          <a:xfrm>
-            <a:off x="6309360" y="1554480"/>
-            <a:ext cx="640080" cy="640080"/>
+          <a:effectLst>
+            <a:outerShdw sx="100000" sy="100000" kx="0" ky="0" algn="bl" rotWithShape="0" blurRad="114300" dist="50800" dir="5400000">
+              <a:srgbClr val="000000">
+                <a:alpha val="45000"/>
+              </a:srgbClr>
+            </a:outerShdw>
+          </a:effectLst>
+        </p:spPr>
+      </p:sp>
+      <p:sp>
+        <p:nvSpPr>
+          <p:cNvPr id="17" name="Shape 15"/>
+          <p:cNvSpPr/>
+          <p:nvPr/>
+        </p:nvSpPr>
+        <p:spPr>
+          <a:xfrm>
+            <a:off x="6629400" y="1920240"/>
+            <a:ext cx="594360" cy="594360"/>
+          </a:xfrm>
+          <a:prstGeom prst="ellipse">
+            <a:avLst/>
+          </a:prstGeom>
+          <a:solidFill>
+            <a:srgbClr val="3AA0B8"/>
+          </a:solidFill>
+          <a:ln/>
+        </p:spPr>
+      </p:sp>
+      <p:sp>
+        <p:nvSpPr>
+          <p:cNvPr id="18" name="Text 16"/>
+          <p:cNvSpPr/>
+          <p:nvPr/>
+        </p:nvSpPr>
+        <p:spPr>
+          <a:xfrm>
+            <a:off x="6629400" y="1920240"/>
+            <a:ext cx="594360" cy="594360"/>
           </a:xfrm>
           <a:prstGeom prst="rect">
             <a:avLst/>
@@ -2488,96 +2754,123 @@
               <a:buNone/>
             </a:pPr>
             <a:r>
-              <a:rPr lang="en-US" sz="2400" b="1" dirty="0">
+              <a:rPr lang="en-US" sz="2200" b="1" dirty="0">
+                <a:solidFill>
+                  <a:srgbClr val="0A1E33"/>
+                </a:solidFill>
+                <a:latin typeface="Calibri" pitchFamily="34" charset="0"/>
+                <a:ea typeface="Calibri" pitchFamily="34" charset="-122"/>
+                <a:cs typeface="Calibri" pitchFamily="34" charset="-120"/>
+              </a:rPr>
+              <a:t>4</a:t>
+            </a:r>
+            <a:endParaRPr lang="en-US" sz="2200" dirty="0"/>
+          </a:p>
+        </p:txBody>
+      </p:sp>
+      <p:sp>
+        <p:nvSpPr>
+          <p:cNvPr id="19" name="Text 17"/>
+          <p:cNvSpPr/>
+          <p:nvPr/>
+        </p:nvSpPr>
+        <p:spPr>
+          <a:xfrm>
+            <a:off x="7452360" y="1600200"/>
+            <a:ext cx="4023360" cy="1234440"/>
+          </a:xfrm>
+          <a:prstGeom prst="rect">
+            <a:avLst/>
+          </a:prstGeom>
+          <a:noFill/>
+          <a:ln/>
+        </p:spPr>
+        <p:txBody>
+          <a:bodyPr wrap="square" rtlCol="0" anchor="ctr"/>
+          <a:lstStyle/>
+          <a:p>
+            <a:pPr indent="0" marL="0">
+              <a:buNone/>
+            </a:pPr>
+            <a:r>
+              <a:rPr lang="en-US" sz="1700" b="1" dirty="0">
                 <a:solidFill>
                   <a:srgbClr val="FFFFFF"/>
                 </a:solidFill>
-                <a:latin typeface="Cambria" pitchFamily="34" charset="0"/>
-                <a:ea typeface="Cambria" pitchFamily="34" charset="-122"/>
-                <a:cs typeface="Cambria" pitchFamily="34" charset="-120"/>
-              </a:rPr>
-              <a:t>4</a:t>
-            </a:r>
-            <a:endParaRPr lang="en-US" sz="2400" dirty="0"/>
-          </a:p>
-        </p:txBody>
-      </p:sp>
-      <p:sp>
-        <p:nvSpPr>
-          <p:cNvPr id="14" name="Text 12"/>
-          <p:cNvSpPr/>
-          <p:nvPr/>
-        </p:nvSpPr>
-        <p:spPr>
-          <a:xfrm>
-            <a:off x="7132320" y="1554480"/>
-            <a:ext cx="4480560" cy="640080"/>
-          </a:xfrm>
-          <a:prstGeom prst="rect">
-            <a:avLst/>
-          </a:prstGeom>
-          <a:noFill/>
-          <a:ln/>
-        </p:spPr>
-        <p:txBody>
-          <a:bodyPr wrap="square" rtlCol="0" anchor="ctr"/>
-          <a:lstStyle/>
-          <a:p>
-            <a:pPr indent="0" marL="0">
-              <a:buNone/>
-            </a:pPr>
-            <a:r>
-              <a:rPr lang="en-US" sz="1800" b="1" dirty="0">
-                <a:solidFill>
-                  <a:srgbClr val="1A2330"/>
-                </a:solidFill>
                 <a:latin typeface="Calibri" pitchFamily="34" charset="0"/>
                 <a:ea typeface="Calibri" pitchFamily="34" charset="-122"/>
                 <a:cs typeface="Calibri" pitchFamily="34" charset="-120"/>
               </a:rPr>
               <a:t>Despliegue en la nube (ECR + EKS)</a:t>
             </a:r>
-            <a:endParaRPr lang="en-US" sz="1800" dirty="0"/>
-          </a:p>
-        </p:txBody>
-      </p:sp>
-      <p:sp>
-        <p:nvSpPr>
-          <p:cNvPr id="15" name="Shape 13"/>
-          <p:cNvSpPr/>
-          <p:nvPr/>
-        </p:nvSpPr>
-        <p:spPr>
-          <a:xfrm>
-            <a:off x="6309360" y="3017520"/>
-            <a:ext cx="640080" cy="640080"/>
+            <a:endParaRPr lang="en-US" sz="1700" dirty="0"/>
+          </a:p>
+        </p:txBody>
+      </p:sp>
+      <p:sp>
+        <p:nvSpPr>
+          <p:cNvPr id="20" name="Shape 18"/>
+          <p:cNvSpPr/>
+          <p:nvPr/>
+        </p:nvSpPr>
+        <p:spPr>
+          <a:xfrm>
+            <a:off x="6355080" y="3081528"/>
+            <a:ext cx="5257800" cy="1234440"/>
           </a:xfrm>
           <a:prstGeom prst="roundRect">
             <a:avLst>
-              <a:gd name="adj" fmla="val 14286"/>
+              <a:gd name="adj" fmla="val 7407"/>
             </a:avLst>
           </a:prstGeom>
           <a:solidFill>
-            <a:srgbClr val="1C7293"/>
+            <a:srgbClr val="163A5C"/>
           </a:solidFill>
           <a:ln w="12700">
             <a:solidFill>
-              <a:srgbClr val="1C7293"/>
+              <a:srgbClr val="2A5578"/>
             </a:solidFill>
             <a:prstDash val="solid"/>
           </a:ln>
-        </p:spPr>
-      </p:sp>
-      <p:sp>
-        <p:nvSpPr>
-          <p:cNvPr id="16" name="Text 14"/>
-          <p:cNvSpPr/>
-          <p:nvPr/>
-        </p:nvSpPr>
-        <p:spPr>
-          <a:xfrm>
-            <a:off x="6309360" y="3017520"/>
-            <a:ext cx="640080" cy="640080"/>
+          <a:effectLst>
+            <a:outerShdw sx="100000" sy="100000" kx="0" ky="0" algn="bl" rotWithShape="0" blurRad="114300" dist="50800" dir="5400000">
+              <a:srgbClr val="000000">
+                <a:alpha val="45000"/>
+              </a:srgbClr>
+            </a:outerShdw>
+          </a:effectLst>
+        </p:spPr>
+      </p:sp>
+      <p:sp>
+        <p:nvSpPr>
+          <p:cNvPr id="21" name="Shape 19"/>
+          <p:cNvSpPr/>
+          <p:nvPr/>
+        </p:nvSpPr>
+        <p:spPr>
+          <a:xfrm>
+            <a:off x="6629400" y="3401568"/>
+            <a:ext cx="594360" cy="594360"/>
+          </a:xfrm>
+          <a:prstGeom prst="ellipse">
+            <a:avLst/>
+          </a:prstGeom>
+          <a:solidFill>
+            <a:srgbClr val="3AA0B8"/>
+          </a:solidFill>
+          <a:ln/>
+        </p:spPr>
+      </p:sp>
+      <p:sp>
+        <p:nvSpPr>
+          <p:cNvPr id="22" name="Text 20"/>
+          <p:cNvSpPr/>
+          <p:nvPr/>
+        </p:nvSpPr>
+        <p:spPr>
+          <a:xfrm>
+            <a:off x="6629400" y="3401568"/>
+            <a:ext cx="594360" cy="594360"/>
           </a:xfrm>
           <a:prstGeom prst="rect">
             <a:avLst/>
@@ -2593,96 +2886,123 @@
               <a:buNone/>
             </a:pPr>
             <a:r>
-              <a:rPr lang="en-US" sz="2400" b="1" dirty="0">
+              <a:rPr lang="en-US" sz="2200" b="1" dirty="0">
+                <a:solidFill>
+                  <a:srgbClr val="0A1E33"/>
+                </a:solidFill>
+                <a:latin typeface="Calibri" pitchFamily="34" charset="0"/>
+                <a:ea typeface="Calibri" pitchFamily="34" charset="-122"/>
+                <a:cs typeface="Calibri" pitchFamily="34" charset="-120"/>
+              </a:rPr>
+              <a:t>5</a:t>
+            </a:r>
+            <a:endParaRPr lang="en-US" sz="2200" dirty="0"/>
+          </a:p>
+        </p:txBody>
+      </p:sp>
+      <p:sp>
+        <p:nvSpPr>
+          <p:cNvPr id="23" name="Text 21"/>
+          <p:cNvSpPr/>
+          <p:nvPr/>
+        </p:nvSpPr>
+        <p:spPr>
+          <a:xfrm>
+            <a:off x="7452360" y="3081528"/>
+            <a:ext cx="4023360" cy="1234440"/>
+          </a:xfrm>
+          <a:prstGeom prst="rect">
+            <a:avLst/>
+          </a:prstGeom>
+          <a:noFill/>
+          <a:ln/>
+        </p:spPr>
+        <p:txBody>
+          <a:bodyPr wrap="square" rtlCol="0" anchor="ctr"/>
+          <a:lstStyle/>
+          <a:p>
+            <a:pPr indent="0" marL="0">
+              <a:buNone/>
+            </a:pPr>
+            <a:r>
+              <a:rPr lang="en-US" sz="1700" b="1" dirty="0">
                 <a:solidFill>
                   <a:srgbClr val="FFFFFF"/>
                 </a:solidFill>
-                <a:latin typeface="Cambria" pitchFamily="34" charset="0"/>
-                <a:ea typeface="Cambria" pitchFamily="34" charset="-122"/>
-                <a:cs typeface="Cambria" pitchFamily="34" charset="-120"/>
-              </a:rPr>
-              <a:t>5</a:t>
-            </a:r>
-            <a:endParaRPr lang="en-US" sz="2400" dirty="0"/>
-          </a:p>
-        </p:txBody>
-      </p:sp>
-      <p:sp>
-        <p:nvSpPr>
-          <p:cNvPr id="17" name="Text 15"/>
-          <p:cNvSpPr/>
-          <p:nvPr/>
-        </p:nvSpPr>
-        <p:spPr>
-          <a:xfrm>
-            <a:off x="7132320" y="3017520"/>
-            <a:ext cx="4480560" cy="640080"/>
-          </a:xfrm>
-          <a:prstGeom prst="rect">
-            <a:avLst/>
-          </a:prstGeom>
-          <a:noFill/>
-          <a:ln/>
-        </p:spPr>
-        <p:txBody>
-          <a:bodyPr wrap="square" rtlCol="0" anchor="ctr"/>
-          <a:lstStyle/>
-          <a:p>
-            <a:pPr indent="0" marL="0">
-              <a:buNone/>
-            </a:pPr>
-            <a:r>
-              <a:rPr lang="en-US" sz="1800" b="1" dirty="0">
-                <a:solidFill>
-                  <a:srgbClr val="1A2330"/>
-                </a:solidFill>
                 <a:latin typeface="Calibri" pitchFamily="34" charset="0"/>
                 <a:ea typeface="Calibri" pitchFamily="34" charset="-122"/>
                 <a:cs typeface="Calibri" pitchFamily="34" charset="-120"/>
               </a:rPr>
               <a:t>Orquestación y escalabilidad</a:t>
             </a:r>
-            <a:endParaRPr lang="en-US" sz="1800" dirty="0"/>
-          </a:p>
-        </p:txBody>
-      </p:sp>
-      <p:sp>
-        <p:nvSpPr>
-          <p:cNvPr id="18" name="Shape 16"/>
-          <p:cNvSpPr/>
-          <p:nvPr/>
-        </p:nvSpPr>
-        <p:spPr>
-          <a:xfrm>
-            <a:off x="6309360" y="4480560"/>
-            <a:ext cx="640080" cy="640080"/>
+            <a:endParaRPr lang="en-US" sz="1700" dirty="0"/>
+          </a:p>
+        </p:txBody>
+      </p:sp>
+      <p:sp>
+        <p:nvSpPr>
+          <p:cNvPr id="24" name="Shape 22"/>
+          <p:cNvSpPr/>
+          <p:nvPr/>
+        </p:nvSpPr>
+        <p:spPr>
+          <a:xfrm>
+            <a:off x="6355080" y="4562856"/>
+            <a:ext cx="5257800" cy="1234440"/>
           </a:xfrm>
           <a:prstGeom prst="roundRect">
             <a:avLst>
-              <a:gd name="adj" fmla="val 14286"/>
+              <a:gd name="adj" fmla="val 7407"/>
             </a:avLst>
           </a:prstGeom>
           <a:solidFill>
-            <a:srgbClr val="1C7293"/>
+            <a:srgbClr val="163A5C"/>
           </a:solidFill>
           <a:ln w="12700">
             <a:solidFill>
-              <a:srgbClr val="1C7293"/>
+              <a:srgbClr val="2A5578"/>
             </a:solidFill>
             <a:prstDash val="solid"/>
           </a:ln>
-        </p:spPr>
-      </p:sp>
-      <p:sp>
-        <p:nvSpPr>
-          <p:cNvPr id="19" name="Text 17"/>
-          <p:cNvSpPr/>
-          <p:nvPr/>
-        </p:nvSpPr>
-        <p:spPr>
-          <a:xfrm>
-            <a:off x="6309360" y="4480560"/>
-            <a:ext cx="640080" cy="640080"/>
+          <a:effectLst>
+            <a:outerShdw sx="100000" sy="100000" kx="0" ky="0" algn="bl" rotWithShape="0" blurRad="114300" dist="50800" dir="5400000">
+              <a:srgbClr val="000000">
+                <a:alpha val="45000"/>
+              </a:srgbClr>
+            </a:outerShdw>
+          </a:effectLst>
+        </p:spPr>
+      </p:sp>
+      <p:sp>
+        <p:nvSpPr>
+          <p:cNvPr id="25" name="Shape 23"/>
+          <p:cNvSpPr/>
+          <p:nvPr/>
+        </p:nvSpPr>
+        <p:spPr>
+          <a:xfrm>
+            <a:off x="6629400" y="4882896"/>
+            <a:ext cx="594360" cy="594360"/>
+          </a:xfrm>
+          <a:prstGeom prst="ellipse">
+            <a:avLst/>
+          </a:prstGeom>
+          <a:solidFill>
+            <a:srgbClr val="3AA0B8"/>
+          </a:solidFill>
+          <a:ln/>
+        </p:spPr>
+      </p:sp>
+      <p:sp>
+        <p:nvSpPr>
+          <p:cNvPr id="26" name="Text 24"/>
+          <p:cNvSpPr/>
+          <p:nvPr/>
+        </p:nvSpPr>
+        <p:spPr>
+          <a:xfrm>
+            <a:off x="6629400" y="4882896"/>
+            <a:ext cx="594360" cy="594360"/>
           </a:xfrm>
           <a:prstGeom prst="rect">
             <a:avLst/>
@@ -2698,56 +3018,56 @@
               <a:buNone/>
             </a:pPr>
             <a:r>
-              <a:rPr lang="en-US" sz="2400" b="1" dirty="0">
+              <a:rPr lang="en-US" sz="2200" b="1" dirty="0">
+                <a:solidFill>
+                  <a:srgbClr val="0A1E33"/>
+                </a:solidFill>
+                <a:latin typeface="Calibri" pitchFamily="34" charset="0"/>
+                <a:ea typeface="Calibri" pitchFamily="34" charset="-122"/>
+                <a:cs typeface="Calibri" pitchFamily="34" charset="-120"/>
+              </a:rPr>
+              <a:t>6</a:t>
+            </a:r>
+            <a:endParaRPr lang="en-US" sz="2200" dirty="0"/>
+          </a:p>
+        </p:txBody>
+      </p:sp>
+      <p:sp>
+        <p:nvSpPr>
+          <p:cNvPr id="27" name="Text 25"/>
+          <p:cNvSpPr/>
+          <p:nvPr/>
+        </p:nvSpPr>
+        <p:spPr>
+          <a:xfrm>
+            <a:off x="7452360" y="4562856"/>
+            <a:ext cx="4023360" cy="1234440"/>
+          </a:xfrm>
+          <a:prstGeom prst="rect">
+            <a:avLst/>
+          </a:prstGeom>
+          <a:noFill/>
+          <a:ln/>
+        </p:spPr>
+        <p:txBody>
+          <a:bodyPr wrap="square" rtlCol="0" anchor="ctr"/>
+          <a:lstStyle/>
+          <a:p>
+            <a:pPr indent="0" marL="0">
+              <a:buNone/>
+            </a:pPr>
+            <a:r>
+              <a:rPr lang="en-US" sz="1700" b="1" dirty="0">
                 <a:solidFill>
                   <a:srgbClr val="FFFFFF"/>
                 </a:solidFill>
-                <a:latin typeface="Cambria" pitchFamily="34" charset="0"/>
-                <a:ea typeface="Cambria" pitchFamily="34" charset="-122"/>
-                <a:cs typeface="Cambria" pitchFamily="34" charset="-120"/>
-              </a:rPr>
-              <a:t>6</a:t>
-            </a:r>
-            <a:endParaRPr lang="en-US" sz="2400" dirty="0"/>
-          </a:p>
-        </p:txBody>
-      </p:sp>
-      <p:sp>
-        <p:nvSpPr>
-          <p:cNvPr id="20" name="Text 18"/>
-          <p:cNvSpPr/>
-          <p:nvPr/>
-        </p:nvSpPr>
-        <p:spPr>
-          <a:xfrm>
-            <a:off x="7132320" y="4480560"/>
-            <a:ext cx="4480560" cy="640080"/>
-          </a:xfrm>
-          <a:prstGeom prst="rect">
-            <a:avLst/>
-          </a:prstGeom>
-          <a:noFill/>
-          <a:ln/>
-        </p:spPr>
-        <p:txBody>
-          <a:bodyPr wrap="square" rtlCol="0" anchor="ctr"/>
-          <a:lstStyle/>
-          <a:p>
-            <a:pPr indent="0" marL="0">
-              <a:buNone/>
-            </a:pPr>
-            <a:r>
-              <a:rPr lang="en-US" sz="1800" b="1" dirty="0">
-                <a:solidFill>
-                  <a:srgbClr val="1A2330"/>
-                </a:solidFill>
                 <a:latin typeface="Calibri" pitchFamily="34" charset="0"/>
                 <a:ea typeface="Calibri" pitchFamily="34" charset="-122"/>
                 <a:cs typeface="Calibri" pitchFamily="34" charset="-120"/>
               </a:rPr>
               <a:t>Seguridad y observabilidad</a:t>
             </a:r>
-            <a:endParaRPr lang="en-US" sz="1800" dirty="0"/>
+            <a:endParaRPr lang="en-US" sz="1700" dirty="0"/>
           </a:p>
         </p:txBody>
       </p:sp>
@@ -2765,7 +3085,7 @@
     <p:bg>
       <p:bgPr>
         <a:solidFill>
-          <a:srgbClr val="FFFFFF"/>
+          <a:srgbClr val="0A1E33"/>
         </a:solidFill>
       </p:bgPr>
     </p:bg>
@@ -2785,119 +3105,207 @@
       </p:grpSpPr>
       <p:sp>
         <p:nvSpPr>
-          <p:cNvPr id="2" name="Text 0"/>
-          <p:cNvSpPr/>
-          <p:nvPr/>
-        </p:nvSpPr>
-        <p:spPr>
-          <a:xfrm>
-            <a:off x="548640" y="365760"/>
-            <a:ext cx="11064240" cy="731520"/>
-          </a:xfrm>
-          <a:prstGeom prst="rect">
-            <a:avLst/>
-          </a:prstGeom>
-          <a:noFill/>
-          <a:ln/>
-        </p:spPr>
-        <p:txBody>
-          <a:bodyPr wrap="square" rtlCol="0" anchor="ctr"/>
-          <a:lstStyle/>
-          <a:p>
-            <a:pPr indent="0" marL="0">
-              <a:buNone/>
-            </a:pPr>
-            <a:r>
-              <a:rPr lang="en-US" sz="3200" b="1" dirty="0">
-                <a:solidFill>
-                  <a:srgbClr val="13315C"/>
-                </a:solidFill>
-                <a:latin typeface="Cambria" pitchFamily="34" charset="0"/>
-                <a:ea typeface="Cambria" pitchFamily="34" charset="-122"/>
-                <a:cs typeface="Cambria" pitchFamily="34" charset="-120"/>
-              </a:rPr>
-              <a:t>Arquitectura de la solución</a:t>
-            </a:r>
-            <a:endParaRPr lang="en-US" sz="3200" dirty="0"/>
-          </a:p>
-        </p:txBody>
-      </p:sp>
-      <p:sp>
-        <p:nvSpPr>
-          <p:cNvPr id="3" name="Text 1"/>
-          <p:cNvSpPr/>
-          <p:nvPr/>
-        </p:nvSpPr>
-        <p:spPr>
-          <a:xfrm>
-            <a:off x="548640" y="1188720"/>
-            <a:ext cx="11064240" cy="731520"/>
-          </a:xfrm>
-          <a:prstGeom prst="rect">
-            <a:avLst/>
-          </a:prstGeom>
-          <a:noFill/>
-          <a:ln/>
-        </p:spPr>
-        <p:txBody>
-          <a:bodyPr wrap="square" rtlCol="0" anchor="ctr"/>
-          <a:lstStyle/>
-          <a:p>
-            <a:pPr indent="0" marL="0">
-              <a:buNone/>
-            </a:pPr>
-            <a:r>
-              <a:rPr lang="en-US" sz="1500" dirty="0">
-                <a:solidFill>
-                  <a:srgbClr val="5A6B7B"/>
-                </a:solidFill>
-                <a:latin typeface="Calibri" pitchFamily="34" charset="0"/>
-                <a:ea typeface="Calibri" pitchFamily="34" charset="-122"/>
-                <a:cs typeface="Calibri" pitchFamily="34" charset="-120"/>
-              </a:rPr>
-              <a:t>La plataforma tiene tres capas que se comunican entre sí. El usuario entra por un LoadBalancer; el frontend (nginx) hace de proxy hacia el backend; el backend consulta la base de datos.</a:t>
-            </a:r>
-            <a:endParaRPr lang="en-US" sz="1500" dirty="0"/>
-          </a:p>
-        </p:txBody>
-      </p:sp>
-      <p:sp>
-        <p:nvSpPr>
-          <p:cNvPr id="4" name="Shape 2"/>
-          <p:cNvSpPr/>
-          <p:nvPr/>
-        </p:nvSpPr>
-        <p:spPr>
-          <a:xfrm>
-            <a:off x="548640" y="2926080"/>
-            <a:ext cx="1920240" cy="1371600"/>
+          <p:cNvPr id="2" name="Shape 0"/>
+          <p:cNvSpPr/>
+          <p:nvPr/>
+        </p:nvSpPr>
+        <p:spPr>
+          <a:xfrm>
+            <a:off x="9418320" y="-2011680"/>
+            <a:ext cx="5029200" cy="5029200"/>
+          </a:xfrm>
+          <a:prstGeom prst="ellipse">
+            <a:avLst/>
+          </a:prstGeom>
+          <a:solidFill>
+            <a:srgbClr val="102A46"/>
+          </a:solidFill>
+          <a:ln/>
+        </p:spPr>
+      </p:sp>
+      <p:sp>
+        <p:nvSpPr>
+          <p:cNvPr id="3" name="Shape 1"/>
+          <p:cNvSpPr/>
+          <p:nvPr/>
+        </p:nvSpPr>
+        <p:spPr>
+          <a:xfrm>
+            <a:off x="548640" y="502920"/>
+            <a:ext cx="566928" cy="566928"/>
           </a:xfrm>
           <a:prstGeom prst="roundRect">
             <a:avLst>
-              <a:gd name="adj" fmla="val 8000"/>
+              <a:gd name="adj" fmla="val 50000"/>
             </a:avLst>
           </a:prstGeom>
           <a:solidFill>
-            <a:srgbClr val="F4F7FA"/>
+            <a:srgbClr val="10D6A3"/>
+          </a:solidFill>
+          <a:ln/>
+        </p:spPr>
+      </p:sp>
+      <p:sp>
+        <p:nvSpPr>
+          <p:cNvPr id="4" name="Text 2"/>
+          <p:cNvSpPr/>
+          <p:nvPr/>
+        </p:nvSpPr>
+        <p:spPr>
+          <a:xfrm>
+            <a:off x="548640" y="502920"/>
+            <a:ext cx="566928" cy="566928"/>
+          </a:xfrm>
+          <a:prstGeom prst="rect">
+            <a:avLst/>
+          </a:prstGeom>
+          <a:noFill/>
+          <a:ln/>
+        </p:spPr>
+        <p:txBody>
+          <a:bodyPr wrap="square" rtlCol="0" anchor="ctr"/>
+          <a:lstStyle/>
+          <a:p>
+            <a:pPr algn="ctr" indent="0" marL="0">
+              <a:buNone/>
+            </a:pPr>
+            <a:r>
+              <a:rPr lang="en-US" sz="2200" b="1" dirty="0">
+                <a:solidFill>
+                  <a:srgbClr val="0A1E33"/>
+                </a:solidFill>
+                <a:latin typeface="Calibri" pitchFamily="34" charset="0"/>
+                <a:ea typeface="Calibri" pitchFamily="34" charset="-122"/>
+                <a:cs typeface="Calibri" pitchFamily="34" charset="-120"/>
+              </a:rPr>
+              <a:t>1</a:t>
+            </a:r>
+            <a:endParaRPr lang="en-US" sz="2200" dirty="0"/>
+          </a:p>
+        </p:txBody>
+      </p:sp>
+      <p:sp>
+        <p:nvSpPr>
+          <p:cNvPr id="5" name="Text 3"/>
+          <p:cNvSpPr/>
+          <p:nvPr/>
+        </p:nvSpPr>
+        <p:spPr>
+          <a:xfrm>
+            <a:off x="1280160" y="457200"/>
+            <a:ext cx="10241280" cy="685800"/>
+          </a:xfrm>
+          <a:prstGeom prst="rect">
+            <a:avLst/>
+          </a:prstGeom>
+          <a:noFill/>
+          <a:ln/>
+        </p:spPr>
+        <p:txBody>
+          <a:bodyPr wrap="square" rtlCol="0" anchor="ctr"/>
+          <a:lstStyle/>
+          <a:p>
+            <a:pPr indent="0" marL="0">
+              <a:buNone/>
+            </a:pPr>
+            <a:r>
+              <a:rPr lang="en-US" sz="3000" b="1" dirty="0">
+                <a:solidFill>
+                  <a:srgbClr val="FFFFFF"/>
+                </a:solidFill>
+                <a:latin typeface="Calibri" pitchFamily="34" charset="0"/>
+                <a:ea typeface="Calibri" pitchFamily="34" charset="-122"/>
+                <a:cs typeface="Calibri" pitchFamily="34" charset="-120"/>
+              </a:rPr>
+              <a:t>Arquitectura de la solución</a:t>
+            </a:r>
+            <a:endParaRPr lang="en-US" sz="3000" dirty="0"/>
+          </a:p>
+        </p:txBody>
+      </p:sp>
+      <p:sp>
+        <p:nvSpPr>
+          <p:cNvPr id="6" name="Text 4"/>
+          <p:cNvSpPr/>
+          <p:nvPr/>
+        </p:nvSpPr>
+        <p:spPr>
+          <a:xfrm>
+            <a:off x="548640" y="1325880"/>
+            <a:ext cx="11064240" cy="640080"/>
+          </a:xfrm>
+          <a:prstGeom prst="rect">
+            <a:avLst/>
+          </a:prstGeom>
+          <a:noFill/>
+          <a:ln/>
+        </p:spPr>
+        <p:txBody>
+          <a:bodyPr wrap="square" rtlCol="0" anchor="ctr"/>
+          <a:lstStyle/>
+          <a:p>
+            <a:pPr indent="0" marL="0">
+              <a:buNone/>
+            </a:pPr>
+            <a:r>
+              <a:rPr lang="en-US" sz="1500" dirty="0">
+                <a:solidFill>
+                  <a:srgbClr val="CFE0F2"/>
+                </a:solidFill>
+                <a:latin typeface="Calibri" pitchFamily="34" charset="0"/>
+                <a:ea typeface="Calibri" pitchFamily="34" charset="-122"/>
+                <a:cs typeface="Calibri" pitchFamily="34" charset="-120"/>
+              </a:rPr>
+              <a:t>Tres capas que se comunican entre sí. El usuario entra por el LoadBalancer; nginx hace de proxy al backend; el backend consulta la base de datos.</a:t>
+            </a:r>
+            <a:endParaRPr lang="en-US" sz="1500" dirty="0"/>
+          </a:p>
+        </p:txBody>
+      </p:sp>
+      <p:sp>
+        <p:nvSpPr>
+          <p:cNvPr id="7" name="Shape 5"/>
+          <p:cNvSpPr/>
+          <p:nvPr/>
+        </p:nvSpPr>
+        <p:spPr>
+          <a:xfrm>
+            <a:off x="566928" y="3017520"/>
+            <a:ext cx="1938528" cy="1417320"/>
+          </a:xfrm>
+          <a:prstGeom prst="roundRect">
+            <a:avLst>
+              <a:gd name="adj" fmla="val 7742"/>
+            </a:avLst>
+          </a:prstGeom>
+          <a:solidFill>
+            <a:srgbClr val="102A46"/>
           </a:solidFill>
           <a:ln w="19050">
             <a:solidFill>
-              <a:srgbClr val="5A6B7B"/>
+              <a:srgbClr val="2A5578"/>
             </a:solidFill>
             <a:prstDash val="solid"/>
           </a:ln>
-        </p:spPr>
-      </p:sp>
-      <p:sp>
-        <p:nvSpPr>
-          <p:cNvPr id="5" name="Text 3"/>
-          <p:cNvSpPr/>
-          <p:nvPr/>
-        </p:nvSpPr>
-        <p:spPr>
-          <a:xfrm>
-            <a:off x="548640" y="3154680"/>
-            <a:ext cx="1920240" cy="457200"/>
+          <a:effectLst>
+            <a:outerShdw sx="100000" sy="100000" kx="0" ky="0" algn="bl" rotWithShape="0" blurRad="101600" dist="38100" dir="5400000">
+              <a:srgbClr val="000000">
+                <a:alpha val="40000"/>
+              </a:srgbClr>
+            </a:outerShdw>
+          </a:effectLst>
+        </p:spPr>
+      </p:sp>
+      <p:sp>
+        <p:nvSpPr>
+          <p:cNvPr id="8" name="Text 6"/>
+          <p:cNvSpPr/>
+          <p:nvPr/>
+        </p:nvSpPr>
+        <p:spPr>
+          <a:xfrm>
+            <a:off x="566928" y="3273552"/>
+            <a:ext cx="1938528" cy="457200"/>
           </a:xfrm>
           <a:prstGeom prst="rect">
             <a:avLst/>
@@ -2915,11 +3323,11 @@
             <a:r>
               <a:rPr lang="en-US" sz="1700" b="1" dirty="0">
                 <a:solidFill>
-                  <a:srgbClr val="1A2330"/>
-                </a:solidFill>
-                <a:latin typeface="Cambria" pitchFamily="34" charset="0"/>
-                <a:ea typeface="Cambria" pitchFamily="34" charset="-122"/>
-                <a:cs typeface="Cambria" pitchFamily="34" charset="-120"/>
+                  <a:srgbClr val="FFFFFF"/>
+                </a:solidFill>
+                <a:latin typeface="Calibri" pitchFamily="34" charset="0"/>
+                <a:ea typeface="Calibri" pitchFamily="34" charset="-122"/>
+                <a:cs typeface="Calibri" pitchFamily="34" charset="-120"/>
               </a:rPr>
               <a:t>Usuarios</a:t>
             </a:r>
@@ -2929,22 +3337,22 @@
       </p:sp>
       <p:sp>
         <p:nvSpPr>
-          <p:cNvPr id="6" name="Shape 4"/>
-          <p:cNvSpPr/>
-          <p:nvPr/>
-        </p:nvSpPr>
-        <p:spPr>
-          <a:xfrm>
-            <a:off x="2468880" y="3611880"/>
-            <a:ext cx="365760" cy="0"/>
+          <p:cNvPr id="9" name="Shape 7"/>
+          <p:cNvSpPr/>
+          <p:nvPr/>
+        </p:nvSpPr>
+        <p:spPr>
+          <a:xfrm>
+            <a:off x="2505456" y="3721608"/>
+            <a:ext cx="347472" cy="0"/>
           </a:xfrm>
           <a:prstGeom prst="line">
             <a:avLst/>
           </a:prstGeom>
           <a:noFill/>
-          <a:ln w="25400">
+          <a:ln w="31750">
             <a:solidFill>
-              <a:srgbClr val="5A6B7B"/>
+              <a:srgbClr val="10D6A3"/>
             </a:solidFill>
             <a:prstDash val="solid"/>
             <a:tailEnd type="triangle"/>
@@ -2953,41 +3361,48 @@
       </p:sp>
       <p:sp>
         <p:nvSpPr>
-          <p:cNvPr id="7" name="Shape 5"/>
-          <p:cNvSpPr/>
-          <p:nvPr/>
-        </p:nvSpPr>
-        <p:spPr>
-          <a:xfrm>
-            <a:off x="2834640" y="2926080"/>
-            <a:ext cx="1920240" cy="1371600"/>
+          <p:cNvPr id="10" name="Shape 8"/>
+          <p:cNvSpPr/>
+          <p:nvPr/>
+        </p:nvSpPr>
+        <p:spPr>
+          <a:xfrm>
+            <a:off x="2852928" y="3017520"/>
+            <a:ext cx="1938528" cy="1417320"/>
           </a:xfrm>
           <a:prstGeom prst="roundRect">
             <a:avLst>
-              <a:gd name="adj" fmla="val 8000"/>
+              <a:gd name="adj" fmla="val 7742"/>
             </a:avLst>
           </a:prstGeom>
           <a:solidFill>
-            <a:srgbClr val="1C7293"/>
+            <a:srgbClr val="3AA0B8"/>
           </a:solidFill>
           <a:ln w="19050">
             <a:solidFill>
-              <a:srgbClr val="1C7293"/>
+              <a:srgbClr val="3AA0B8"/>
             </a:solidFill>
             <a:prstDash val="solid"/>
           </a:ln>
-        </p:spPr>
-      </p:sp>
-      <p:sp>
-        <p:nvSpPr>
-          <p:cNvPr id="8" name="Text 6"/>
-          <p:cNvSpPr/>
-          <p:nvPr/>
-        </p:nvSpPr>
-        <p:spPr>
-          <a:xfrm>
-            <a:off x="2834640" y="3154680"/>
-            <a:ext cx="1920240" cy="457200"/>
+          <a:effectLst>
+            <a:outerShdw sx="100000" sy="100000" kx="0" ky="0" algn="bl" rotWithShape="0" blurRad="101600" dist="38100" dir="5400000">
+              <a:srgbClr val="000000">
+                <a:alpha val="40000"/>
+              </a:srgbClr>
+            </a:outerShdw>
+          </a:effectLst>
+        </p:spPr>
+      </p:sp>
+      <p:sp>
+        <p:nvSpPr>
+          <p:cNvPr id="11" name="Text 9"/>
+          <p:cNvSpPr/>
+          <p:nvPr/>
+        </p:nvSpPr>
+        <p:spPr>
+          <a:xfrm>
+            <a:off x="2852928" y="3273552"/>
+            <a:ext cx="1938528" cy="457200"/>
           </a:xfrm>
           <a:prstGeom prst="rect">
             <a:avLst/>
@@ -3007,9 +3422,9 @@
                 <a:solidFill>
                   <a:srgbClr val="FFFFFF"/>
                 </a:solidFill>
-                <a:latin typeface="Cambria" pitchFamily="34" charset="0"/>
-                <a:ea typeface="Cambria" pitchFamily="34" charset="-122"/>
-                <a:cs typeface="Cambria" pitchFamily="34" charset="-120"/>
+                <a:latin typeface="Calibri" pitchFamily="34" charset="0"/>
+                <a:ea typeface="Calibri" pitchFamily="34" charset="-122"/>
+                <a:cs typeface="Calibri" pitchFamily="34" charset="-120"/>
               </a:rPr>
               <a:t>LoadBalancer</a:t>
             </a:r>
@@ -3019,14 +3434,14 @@
       </p:sp>
       <p:sp>
         <p:nvSpPr>
-          <p:cNvPr id="9" name="Text 7"/>
-          <p:cNvSpPr/>
-          <p:nvPr/>
-        </p:nvSpPr>
-        <p:spPr>
-          <a:xfrm>
-            <a:off x="2834640" y="3703320"/>
-            <a:ext cx="1920240" cy="365760"/>
+          <p:cNvPr id="12" name="Text 10"/>
+          <p:cNvSpPr/>
+          <p:nvPr/>
+        </p:nvSpPr>
+        <p:spPr>
+          <a:xfrm>
+            <a:off x="2852928" y="3794760"/>
+            <a:ext cx="1938528" cy="365760"/>
           </a:xfrm>
           <a:prstGeom prst="rect">
             <a:avLst/>
@@ -3044,7 +3459,7 @@
             <a:r>
               <a:rPr lang="en-US" sz="1200" dirty="0">
                 <a:solidFill>
-                  <a:srgbClr val="E6F0F0"/>
+                  <a:srgbClr val="CFE0F2"/>
                 </a:solidFill>
                 <a:latin typeface="Calibri" pitchFamily="34" charset="0"/>
                 <a:ea typeface="Calibri" pitchFamily="34" charset="-122"/>
@@ -3058,22 +3473,22 @@
       </p:sp>
       <p:sp>
         <p:nvSpPr>
-          <p:cNvPr id="10" name="Shape 8"/>
-          <p:cNvSpPr/>
-          <p:nvPr/>
-        </p:nvSpPr>
-        <p:spPr>
-          <a:xfrm>
-            <a:off x="4754880" y="3611880"/>
-            <a:ext cx="365760" cy="0"/>
+          <p:cNvPr id="13" name="Shape 11"/>
+          <p:cNvSpPr/>
+          <p:nvPr/>
+        </p:nvSpPr>
+        <p:spPr>
+          <a:xfrm>
+            <a:off x="4791456" y="3721608"/>
+            <a:ext cx="347472" cy="0"/>
           </a:xfrm>
           <a:prstGeom prst="line">
             <a:avLst/>
           </a:prstGeom>
           <a:noFill/>
-          <a:ln w="25400">
+          <a:ln w="31750">
             <a:solidFill>
-              <a:srgbClr val="5A6B7B"/>
+              <a:srgbClr val="10D6A3"/>
             </a:solidFill>
             <a:prstDash val="solid"/>
             <a:tailEnd type="triangle"/>
@@ -3082,41 +3497,48 @@
       </p:sp>
       <p:sp>
         <p:nvSpPr>
-          <p:cNvPr id="11" name="Shape 9"/>
-          <p:cNvSpPr/>
-          <p:nvPr/>
-        </p:nvSpPr>
-        <p:spPr>
-          <a:xfrm>
-            <a:off x="5120640" y="2926080"/>
-            <a:ext cx="1920240" cy="1371600"/>
+          <p:cNvPr id="14" name="Shape 12"/>
+          <p:cNvSpPr/>
+          <p:nvPr/>
+        </p:nvSpPr>
+        <p:spPr>
+          <a:xfrm>
+            <a:off x="5138928" y="3017520"/>
+            <a:ext cx="1938528" cy="1417320"/>
           </a:xfrm>
           <a:prstGeom prst="roundRect">
             <a:avLst>
-              <a:gd name="adj" fmla="val 8000"/>
+              <a:gd name="adj" fmla="val 7742"/>
             </a:avLst>
           </a:prstGeom>
           <a:solidFill>
-            <a:srgbClr val="02C39A"/>
+            <a:srgbClr val="163A5C"/>
           </a:solidFill>
           <a:ln w="19050">
             <a:solidFill>
-              <a:srgbClr val="02C39A"/>
+              <a:srgbClr val="163A5C"/>
             </a:solidFill>
             <a:prstDash val="solid"/>
           </a:ln>
-        </p:spPr>
-      </p:sp>
-      <p:sp>
-        <p:nvSpPr>
-          <p:cNvPr id="12" name="Text 10"/>
-          <p:cNvSpPr/>
-          <p:nvPr/>
-        </p:nvSpPr>
-        <p:spPr>
-          <a:xfrm>
-            <a:off x="5120640" y="3154680"/>
-            <a:ext cx="1920240" cy="457200"/>
+          <a:effectLst>
+            <a:outerShdw sx="100000" sy="100000" kx="0" ky="0" algn="bl" rotWithShape="0" blurRad="101600" dist="38100" dir="5400000">
+              <a:srgbClr val="000000">
+                <a:alpha val="40000"/>
+              </a:srgbClr>
+            </a:outerShdw>
+          </a:effectLst>
+        </p:spPr>
+      </p:sp>
+      <p:sp>
+        <p:nvSpPr>
+          <p:cNvPr id="15" name="Text 13"/>
+          <p:cNvSpPr/>
+          <p:nvPr/>
+        </p:nvSpPr>
+        <p:spPr>
+          <a:xfrm>
+            <a:off x="5138928" y="3273552"/>
+            <a:ext cx="1938528" cy="457200"/>
           </a:xfrm>
           <a:prstGeom prst="rect">
             <a:avLst/>
@@ -3136,9 +3558,9 @@
                 <a:solidFill>
                   <a:srgbClr val="FFFFFF"/>
                 </a:solidFill>
-                <a:latin typeface="Cambria" pitchFamily="34" charset="0"/>
-                <a:ea typeface="Cambria" pitchFamily="34" charset="-122"/>
-                <a:cs typeface="Cambria" pitchFamily="34" charset="-120"/>
+                <a:latin typeface="Calibri" pitchFamily="34" charset="0"/>
+                <a:ea typeface="Calibri" pitchFamily="34" charset="-122"/>
+                <a:cs typeface="Calibri" pitchFamily="34" charset="-120"/>
               </a:rPr>
               <a:t>Frontend</a:t>
             </a:r>
@@ -3148,14 +3570,14 @@
       </p:sp>
       <p:sp>
         <p:nvSpPr>
-          <p:cNvPr id="13" name="Text 11"/>
-          <p:cNvSpPr/>
-          <p:nvPr/>
-        </p:nvSpPr>
-        <p:spPr>
-          <a:xfrm>
-            <a:off x="5120640" y="3703320"/>
-            <a:ext cx="1920240" cy="365760"/>
+          <p:cNvPr id="16" name="Text 14"/>
+          <p:cNvSpPr/>
+          <p:nvPr/>
+        </p:nvSpPr>
+        <p:spPr>
+          <a:xfrm>
+            <a:off x="5138928" y="3794760"/>
+            <a:ext cx="1938528" cy="365760"/>
           </a:xfrm>
           <a:prstGeom prst="rect">
             <a:avLst/>
@@ -3173,7 +3595,7 @@
             <a:r>
               <a:rPr lang="en-US" sz="1200" dirty="0">
                 <a:solidFill>
-                  <a:srgbClr val="E6F0F0"/>
+                  <a:srgbClr val="CFE0F2"/>
                 </a:solidFill>
                 <a:latin typeface="Calibri" pitchFamily="34" charset="0"/>
                 <a:ea typeface="Calibri" pitchFamily="34" charset="-122"/>
@@ -3187,22 +3609,22 @@
       </p:sp>
       <p:sp>
         <p:nvSpPr>
-          <p:cNvPr id="14" name="Shape 12"/>
-          <p:cNvSpPr/>
-          <p:nvPr/>
-        </p:nvSpPr>
-        <p:spPr>
-          <a:xfrm>
-            <a:off x="7040880" y="3611880"/>
-            <a:ext cx="365760" cy="0"/>
+          <p:cNvPr id="17" name="Shape 15"/>
+          <p:cNvSpPr/>
+          <p:nvPr/>
+        </p:nvSpPr>
+        <p:spPr>
+          <a:xfrm>
+            <a:off x="7077456" y="3721608"/>
+            <a:ext cx="347472" cy="0"/>
           </a:xfrm>
           <a:prstGeom prst="line">
             <a:avLst/>
           </a:prstGeom>
           <a:noFill/>
-          <a:ln w="25400">
+          <a:ln w="31750">
             <a:solidFill>
-              <a:srgbClr val="5A6B7B"/>
+              <a:srgbClr val="10D6A3"/>
             </a:solidFill>
             <a:prstDash val="solid"/>
             <a:tailEnd type="triangle"/>
@@ -3211,41 +3633,48 @@
       </p:sp>
       <p:sp>
         <p:nvSpPr>
-          <p:cNvPr id="15" name="Shape 13"/>
-          <p:cNvSpPr/>
-          <p:nvPr/>
-        </p:nvSpPr>
-        <p:spPr>
-          <a:xfrm>
-            <a:off x="7406640" y="2926080"/>
-            <a:ext cx="1920240" cy="1371600"/>
+          <p:cNvPr id="18" name="Shape 16"/>
+          <p:cNvSpPr/>
+          <p:nvPr/>
+        </p:nvSpPr>
+        <p:spPr>
+          <a:xfrm>
+            <a:off x="7424928" y="3017520"/>
+            <a:ext cx="1938528" cy="1417320"/>
           </a:xfrm>
           <a:prstGeom prst="roundRect">
             <a:avLst>
-              <a:gd name="adj" fmla="val 8000"/>
+              <a:gd name="adj" fmla="val 7742"/>
             </a:avLst>
           </a:prstGeom>
           <a:solidFill>
-            <a:srgbClr val="02C39A"/>
+            <a:srgbClr val="163A5C"/>
           </a:solidFill>
           <a:ln w="19050">
             <a:solidFill>
-              <a:srgbClr val="02C39A"/>
+              <a:srgbClr val="163A5C"/>
             </a:solidFill>
             <a:prstDash val="solid"/>
           </a:ln>
-        </p:spPr>
-      </p:sp>
-      <p:sp>
-        <p:nvSpPr>
-          <p:cNvPr id="16" name="Text 14"/>
-          <p:cNvSpPr/>
-          <p:nvPr/>
-        </p:nvSpPr>
-        <p:spPr>
-          <a:xfrm>
-            <a:off x="7406640" y="3154680"/>
-            <a:ext cx="1920240" cy="457200"/>
+          <a:effectLst>
+            <a:outerShdw sx="100000" sy="100000" kx="0" ky="0" algn="bl" rotWithShape="0" blurRad="101600" dist="38100" dir="5400000">
+              <a:srgbClr val="000000">
+                <a:alpha val="40000"/>
+              </a:srgbClr>
+            </a:outerShdw>
+          </a:effectLst>
+        </p:spPr>
+      </p:sp>
+      <p:sp>
+        <p:nvSpPr>
+          <p:cNvPr id="19" name="Text 17"/>
+          <p:cNvSpPr/>
+          <p:nvPr/>
+        </p:nvSpPr>
+        <p:spPr>
+          <a:xfrm>
+            <a:off x="7424928" y="3273552"/>
+            <a:ext cx="1938528" cy="457200"/>
           </a:xfrm>
           <a:prstGeom prst="rect">
             <a:avLst/>
@@ -3265,9 +3694,9 @@
                 <a:solidFill>
                   <a:srgbClr val="FFFFFF"/>
                 </a:solidFill>
-                <a:latin typeface="Cambria" pitchFamily="34" charset="0"/>
-                <a:ea typeface="Cambria" pitchFamily="34" charset="-122"/>
-                <a:cs typeface="Cambria" pitchFamily="34" charset="-120"/>
+                <a:latin typeface="Calibri" pitchFamily="34" charset="0"/>
+                <a:ea typeface="Calibri" pitchFamily="34" charset="-122"/>
+                <a:cs typeface="Calibri" pitchFamily="34" charset="-120"/>
               </a:rPr>
               <a:t>Backend</a:t>
             </a:r>
@@ -3277,14 +3706,14 @@
       </p:sp>
       <p:sp>
         <p:nvSpPr>
-          <p:cNvPr id="17" name="Text 15"/>
-          <p:cNvSpPr/>
-          <p:nvPr/>
-        </p:nvSpPr>
-        <p:spPr>
-          <a:xfrm>
-            <a:off x="7406640" y="3703320"/>
-            <a:ext cx="1920240" cy="365760"/>
+          <p:cNvPr id="20" name="Text 18"/>
+          <p:cNvSpPr/>
+          <p:nvPr/>
+        </p:nvSpPr>
+        <p:spPr>
+          <a:xfrm>
+            <a:off x="7424928" y="3794760"/>
+            <a:ext cx="1938528" cy="365760"/>
           </a:xfrm>
           <a:prstGeom prst="rect">
             <a:avLst/>
@@ -3302,7 +3731,7 @@
             <a:r>
               <a:rPr lang="en-US" sz="1200" dirty="0">
                 <a:solidFill>
-                  <a:srgbClr val="E6F0F0"/>
+                  <a:srgbClr val="CFE0F2"/>
                 </a:solidFill>
                 <a:latin typeface="Calibri" pitchFamily="34" charset="0"/>
                 <a:ea typeface="Calibri" pitchFamily="34" charset="-122"/>
@@ -3316,22 +3745,22 @@
       </p:sp>
       <p:sp>
         <p:nvSpPr>
-          <p:cNvPr id="18" name="Shape 16"/>
-          <p:cNvSpPr/>
-          <p:nvPr/>
-        </p:nvSpPr>
-        <p:spPr>
-          <a:xfrm>
-            <a:off x="9326880" y="3611880"/>
-            <a:ext cx="365760" cy="0"/>
+          <p:cNvPr id="21" name="Shape 19"/>
+          <p:cNvSpPr/>
+          <p:nvPr/>
+        </p:nvSpPr>
+        <p:spPr>
+          <a:xfrm>
+            <a:off x="9363456" y="3721608"/>
+            <a:ext cx="347472" cy="0"/>
           </a:xfrm>
           <a:prstGeom prst="line">
             <a:avLst/>
           </a:prstGeom>
           <a:noFill/>
-          <a:ln w="25400">
+          <a:ln w="31750">
             <a:solidFill>
-              <a:srgbClr val="5A6B7B"/>
+              <a:srgbClr val="10D6A3"/>
             </a:solidFill>
             <a:prstDash val="solid"/>
             <a:tailEnd type="triangle"/>
@@ -3340,41 +3769,48 @@
       </p:sp>
       <p:sp>
         <p:nvSpPr>
-          <p:cNvPr id="19" name="Shape 17"/>
-          <p:cNvSpPr/>
-          <p:nvPr/>
-        </p:nvSpPr>
-        <p:spPr>
-          <a:xfrm>
-            <a:off x="9692640" y="2926080"/>
-            <a:ext cx="1920240" cy="1371600"/>
+          <p:cNvPr id="22" name="Shape 20"/>
+          <p:cNvSpPr/>
+          <p:nvPr/>
+        </p:nvSpPr>
+        <p:spPr>
+          <a:xfrm>
+            <a:off x="9710928" y="3017520"/>
+            <a:ext cx="1938528" cy="1417320"/>
           </a:xfrm>
           <a:prstGeom prst="roundRect">
             <a:avLst>
-              <a:gd name="adj" fmla="val 8000"/>
+              <a:gd name="adj" fmla="val 7742"/>
             </a:avLst>
           </a:prstGeom>
           <a:solidFill>
-            <a:srgbClr val="13315C"/>
+            <a:srgbClr val="0B7D62"/>
           </a:solidFill>
           <a:ln w="19050">
             <a:solidFill>
-              <a:srgbClr val="13315C"/>
+              <a:srgbClr val="0B7D62"/>
             </a:solidFill>
             <a:prstDash val="solid"/>
           </a:ln>
-        </p:spPr>
-      </p:sp>
-      <p:sp>
-        <p:nvSpPr>
-          <p:cNvPr id="20" name="Text 18"/>
-          <p:cNvSpPr/>
-          <p:nvPr/>
-        </p:nvSpPr>
-        <p:spPr>
-          <a:xfrm>
-            <a:off x="9692640" y="3154680"/>
-            <a:ext cx="1920240" cy="457200"/>
+          <a:effectLst>
+            <a:outerShdw sx="100000" sy="100000" kx="0" ky="0" algn="bl" rotWithShape="0" blurRad="101600" dist="38100" dir="5400000">
+              <a:srgbClr val="000000">
+                <a:alpha val="40000"/>
+              </a:srgbClr>
+            </a:outerShdw>
+          </a:effectLst>
+        </p:spPr>
+      </p:sp>
+      <p:sp>
+        <p:nvSpPr>
+          <p:cNvPr id="23" name="Text 21"/>
+          <p:cNvSpPr/>
+          <p:nvPr/>
+        </p:nvSpPr>
+        <p:spPr>
+          <a:xfrm>
+            <a:off x="9710928" y="3273552"/>
+            <a:ext cx="1938528" cy="457200"/>
           </a:xfrm>
           <a:prstGeom prst="rect">
             <a:avLst/>
@@ -3394,9 +3830,9 @@
                 <a:solidFill>
                   <a:srgbClr val="FFFFFF"/>
                 </a:solidFill>
-                <a:latin typeface="Cambria" pitchFamily="34" charset="0"/>
-                <a:ea typeface="Cambria" pitchFamily="34" charset="-122"/>
-                <a:cs typeface="Cambria" pitchFamily="34" charset="-120"/>
+                <a:latin typeface="Calibri" pitchFamily="34" charset="0"/>
+                <a:ea typeface="Calibri" pitchFamily="34" charset="-122"/>
+                <a:cs typeface="Calibri" pitchFamily="34" charset="-120"/>
               </a:rPr>
               <a:t>MySQL</a:t>
             </a:r>
@@ -3406,14 +3842,14 @@
       </p:sp>
       <p:sp>
         <p:nvSpPr>
-          <p:cNvPr id="21" name="Text 19"/>
-          <p:cNvSpPr/>
-          <p:nvPr/>
-        </p:nvSpPr>
-        <p:spPr>
-          <a:xfrm>
-            <a:off x="9692640" y="3703320"/>
-            <a:ext cx="1920240" cy="365760"/>
+          <p:cNvPr id="24" name="Text 22"/>
+          <p:cNvSpPr/>
+          <p:nvPr/>
+        </p:nvSpPr>
+        <p:spPr>
+          <a:xfrm>
+            <a:off x="9710928" y="3794760"/>
+            <a:ext cx="1938528" cy="365760"/>
           </a:xfrm>
           <a:prstGeom prst="rect">
             <a:avLst/>
@@ -3431,7 +3867,7 @@
             <a:r>
               <a:rPr lang="en-US" sz="1200" dirty="0">
                 <a:solidFill>
-                  <a:srgbClr val="E6F0F0"/>
+                  <a:srgbClr val="CFE0F2"/>
                 </a:solidFill>
                 <a:latin typeface="Calibri" pitchFamily="34" charset="0"/>
                 <a:ea typeface="Calibri" pitchFamily="34" charset="-122"/>
@@ -3445,13 +3881,13 @@
       </p:sp>
       <p:sp>
         <p:nvSpPr>
-          <p:cNvPr id="22" name="Text 20"/>
-          <p:cNvSpPr/>
-          <p:nvPr/>
-        </p:nvSpPr>
-        <p:spPr>
-          <a:xfrm>
-            <a:off x="548640" y="4937760"/>
+          <p:cNvPr id="25" name="Text 23"/>
+          <p:cNvSpPr/>
+          <p:nvPr/>
+        </p:nvSpPr>
+        <p:spPr>
+          <a:xfrm>
+            <a:off x="548640" y="5074920"/>
             <a:ext cx="11064240" cy="457200"/>
           </a:xfrm>
           <a:prstGeom prst="rect">
@@ -3470,13 +3906,13 @@
             <a:r>
               <a:rPr lang="en-US" sz="1400" i="1" dirty="0">
                 <a:solidFill>
-                  <a:srgbClr val="1C7293"/>
-                </a:solidFill>
-                <a:latin typeface="Calibri" pitchFamily="34" charset="0"/>
-                <a:ea typeface="Calibri" pitchFamily="34" charset="-122"/>
-                <a:cs typeface="Calibri" pitchFamily="34" charset="-120"/>
-              </a:rPr>
-              <a:t>Proveedor cloud: AWS  ·  Servicios internos (backend y BD) no expuestos a internet (ClusterIP)</a:t>
+                  <a:srgbClr val="10D6A3"/>
+                </a:solidFill>
+                <a:latin typeface="Calibri" pitchFamily="34" charset="0"/>
+                <a:ea typeface="Calibri" pitchFamily="34" charset="-122"/>
+                <a:cs typeface="Calibri" pitchFamily="34" charset="-120"/>
+              </a:rPr>
+              <a:t>Proveedor cloud: AWS   ·   Backend y base de datos internos (ClusterIP), no expuestos a internet</a:t>
             </a:r>
             <a:endParaRPr lang="en-US" sz="1400" dirty="0"/>
           </a:p>
@@ -3496,7 +3932,7 @@
     <p:bg>
       <p:bgPr>
         <a:solidFill>
-          <a:srgbClr val="FFFFFF"/>
+          <a:srgbClr val="0A1E33"/>
         </a:solidFill>
       </p:bgPr>
     </p:bg>
@@ -3516,42 +3952,23 @@
       </p:grpSpPr>
       <p:sp>
         <p:nvSpPr>
-          <p:cNvPr id="2" name="Text 0"/>
-          <p:cNvSpPr/>
-          <p:nvPr/>
-        </p:nvSpPr>
-        <p:spPr>
-          <a:xfrm>
-            <a:off x="548640" y="365760"/>
-            <a:ext cx="11064240" cy="731520"/>
-          </a:xfrm>
-          <a:prstGeom prst="rect">
-            <a:avLst/>
-          </a:prstGeom>
-          <a:noFill/>
-          <a:ln/>
-        </p:spPr>
-        <p:txBody>
-          <a:bodyPr wrap="square" rtlCol="0" anchor="ctr"/>
-          <a:lstStyle/>
-          <a:p>
-            <a:pPr indent="0" marL="0">
-              <a:buNone/>
-            </a:pPr>
-            <a:r>
-              <a:rPr lang="en-US" sz="3200" b="1" dirty="0">
-                <a:solidFill>
-                  <a:srgbClr val="13315C"/>
-                </a:solidFill>
-                <a:latin typeface="Cambria" pitchFamily="34" charset="0"/>
-                <a:ea typeface="Cambria" pitchFamily="34" charset="-122"/>
-                <a:cs typeface="Cambria" pitchFamily="34" charset="-120"/>
-              </a:rPr>
-              <a:t>Contenerización</a:t>
-            </a:r>
-            <a:endParaRPr lang="en-US" sz="3200" dirty="0"/>
-          </a:p>
-        </p:txBody>
+          <p:cNvPr id="2" name="Shape 0"/>
+          <p:cNvSpPr/>
+          <p:nvPr/>
+        </p:nvSpPr>
+        <p:spPr>
+          <a:xfrm>
+            <a:off x="9418320" y="-2011680"/>
+            <a:ext cx="5029200" cy="5029200"/>
+          </a:xfrm>
+          <a:prstGeom prst="ellipse">
+            <a:avLst/>
+          </a:prstGeom>
+          <a:solidFill>
+            <a:srgbClr val="102A46"/>
+          </a:solidFill>
+          <a:ln/>
+        </p:spPr>
       </p:sp>
       <p:sp>
         <p:nvSpPr>
@@ -3561,35 +3978,8 @@
         </p:nvSpPr>
         <p:spPr>
           <a:xfrm>
-            <a:off x="548640" y="1463040"/>
-            <a:ext cx="3429000" cy="2194560"/>
-          </a:xfrm>
-          <a:prstGeom prst="roundRect">
-            <a:avLst>
-              <a:gd name="adj" fmla="val 4167"/>
-            </a:avLst>
-          </a:prstGeom>
-          <a:solidFill>
-            <a:srgbClr val="F4F7FA"/>
-          </a:solidFill>
-          <a:ln w="12700">
-            <a:solidFill>
-              <a:srgbClr val="D8E1EA"/>
-            </a:solidFill>
-            <a:prstDash val="solid"/>
-          </a:ln>
-        </p:spPr>
-      </p:sp>
-      <p:sp>
-        <p:nvSpPr>
-          <p:cNvPr id="4" name="Shape 2"/>
-          <p:cNvSpPr/>
-          <p:nvPr/>
-        </p:nvSpPr>
-        <p:spPr>
-          <a:xfrm>
-            <a:off x="777240" y="1737360"/>
-            <a:ext cx="548640" cy="548640"/>
+            <a:off x="548640" y="502920"/>
+            <a:ext cx="566928" cy="566928"/>
           </a:xfrm>
           <a:prstGeom prst="roundRect">
             <a:avLst>
@@ -3597,26 +3987,153 @@
             </a:avLst>
           </a:prstGeom>
           <a:solidFill>
-            <a:srgbClr val="1C7293"/>
+            <a:srgbClr val="10D6A3"/>
+          </a:solidFill>
+          <a:ln/>
+        </p:spPr>
+      </p:sp>
+      <p:sp>
+        <p:nvSpPr>
+          <p:cNvPr id="4" name="Text 2"/>
+          <p:cNvSpPr/>
+          <p:nvPr/>
+        </p:nvSpPr>
+        <p:spPr>
+          <a:xfrm>
+            <a:off x="548640" y="502920"/>
+            <a:ext cx="566928" cy="566928"/>
+          </a:xfrm>
+          <a:prstGeom prst="rect">
+            <a:avLst/>
+          </a:prstGeom>
+          <a:noFill/>
+          <a:ln/>
+        </p:spPr>
+        <p:txBody>
+          <a:bodyPr wrap="square" rtlCol="0" anchor="ctr"/>
+          <a:lstStyle/>
+          <a:p>
+            <a:pPr algn="ctr" indent="0" marL="0">
+              <a:buNone/>
+            </a:pPr>
+            <a:r>
+              <a:rPr lang="en-US" sz="2200" b="1" dirty="0">
+                <a:solidFill>
+                  <a:srgbClr val="0A1E33"/>
+                </a:solidFill>
+                <a:latin typeface="Calibri" pitchFamily="34" charset="0"/>
+                <a:ea typeface="Calibri" pitchFamily="34" charset="-122"/>
+                <a:cs typeface="Calibri" pitchFamily="34" charset="-120"/>
+              </a:rPr>
+              <a:t>2</a:t>
+            </a:r>
+            <a:endParaRPr lang="en-US" sz="2200" dirty="0"/>
+          </a:p>
+        </p:txBody>
+      </p:sp>
+      <p:sp>
+        <p:nvSpPr>
+          <p:cNvPr id="5" name="Text 3"/>
+          <p:cNvSpPr/>
+          <p:nvPr/>
+        </p:nvSpPr>
+        <p:spPr>
+          <a:xfrm>
+            <a:off x="1280160" y="457200"/>
+            <a:ext cx="10241280" cy="685800"/>
+          </a:xfrm>
+          <a:prstGeom prst="rect">
+            <a:avLst/>
+          </a:prstGeom>
+          <a:noFill/>
+          <a:ln/>
+        </p:spPr>
+        <p:txBody>
+          <a:bodyPr wrap="square" rtlCol="0" anchor="ctr"/>
+          <a:lstStyle/>
+          <a:p>
+            <a:pPr indent="0" marL="0">
+              <a:buNone/>
+            </a:pPr>
+            <a:r>
+              <a:rPr lang="en-US" sz="3000" b="1" dirty="0">
+                <a:solidFill>
+                  <a:srgbClr val="FFFFFF"/>
+                </a:solidFill>
+                <a:latin typeface="Calibri" pitchFamily="34" charset="0"/>
+                <a:ea typeface="Calibri" pitchFamily="34" charset="-122"/>
+                <a:cs typeface="Calibri" pitchFamily="34" charset="-120"/>
+              </a:rPr>
+              <a:t>Contenerización</a:t>
+            </a:r>
+            <a:endParaRPr lang="en-US" sz="3000" dirty="0"/>
+          </a:p>
+        </p:txBody>
+      </p:sp>
+      <p:sp>
+        <p:nvSpPr>
+          <p:cNvPr id="6" name="Shape 4"/>
+          <p:cNvSpPr/>
+          <p:nvPr/>
+        </p:nvSpPr>
+        <p:spPr>
+          <a:xfrm>
+            <a:off x="548640" y="1554480"/>
+            <a:ext cx="3456432" cy="2286000"/>
+          </a:xfrm>
+          <a:prstGeom prst="roundRect">
+            <a:avLst>
+              <a:gd name="adj" fmla="val 4000"/>
+            </a:avLst>
+          </a:prstGeom>
+          <a:solidFill>
+            <a:srgbClr val="163A5C"/>
           </a:solidFill>
           <a:ln w="12700">
             <a:solidFill>
-              <a:srgbClr val="1C7293"/>
+              <a:srgbClr val="2A5578"/>
             </a:solidFill>
             <a:prstDash val="solid"/>
           </a:ln>
-        </p:spPr>
-      </p:sp>
-      <p:sp>
-        <p:nvSpPr>
-          <p:cNvPr id="5" name="Text 3"/>
-          <p:cNvSpPr/>
-          <p:nvPr/>
-        </p:nvSpPr>
-        <p:spPr>
-          <a:xfrm>
-            <a:off x="777240" y="1737360"/>
-            <a:ext cx="548640" cy="548640"/>
+          <a:effectLst>
+            <a:outerShdw sx="100000" sy="100000" kx="0" ky="0" algn="bl" rotWithShape="0" blurRad="114300" dist="50800" dir="5400000">
+              <a:srgbClr val="000000">
+                <a:alpha val="45000"/>
+              </a:srgbClr>
+            </a:outerShdw>
+          </a:effectLst>
+        </p:spPr>
+      </p:sp>
+      <p:sp>
+        <p:nvSpPr>
+          <p:cNvPr id="7" name="Shape 5"/>
+          <p:cNvSpPr/>
+          <p:nvPr/>
+        </p:nvSpPr>
+        <p:spPr>
+          <a:xfrm>
+            <a:off x="804672" y="1847088"/>
+            <a:ext cx="658368" cy="658368"/>
+          </a:xfrm>
+          <a:prstGeom prst="ellipse">
+            <a:avLst/>
+          </a:prstGeom>
+          <a:solidFill>
+            <a:srgbClr val="3AA0B8"/>
+          </a:solidFill>
+          <a:ln/>
+        </p:spPr>
+      </p:sp>
+      <p:sp>
+        <p:nvSpPr>
+          <p:cNvPr id="8" name="Text 6"/>
+          <p:cNvSpPr/>
+          <p:nvPr/>
+        </p:nvSpPr>
+        <p:spPr>
+          <a:xfrm>
+            <a:off x="804672" y="1847088"/>
+            <a:ext cx="658368" cy="658368"/>
           </a:xfrm>
           <a:prstGeom prst="rect">
             <a:avLst/>
@@ -3632,27 +4149,27 @@
               <a:buNone/>
             </a:pPr>
             <a:r>
-              <a:rPr lang="en-US" sz="2000" dirty="0">
+              <a:rPr lang="en-US" sz="2160" dirty="0">
                 <a:solidFill>
                   <a:srgbClr val="000000"/>
                 </a:solidFill>
               </a:rPr>
               <a:t>🌐</a:t>
             </a:r>
-            <a:endParaRPr lang="en-US" sz="2000" dirty="0"/>
-          </a:p>
-        </p:txBody>
-      </p:sp>
-      <p:sp>
-        <p:nvSpPr>
-          <p:cNvPr id="6" name="Text 4"/>
-          <p:cNvSpPr/>
-          <p:nvPr/>
-        </p:nvSpPr>
-        <p:spPr>
-          <a:xfrm>
-            <a:off x="1463040" y="1783080"/>
-            <a:ext cx="2377440" cy="502920"/>
+            <a:endParaRPr lang="en-US" sz="2160" dirty="0"/>
+          </a:p>
+        </p:txBody>
+      </p:sp>
+      <p:sp>
+        <p:nvSpPr>
+          <p:cNvPr id="9" name="Text 7"/>
+          <p:cNvSpPr/>
+          <p:nvPr/>
+        </p:nvSpPr>
+        <p:spPr>
+          <a:xfrm>
+            <a:off x="1600200" y="1920240"/>
+            <a:ext cx="2286000" cy="548640"/>
           </a:xfrm>
           <a:prstGeom prst="rect">
             <a:avLst/>
@@ -3670,11 +4187,11 @@
             <a:r>
               <a:rPr lang="en-US" sz="1800" b="1" dirty="0">
                 <a:solidFill>
-                  <a:srgbClr val="13315C"/>
-                </a:solidFill>
-                <a:latin typeface="Cambria" pitchFamily="34" charset="0"/>
-                <a:ea typeface="Cambria" pitchFamily="34" charset="-122"/>
-                <a:cs typeface="Cambria" pitchFamily="34" charset="-120"/>
+                  <a:srgbClr val="FFFFFF"/>
+                </a:solidFill>
+                <a:latin typeface="Calibri" pitchFamily="34" charset="0"/>
+                <a:ea typeface="Calibri" pitchFamily="34" charset="-122"/>
+                <a:cs typeface="Calibri" pitchFamily="34" charset="-120"/>
               </a:rPr>
               <a:t>Frontend</a:t>
             </a:r>
@@ -3684,13 +4201,13 @@
       </p:sp>
       <p:sp>
         <p:nvSpPr>
-          <p:cNvPr id="7" name="Text 5"/>
-          <p:cNvSpPr/>
-          <p:nvPr/>
-        </p:nvSpPr>
-        <p:spPr>
-          <a:xfrm>
-            <a:off x="777240" y="2514600"/>
+          <p:cNvPr id="10" name="Text 8"/>
+          <p:cNvSpPr/>
+          <p:nvPr/>
+        </p:nvSpPr>
+        <p:spPr>
+          <a:xfrm>
+            <a:off x="804672" y="2697480"/>
             <a:ext cx="2971800" cy="1005840"/>
           </a:xfrm>
           <a:prstGeom prst="rect">
@@ -3712,7 +4229,7 @@
             <a:r>
               <a:rPr lang="en-US" sz="1300" dirty="0">
                 <a:solidFill>
-                  <a:srgbClr val="1A2330"/>
+                  <a:srgbClr val="CFE0F2"/>
                 </a:solidFill>
                 <a:latin typeface="Calibri" pitchFamily="34" charset="0"/>
                 <a:ea typeface="Calibri" pitchFamily="34" charset="-122"/>
@@ -3732,7 +4249,7 @@
             <a:r>
               <a:rPr lang="en-US" sz="1300" dirty="0">
                 <a:solidFill>
-                  <a:srgbClr val="1A2330"/>
+                  <a:srgbClr val="CFE0F2"/>
                 </a:solidFill>
                 <a:latin typeface="Calibri" pitchFamily="34" charset="0"/>
                 <a:ea typeface="Calibri" pitchFamily="34" charset="-122"/>
@@ -3746,68 +4263,68 @@
       </p:sp>
       <p:sp>
         <p:nvSpPr>
-          <p:cNvPr id="8" name="Shape 6"/>
-          <p:cNvSpPr/>
-          <p:nvPr/>
-        </p:nvSpPr>
-        <p:spPr>
-          <a:xfrm>
-            <a:off x="4251960" y="1463040"/>
-            <a:ext cx="3429000" cy="2194560"/>
+          <p:cNvPr id="11" name="Shape 9"/>
+          <p:cNvSpPr/>
+          <p:nvPr/>
+        </p:nvSpPr>
+        <p:spPr>
+          <a:xfrm>
+            <a:off x="4279392" y="1554480"/>
+            <a:ext cx="3456432" cy="2286000"/>
           </a:xfrm>
           <a:prstGeom prst="roundRect">
             <a:avLst>
-              <a:gd name="adj" fmla="val 4167"/>
+              <a:gd name="adj" fmla="val 4000"/>
             </a:avLst>
           </a:prstGeom>
           <a:solidFill>
-            <a:srgbClr val="F4F7FA"/>
+            <a:srgbClr val="163A5C"/>
           </a:solidFill>
           <a:ln w="12700">
             <a:solidFill>
-              <a:srgbClr val="D8E1EA"/>
+              <a:srgbClr val="2A5578"/>
             </a:solidFill>
             <a:prstDash val="solid"/>
           </a:ln>
-        </p:spPr>
-      </p:sp>
-      <p:sp>
-        <p:nvSpPr>
-          <p:cNvPr id="9" name="Shape 7"/>
-          <p:cNvSpPr/>
-          <p:nvPr/>
-        </p:nvSpPr>
-        <p:spPr>
-          <a:xfrm>
-            <a:off x="4480560" y="1737360"/>
-            <a:ext cx="548640" cy="548640"/>
-          </a:xfrm>
-          <a:prstGeom prst="roundRect">
-            <a:avLst>
-              <a:gd name="adj" fmla="val 50000"/>
-            </a:avLst>
-          </a:prstGeom>
-          <a:solidFill>
-            <a:srgbClr val="1C7293"/>
-          </a:solidFill>
-          <a:ln w="12700">
-            <a:solidFill>
-              <a:srgbClr val="1C7293"/>
-            </a:solidFill>
-            <a:prstDash val="solid"/>
-          </a:ln>
-        </p:spPr>
-      </p:sp>
-      <p:sp>
-        <p:nvSpPr>
-          <p:cNvPr id="10" name="Text 8"/>
-          <p:cNvSpPr/>
-          <p:nvPr/>
-        </p:nvSpPr>
-        <p:spPr>
-          <a:xfrm>
-            <a:off x="4480560" y="1737360"/>
-            <a:ext cx="548640" cy="548640"/>
+          <a:effectLst>
+            <a:outerShdw sx="100000" sy="100000" kx="0" ky="0" algn="bl" rotWithShape="0" blurRad="114300" dist="50800" dir="5400000">
+              <a:srgbClr val="000000">
+                <a:alpha val="45000"/>
+              </a:srgbClr>
+            </a:outerShdw>
+          </a:effectLst>
+        </p:spPr>
+      </p:sp>
+      <p:sp>
+        <p:nvSpPr>
+          <p:cNvPr id="12" name="Shape 10"/>
+          <p:cNvSpPr/>
+          <p:nvPr/>
+        </p:nvSpPr>
+        <p:spPr>
+          <a:xfrm>
+            <a:off x="4535424" y="1847088"/>
+            <a:ext cx="658368" cy="658368"/>
+          </a:xfrm>
+          <a:prstGeom prst="ellipse">
+            <a:avLst/>
+          </a:prstGeom>
+          <a:solidFill>
+            <a:srgbClr val="10D6A3"/>
+          </a:solidFill>
+          <a:ln/>
+        </p:spPr>
+      </p:sp>
+      <p:sp>
+        <p:nvSpPr>
+          <p:cNvPr id="13" name="Text 11"/>
+          <p:cNvSpPr/>
+          <p:nvPr/>
+        </p:nvSpPr>
+        <p:spPr>
+          <a:xfrm>
+            <a:off x="4535424" y="1847088"/>
+            <a:ext cx="658368" cy="658368"/>
           </a:xfrm>
           <a:prstGeom prst="rect">
             <a:avLst/>
@@ -3823,27 +4340,27 @@
               <a:buNone/>
             </a:pPr>
             <a:r>
-              <a:rPr lang="en-US" sz="2000" dirty="0">
+              <a:rPr lang="en-US" sz="2160" dirty="0">
                 <a:solidFill>
                   <a:srgbClr val="000000"/>
                 </a:solidFill>
               </a:rPr>
               <a:t>⚙️</a:t>
             </a:r>
-            <a:endParaRPr lang="en-US" sz="2000" dirty="0"/>
-          </a:p>
-        </p:txBody>
-      </p:sp>
-      <p:sp>
-        <p:nvSpPr>
-          <p:cNvPr id="11" name="Text 9"/>
-          <p:cNvSpPr/>
-          <p:nvPr/>
-        </p:nvSpPr>
-        <p:spPr>
-          <a:xfrm>
-            <a:off x="5166360" y="1783080"/>
-            <a:ext cx="2377440" cy="502920"/>
+            <a:endParaRPr lang="en-US" sz="2160" dirty="0"/>
+          </a:p>
+        </p:txBody>
+      </p:sp>
+      <p:sp>
+        <p:nvSpPr>
+          <p:cNvPr id="14" name="Text 12"/>
+          <p:cNvSpPr/>
+          <p:nvPr/>
+        </p:nvSpPr>
+        <p:spPr>
+          <a:xfrm>
+            <a:off x="5330952" y="1920240"/>
+            <a:ext cx="2286000" cy="548640"/>
           </a:xfrm>
           <a:prstGeom prst="rect">
             <a:avLst/>
@@ -3861,11 +4378,11 @@
             <a:r>
               <a:rPr lang="en-US" sz="1800" b="1" dirty="0">
                 <a:solidFill>
-                  <a:srgbClr val="13315C"/>
-                </a:solidFill>
-                <a:latin typeface="Cambria" pitchFamily="34" charset="0"/>
-                <a:ea typeface="Cambria" pitchFamily="34" charset="-122"/>
-                <a:cs typeface="Cambria" pitchFamily="34" charset="-120"/>
+                  <a:srgbClr val="FFFFFF"/>
+                </a:solidFill>
+                <a:latin typeface="Calibri" pitchFamily="34" charset="0"/>
+                <a:ea typeface="Calibri" pitchFamily="34" charset="-122"/>
+                <a:cs typeface="Calibri" pitchFamily="34" charset="-120"/>
               </a:rPr>
               <a:t>Backend</a:t>
             </a:r>
@@ -3875,13 +4392,13 @@
       </p:sp>
       <p:sp>
         <p:nvSpPr>
-          <p:cNvPr id="12" name="Text 10"/>
-          <p:cNvSpPr/>
-          <p:nvPr/>
-        </p:nvSpPr>
-        <p:spPr>
-          <a:xfrm>
-            <a:off x="4480560" y="2514600"/>
+          <p:cNvPr id="15" name="Text 13"/>
+          <p:cNvSpPr/>
+          <p:nvPr/>
+        </p:nvSpPr>
+        <p:spPr>
+          <a:xfrm>
+            <a:off x="4535424" y="2697480"/>
             <a:ext cx="2971800" cy="1005840"/>
           </a:xfrm>
           <a:prstGeom prst="rect">
@@ -3903,7 +4420,7 @@
             <a:r>
               <a:rPr lang="en-US" sz="1300" dirty="0">
                 <a:solidFill>
-                  <a:srgbClr val="1A2330"/>
+                  <a:srgbClr val="CFE0F2"/>
                 </a:solidFill>
                 <a:latin typeface="Calibri" pitchFamily="34" charset="0"/>
                 <a:ea typeface="Calibri" pitchFamily="34" charset="-122"/>
@@ -3923,7 +4440,7 @@
             <a:r>
               <a:rPr lang="en-US" sz="1300" dirty="0">
                 <a:solidFill>
-                  <a:srgbClr val="1A2330"/>
+                  <a:srgbClr val="CFE0F2"/>
                 </a:solidFill>
                 <a:latin typeface="Calibri" pitchFamily="34" charset="0"/>
                 <a:ea typeface="Calibri" pitchFamily="34" charset="-122"/>
@@ -3937,68 +4454,68 @@
       </p:sp>
       <p:sp>
         <p:nvSpPr>
-          <p:cNvPr id="13" name="Shape 11"/>
-          <p:cNvSpPr/>
-          <p:nvPr/>
-        </p:nvSpPr>
-        <p:spPr>
-          <a:xfrm>
-            <a:off x="7955280" y="1463040"/>
-            <a:ext cx="3429000" cy="2194560"/>
+          <p:cNvPr id="16" name="Shape 14"/>
+          <p:cNvSpPr/>
+          <p:nvPr/>
+        </p:nvSpPr>
+        <p:spPr>
+          <a:xfrm>
+            <a:off x="8010144" y="1554480"/>
+            <a:ext cx="3456432" cy="2286000"/>
           </a:xfrm>
           <a:prstGeom prst="roundRect">
             <a:avLst>
-              <a:gd name="adj" fmla="val 4167"/>
+              <a:gd name="adj" fmla="val 4000"/>
             </a:avLst>
           </a:prstGeom>
           <a:solidFill>
-            <a:srgbClr val="F4F7FA"/>
+            <a:srgbClr val="163A5C"/>
           </a:solidFill>
           <a:ln w="12700">
             <a:solidFill>
-              <a:srgbClr val="D8E1EA"/>
+              <a:srgbClr val="2A5578"/>
             </a:solidFill>
             <a:prstDash val="solid"/>
           </a:ln>
-        </p:spPr>
-      </p:sp>
-      <p:sp>
-        <p:nvSpPr>
-          <p:cNvPr id="14" name="Shape 12"/>
-          <p:cNvSpPr/>
-          <p:nvPr/>
-        </p:nvSpPr>
-        <p:spPr>
-          <a:xfrm>
-            <a:off x="8183880" y="1737360"/>
-            <a:ext cx="548640" cy="548640"/>
-          </a:xfrm>
-          <a:prstGeom prst="roundRect">
-            <a:avLst>
-              <a:gd name="adj" fmla="val 50000"/>
-            </a:avLst>
-          </a:prstGeom>
-          <a:solidFill>
-            <a:srgbClr val="1C7293"/>
-          </a:solidFill>
-          <a:ln w="12700">
-            <a:solidFill>
-              <a:srgbClr val="1C7293"/>
-            </a:solidFill>
-            <a:prstDash val="solid"/>
-          </a:ln>
-        </p:spPr>
-      </p:sp>
-      <p:sp>
-        <p:nvSpPr>
-          <p:cNvPr id="15" name="Text 13"/>
-          <p:cNvSpPr/>
-          <p:nvPr/>
-        </p:nvSpPr>
-        <p:spPr>
-          <a:xfrm>
-            <a:off x="8183880" y="1737360"/>
-            <a:ext cx="548640" cy="548640"/>
+          <a:effectLst>
+            <a:outerShdw sx="100000" sy="100000" kx="0" ky="0" algn="bl" rotWithShape="0" blurRad="114300" dist="50800" dir="5400000">
+              <a:srgbClr val="000000">
+                <a:alpha val="45000"/>
+              </a:srgbClr>
+            </a:outerShdw>
+          </a:effectLst>
+        </p:spPr>
+      </p:sp>
+      <p:sp>
+        <p:nvSpPr>
+          <p:cNvPr id="17" name="Shape 15"/>
+          <p:cNvSpPr/>
+          <p:nvPr/>
+        </p:nvSpPr>
+        <p:spPr>
+          <a:xfrm>
+            <a:off x="8266176" y="1847088"/>
+            <a:ext cx="658368" cy="658368"/>
+          </a:xfrm>
+          <a:prstGeom prst="ellipse">
+            <a:avLst/>
+          </a:prstGeom>
+          <a:solidFill>
+            <a:srgbClr val="3AA0B8"/>
+          </a:solidFill>
+          <a:ln/>
+        </p:spPr>
+      </p:sp>
+      <p:sp>
+        <p:nvSpPr>
+          <p:cNvPr id="18" name="Text 16"/>
+          <p:cNvSpPr/>
+          <p:nvPr/>
+        </p:nvSpPr>
+        <p:spPr>
+          <a:xfrm>
+            <a:off x="8266176" y="1847088"/>
+            <a:ext cx="658368" cy="658368"/>
           </a:xfrm>
           <a:prstGeom prst="rect">
             <a:avLst/>
@@ -4014,27 +4531,27 @@
               <a:buNone/>
             </a:pPr>
             <a:r>
-              <a:rPr lang="en-US" sz="2000" dirty="0">
+              <a:rPr lang="en-US" sz="2160" dirty="0">
                 <a:solidFill>
                   <a:srgbClr val="000000"/>
                 </a:solidFill>
               </a:rPr>
               <a:t>🗄️</a:t>
             </a:r>
-            <a:endParaRPr lang="en-US" sz="2000" dirty="0"/>
-          </a:p>
-        </p:txBody>
-      </p:sp>
-      <p:sp>
-        <p:nvSpPr>
-          <p:cNvPr id="16" name="Text 14"/>
-          <p:cNvSpPr/>
-          <p:nvPr/>
-        </p:nvSpPr>
-        <p:spPr>
-          <a:xfrm>
-            <a:off x="8869680" y="1783080"/>
-            <a:ext cx="2377440" cy="502920"/>
+            <a:endParaRPr lang="en-US" sz="2160" dirty="0"/>
+          </a:p>
+        </p:txBody>
+      </p:sp>
+      <p:sp>
+        <p:nvSpPr>
+          <p:cNvPr id="19" name="Text 17"/>
+          <p:cNvSpPr/>
+          <p:nvPr/>
+        </p:nvSpPr>
+        <p:spPr>
+          <a:xfrm>
+            <a:off x="9061704" y="1920240"/>
+            <a:ext cx="2286000" cy="548640"/>
           </a:xfrm>
           <a:prstGeom prst="rect">
             <a:avLst/>
@@ -4052,11 +4569,11 @@
             <a:r>
               <a:rPr lang="en-US" sz="1800" b="1" dirty="0">
                 <a:solidFill>
-                  <a:srgbClr val="13315C"/>
-                </a:solidFill>
-                <a:latin typeface="Cambria" pitchFamily="34" charset="0"/>
-                <a:ea typeface="Cambria" pitchFamily="34" charset="-122"/>
-                <a:cs typeface="Cambria" pitchFamily="34" charset="-120"/>
+                  <a:srgbClr val="FFFFFF"/>
+                </a:solidFill>
+                <a:latin typeface="Calibri" pitchFamily="34" charset="0"/>
+                <a:ea typeface="Calibri" pitchFamily="34" charset="-122"/>
+                <a:cs typeface="Calibri" pitchFamily="34" charset="-120"/>
               </a:rPr>
               <a:t>Base de datos</a:t>
             </a:r>
@@ -4066,13 +4583,13 @@
       </p:sp>
       <p:sp>
         <p:nvSpPr>
-          <p:cNvPr id="17" name="Text 15"/>
-          <p:cNvSpPr/>
-          <p:nvPr/>
-        </p:nvSpPr>
-        <p:spPr>
-          <a:xfrm>
-            <a:off x="8183880" y="2514600"/>
+          <p:cNvPr id="20" name="Text 18"/>
+          <p:cNvSpPr/>
+          <p:nvPr/>
+        </p:nvSpPr>
+        <p:spPr>
+          <a:xfrm>
+            <a:off x="8266176" y="2697480"/>
             <a:ext cx="2971800" cy="1005840"/>
           </a:xfrm>
           <a:prstGeom prst="rect">
@@ -4094,7 +4611,7 @@
             <a:r>
               <a:rPr lang="en-US" sz="1300" dirty="0">
                 <a:solidFill>
-                  <a:srgbClr val="1A2330"/>
+                  <a:srgbClr val="CFE0F2"/>
                 </a:solidFill>
                 <a:latin typeface="Calibri" pitchFamily="34" charset="0"/>
                 <a:ea typeface="Calibri" pitchFamily="34" charset="-122"/>
@@ -4114,7 +4631,7 @@
             <a:r>
               <a:rPr lang="en-US" sz="1300" dirty="0">
                 <a:solidFill>
-                  <a:srgbClr val="1A2330"/>
+                  <a:srgbClr val="CFE0F2"/>
                 </a:solidFill>
                 <a:latin typeface="Calibri" pitchFamily="34" charset="0"/>
                 <a:ea typeface="Calibri" pitchFamily="34" charset="-122"/>
@@ -4128,41 +4645,104 @@
       </p:sp>
       <p:sp>
         <p:nvSpPr>
-          <p:cNvPr id="18" name="Shape 16"/>
-          <p:cNvSpPr/>
-          <p:nvPr/>
-        </p:nvSpPr>
-        <p:spPr>
-          <a:xfrm>
-            <a:off x="548640" y="4023360"/>
-            <a:ext cx="11091672" cy="1188720"/>
+          <p:cNvPr id="21" name="Shape 19"/>
+          <p:cNvSpPr/>
+          <p:nvPr/>
+        </p:nvSpPr>
+        <p:spPr>
+          <a:xfrm>
+            <a:off x="548640" y="4160520"/>
+            <a:ext cx="11091672" cy="1234440"/>
           </a:xfrm>
           <a:prstGeom prst="roundRect">
             <a:avLst>
-              <a:gd name="adj" fmla="val 7692"/>
+              <a:gd name="adj" fmla="val 7407"/>
             </a:avLst>
           </a:prstGeom>
           <a:solidFill>
-            <a:srgbClr val="13315C"/>
+            <a:srgbClr val="102A46"/>
           </a:solidFill>
           <a:ln w="12700">
             <a:solidFill>
-              <a:srgbClr val="13315C"/>
+              <a:srgbClr val="2A5578"/>
             </a:solidFill>
             <a:prstDash val="solid"/>
           </a:ln>
-        </p:spPr>
-      </p:sp>
-      <p:sp>
-        <p:nvSpPr>
-          <p:cNvPr id="19" name="Text 17"/>
-          <p:cNvSpPr/>
-          <p:nvPr/>
-        </p:nvSpPr>
-        <p:spPr>
-          <a:xfrm>
-            <a:off x="822960" y="4023360"/>
-            <a:ext cx="10515600" cy="1188720"/>
+          <a:effectLst>
+            <a:outerShdw sx="100000" sy="100000" kx="0" ky="0" algn="bl" rotWithShape="0" blurRad="114300" dist="50800" dir="5400000">
+              <a:srgbClr val="000000">
+                <a:alpha val="45000"/>
+              </a:srgbClr>
+            </a:outerShdw>
+          </a:effectLst>
+        </p:spPr>
+      </p:sp>
+      <p:sp>
+        <p:nvSpPr>
+          <p:cNvPr id="22" name="Shape 20"/>
+          <p:cNvSpPr/>
+          <p:nvPr/>
+        </p:nvSpPr>
+        <p:spPr>
+          <a:xfrm>
+            <a:off x="868680" y="4434840"/>
+            <a:ext cx="685800" cy="685800"/>
+          </a:xfrm>
+          <a:prstGeom prst="ellipse">
+            <a:avLst/>
+          </a:prstGeom>
+          <a:solidFill>
+            <a:srgbClr val="10D6A3"/>
+          </a:solidFill>
+          <a:ln/>
+        </p:spPr>
+      </p:sp>
+      <p:sp>
+        <p:nvSpPr>
+          <p:cNvPr id="23" name="Text 21"/>
+          <p:cNvSpPr/>
+          <p:nvPr/>
+        </p:nvSpPr>
+        <p:spPr>
+          <a:xfrm>
+            <a:off x="868680" y="4434840"/>
+            <a:ext cx="685800" cy="685800"/>
+          </a:xfrm>
+          <a:prstGeom prst="rect">
+            <a:avLst/>
+          </a:prstGeom>
+          <a:noFill/>
+          <a:ln/>
+        </p:spPr>
+        <p:txBody>
+          <a:bodyPr wrap="square" rtlCol="0" anchor="ctr"/>
+          <a:lstStyle/>
+          <a:p>
+            <a:pPr algn="ctr" indent="0" marL="0">
+              <a:buNone/>
+            </a:pPr>
+            <a:r>
+              <a:rPr lang="en-US" sz="2250" dirty="0">
+                <a:solidFill>
+                  <a:srgbClr val="000000"/>
+                </a:solidFill>
+              </a:rPr>
+              <a:t>🧩</a:t>
+            </a:r>
+            <a:endParaRPr lang="en-US" sz="2250" dirty="0"/>
+          </a:p>
+        </p:txBody>
+      </p:sp>
+      <p:sp>
+        <p:nvSpPr>
+          <p:cNvPr id="24" name="Text 22"/>
+          <p:cNvSpPr/>
+          <p:nvPr/>
+        </p:nvSpPr>
+        <p:spPr>
+          <a:xfrm>
+            <a:off x="1828800" y="4160520"/>
+            <a:ext cx="9509760" cy="1234440"/>
           </a:xfrm>
           <a:prstGeom prst="rect">
             <a:avLst/>
@@ -4180,7 +4760,7 @@
             <a:r>
               <a:rPr lang="en-US" sz="1800" b="1" dirty="0">
                 <a:solidFill>
-                  <a:srgbClr val="02C39A"/>
+                  <a:srgbClr val="10D6A3"/>
                 </a:solidFill>
                 <a:latin typeface="Calibri" pitchFamily="34" charset="0"/>
                 <a:ea typeface="Calibri" pitchFamily="34" charset="-122"/>
@@ -4200,7 +4780,7 @@
                 <a:ea typeface="Calibri" pitchFamily="34" charset="-122"/>
                 <a:cs typeface="Calibri" pitchFamily="34" charset="-120"/>
               </a:rPr>
-              <a:t>levanta los tres componentes conectados en el entorno local con un solo comando (docker compose up --build).</a:t>
+              <a:t>levanta frontend, backend y base de datos conectados en el entorno local con un solo comando.</a:t>
             </a:r>
             <a:endParaRPr lang="en-US" sz="1800" dirty="0"/>
           </a:p>
@@ -4220,7 +4800,7 @@
     <p:bg>
       <p:bgPr>
         <a:solidFill>
-          <a:srgbClr val="FFFFFF"/>
+          <a:srgbClr val="0A1E33"/>
         </a:solidFill>
       </p:bgPr>
     </p:bg>
@@ -4240,42 +4820,23 @@
       </p:grpSpPr>
       <p:sp>
         <p:nvSpPr>
-          <p:cNvPr id="2" name="Text 0"/>
-          <p:cNvSpPr/>
-          <p:nvPr/>
-        </p:nvSpPr>
-        <p:spPr>
-          <a:xfrm>
-            <a:off x="548640" y="365760"/>
-            <a:ext cx="11064240" cy="731520"/>
-          </a:xfrm>
-          <a:prstGeom prst="rect">
-            <a:avLst/>
-          </a:prstGeom>
-          <a:noFill/>
-          <a:ln/>
-        </p:spPr>
-        <p:txBody>
-          <a:bodyPr wrap="square" rtlCol="0" anchor="ctr"/>
-          <a:lstStyle/>
-          <a:p>
-            <a:pPr indent="0" marL="0">
-              <a:buNone/>
-            </a:pPr>
-            <a:r>
-              <a:rPr lang="en-US" sz="3200" b="1" dirty="0">
-                <a:solidFill>
-                  <a:srgbClr val="13315C"/>
-                </a:solidFill>
-                <a:latin typeface="Cambria" pitchFamily="34" charset="0"/>
-                <a:ea typeface="Cambria" pitchFamily="34" charset="-122"/>
-                <a:cs typeface="Cambria" pitchFamily="34" charset="-120"/>
-              </a:rPr>
-              <a:t>Pipeline CI/CD (GitHub Actions)</a:t>
-            </a:r>
-            <a:endParaRPr lang="en-US" sz="3200" dirty="0"/>
-          </a:p>
-        </p:txBody>
+          <p:cNvPr id="2" name="Shape 0"/>
+          <p:cNvSpPr/>
+          <p:nvPr/>
+        </p:nvSpPr>
+        <p:spPr>
+          <a:xfrm>
+            <a:off x="9418320" y="-2011680"/>
+            <a:ext cx="5029200" cy="5029200"/>
+          </a:xfrm>
+          <a:prstGeom prst="ellipse">
+            <a:avLst/>
+          </a:prstGeom>
+          <a:solidFill>
+            <a:srgbClr val="102A46"/>
+          </a:solidFill>
+          <a:ln/>
+        </p:spPr>
       </p:sp>
       <p:sp>
         <p:nvSpPr>
@@ -4285,121 +4846,262 @@
         </p:nvSpPr>
         <p:spPr>
           <a:xfrm>
-            <a:off x="457200" y="2194560"/>
-            <a:ext cx="1965960" cy="1463040"/>
+            <a:off x="548640" y="502920"/>
+            <a:ext cx="566928" cy="566928"/>
           </a:xfrm>
           <a:prstGeom prst="roundRect">
             <a:avLst>
-              <a:gd name="adj" fmla="val 7500"/>
+              <a:gd name="adj" fmla="val 50000"/>
             </a:avLst>
           </a:prstGeom>
           <a:solidFill>
-            <a:srgbClr val="1C7293"/>
-          </a:solidFill>
-          <a:ln w="12700">
+            <a:srgbClr val="10D6A3"/>
+          </a:solidFill>
+          <a:ln/>
+        </p:spPr>
+      </p:sp>
+      <p:sp>
+        <p:nvSpPr>
+          <p:cNvPr id="4" name="Text 2"/>
+          <p:cNvSpPr/>
+          <p:nvPr/>
+        </p:nvSpPr>
+        <p:spPr>
+          <a:xfrm>
+            <a:off x="548640" y="502920"/>
+            <a:ext cx="566928" cy="566928"/>
+          </a:xfrm>
+          <a:prstGeom prst="rect">
+            <a:avLst/>
+          </a:prstGeom>
+          <a:noFill/>
+          <a:ln/>
+        </p:spPr>
+        <p:txBody>
+          <a:bodyPr wrap="square" rtlCol="0" anchor="ctr"/>
+          <a:lstStyle/>
+          <a:p>
+            <a:pPr algn="ctr" indent="0" marL="0">
+              <a:buNone/>
+            </a:pPr>
+            <a:r>
+              <a:rPr lang="en-US" sz="2200" b="1" dirty="0">
+                <a:solidFill>
+                  <a:srgbClr val="0A1E33"/>
+                </a:solidFill>
+                <a:latin typeface="Calibri" pitchFamily="34" charset="0"/>
+                <a:ea typeface="Calibri" pitchFamily="34" charset="-122"/>
+                <a:cs typeface="Calibri" pitchFamily="34" charset="-120"/>
+              </a:rPr>
+              <a:t>3</a:t>
+            </a:r>
+            <a:endParaRPr lang="en-US" sz="2200" dirty="0"/>
+          </a:p>
+        </p:txBody>
+      </p:sp>
+      <p:sp>
+        <p:nvSpPr>
+          <p:cNvPr id="5" name="Text 3"/>
+          <p:cNvSpPr/>
+          <p:nvPr/>
+        </p:nvSpPr>
+        <p:spPr>
+          <a:xfrm>
+            <a:off x="1280160" y="457200"/>
+            <a:ext cx="10241280" cy="685800"/>
+          </a:xfrm>
+          <a:prstGeom prst="rect">
+            <a:avLst/>
+          </a:prstGeom>
+          <a:noFill/>
+          <a:ln/>
+        </p:spPr>
+        <p:txBody>
+          <a:bodyPr wrap="square" rtlCol="0" anchor="ctr"/>
+          <a:lstStyle/>
+          <a:p>
+            <a:pPr indent="0" marL="0">
+              <a:buNone/>
+            </a:pPr>
+            <a:r>
+              <a:rPr lang="en-US" sz="3000" b="1" dirty="0">
+                <a:solidFill>
+                  <a:srgbClr val="FFFFFF"/>
+                </a:solidFill>
+                <a:latin typeface="Calibri" pitchFamily="34" charset="0"/>
+                <a:ea typeface="Calibri" pitchFamily="34" charset="-122"/>
+                <a:cs typeface="Calibri" pitchFamily="34" charset="-120"/>
+              </a:rPr>
+              <a:t>Pipeline CI/CD (GitHub Actions)</a:t>
+            </a:r>
+            <a:endParaRPr lang="en-US" sz="3000" dirty="0"/>
+          </a:p>
+        </p:txBody>
+      </p:sp>
+      <p:sp>
+        <p:nvSpPr>
+          <p:cNvPr id="6" name="Shape 4"/>
+          <p:cNvSpPr/>
+          <p:nvPr/>
+        </p:nvSpPr>
+        <p:spPr>
+          <a:xfrm>
+            <a:off x="457200" y="2286000"/>
+            <a:ext cx="1956816" cy="1508760"/>
+          </a:xfrm>
+          <a:prstGeom prst="roundRect">
+            <a:avLst>
+              <a:gd name="adj" fmla="val 7273"/>
+            </a:avLst>
+          </a:prstGeom>
+          <a:solidFill>
+            <a:srgbClr val="3AA0B8"/>
+          </a:solidFill>
+          <a:ln/>
+          <a:effectLst>
+            <a:outerShdw sx="100000" sy="100000" kx="0" ky="0" algn="bl" rotWithShape="0" blurRad="101600" dist="38100" dir="5400000">
+              <a:srgbClr val="000000">
+                <a:alpha val="40000"/>
+              </a:srgbClr>
+            </a:outerShdw>
+          </a:effectLst>
+        </p:spPr>
+      </p:sp>
+      <p:sp>
+        <p:nvSpPr>
+          <p:cNvPr id="7" name="Text 5"/>
+          <p:cNvSpPr/>
+          <p:nvPr/>
+        </p:nvSpPr>
+        <p:spPr>
+          <a:xfrm>
+            <a:off x="594360" y="2395728"/>
+            <a:ext cx="457200" cy="365760"/>
+          </a:xfrm>
+          <a:prstGeom prst="rect">
+            <a:avLst/>
+          </a:prstGeom>
+          <a:noFill/>
+          <a:ln/>
+        </p:spPr>
+        <p:txBody>
+          <a:bodyPr wrap="square" rtlCol="0" anchor="ctr"/>
+          <a:lstStyle/>
+          <a:p>
+            <a:pPr indent="0" marL="0">
+              <a:buNone/>
+            </a:pPr>
+            <a:r>
+              <a:rPr lang="en-US" sz="1300" b="1" dirty="0">
+                <a:solidFill>
+                  <a:srgbClr val="BFF3E5"/>
+                </a:solidFill>
+                <a:latin typeface="Calibri" pitchFamily="34" charset="0"/>
+                <a:ea typeface="Calibri" pitchFamily="34" charset="-122"/>
+                <a:cs typeface="Calibri" pitchFamily="34" charset="-120"/>
+              </a:rPr>
+              <a:t>1</a:t>
+            </a:r>
+            <a:endParaRPr lang="en-US" sz="1300" dirty="0"/>
+          </a:p>
+        </p:txBody>
+      </p:sp>
+      <p:sp>
+        <p:nvSpPr>
+          <p:cNvPr id="8" name="Text 6"/>
+          <p:cNvSpPr/>
+          <p:nvPr/>
+        </p:nvSpPr>
+        <p:spPr>
+          <a:xfrm>
+            <a:off x="457200" y="2743200"/>
+            <a:ext cx="1956816" cy="457200"/>
+          </a:xfrm>
+          <a:prstGeom prst="rect">
+            <a:avLst/>
+          </a:prstGeom>
+          <a:noFill/>
+          <a:ln/>
+        </p:spPr>
+        <p:txBody>
+          <a:bodyPr wrap="square" rtlCol="0" anchor="ctr"/>
+          <a:lstStyle/>
+          <a:p>
+            <a:pPr algn="ctr" indent="0" marL="0">
+              <a:buNone/>
+            </a:pPr>
+            <a:r>
+              <a:rPr lang="en-US" sz="1700" b="1" dirty="0">
+                <a:solidFill>
+                  <a:srgbClr val="FFFFFF"/>
+                </a:solidFill>
+                <a:latin typeface="Calibri" pitchFamily="34" charset="0"/>
+                <a:ea typeface="Calibri" pitchFamily="34" charset="-122"/>
+                <a:cs typeface="Calibri" pitchFamily="34" charset="-120"/>
+              </a:rPr>
+              <a:t>Push</a:t>
+            </a:r>
+            <a:endParaRPr lang="en-US" sz="1700" dirty="0"/>
+          </a:p>
+        </p:txBody>
+      </p:sp>
+      <p:sp>
+        <p:nvSpPr>
+          <p:cNvPr id="9" name="Text 7"/>
+          <p:cNvSpPr/>
+          <p:nvPr/>
+        </p:nvSpPr>
+        <p:spPr>
+          <a:xfrm>
+            <a:off x="457200" y="3218688"/>
+            <a:ext cx="1956816" cy="457200"/>
+          </a:xfrm>
+          <a:prstGeom prst="rect">
+            <a:avLst/>
+          </a:prstGeom>
+          <a:noFill/>
+          <a:ln/>
+        </p:spPr>
+        <p:txBody>
+          <a:bodyPr wrap="square" rtlCol="0" anchor="ctr"/>
+          <a:lstStyle/>
+          <a:p>
+            <a:pPr algn="ctr" indent="0" marL="0">
+              <a:buNone/>
+            </a:pPr>
+            <a:r>
+              <a:rPr lang="en-US" sz="1150" dirty="0">
+                <a:solidFill>
+                  <a:srgbClr val="E6FBF4"/>
+                </a:solidFill>
+                <a:latin typeface="Calibri" pitchFamily="34" charset="0"/>
+                <a:ea typeface="Calibri" pitchFamily="34" charset="-122"/>
+                <a:cs typeface="Calibri" pitchFamily="34" charset="-120"/>
+              </a:rPr>
+              <a:t>a la rama main</a:t>
+            </a:r>
+            <a:endParaRPr lang="en-US" sz="1150" dirty="0"/>
+          </a:p>
+        </p:txBody>
+      </p:sp>
+      <p:sp>
+        <p:nvSpPr>
+          <p:cNvPr id="10" name="Shape 8"/>
+          <p:cNvSpPr/>
+          <p:nvPr/>
+        </p:nvSpPr>
+        <p:spPr>
+          <a:xfrm>
+            <a:off x="2414016" y="3035808"/>
+            <a:ext cx="329184" cy="0"/>
+          </a:xfrm>
+          <a:prstGeom prst="line">
+            <a:avLst/>
+          </a:prstGeom>
+          <a:noFill/>
+          <a:ln w="31750">
             <a:solidFill>
-              <a:srgbClr val="1C7293"/>
-            </a:solidFill>
-            <a:prstDash val="solid"/>
-          </a:ln>
-        </p:spPr>
-      </p:sp>
-      <p:sp>
-        <p:nvSpPr>
-          <p:cNvPr id="4" name="Text 2"/>
-          <p:cNvSpPr/>
-          <p:nvPr/>
-        </p:nvSpPr>
-        <p:spPr>
-          <a:xfrm>
-            <a:off x="457200" y="2514600"/>
-            <a:ext cx="1965960" cy="457200"/>
-          </a:xfrm>
-          <a:prstGeom prst="rect">
-            <a:avLst/>
-          </a:prstGeom>
-          <a:noFill/>
-          <a:ln/>
-        </p:spPr>
-        <p:txBody>
-          <a:bodyPr wrap="square" rtlCol="0" anchor="ctr"/>
-          <a:lstStyle/>
-          <a:p>
-            <a:pPr algn="ctr" indent="0" marL="0">
-              <a:buNone/>
-            </a:pPr>
-            <a:r>
-              <a:rPr lang="en-US" sz="1700" b="1" dirty="0">
-                <a:solidFill>
-                  <a:srgbClr val="FFFFFF"/>
-                </a:solidFill>
-                <a:latin typeface="Cambria" pitchFamily="34" charset="0"/>
-                <a:ea typeface="Cambria" pitchFamily="34" charset="-122"/>
-                <a:cs typeface="Cambria" pitchFamily="34" charset="-120"/>
-              </a:rPr>
-              <a:t>Push</a:t>
-            </a:r>
-            <a:endParaRPr lang="en-US" sz="1700" dirty="0"/>
-          </a:p>
-        </p:txBody>
-      </p:sp>
-      <p:sp>
-        <p:nvSpPr>
-          <p:cNvPr id="5" name="Text 3"/>
-          <p:cNvSpPr/>
-          <p:nvPr/>
-        </p:nvSpPr>
-        <p:spPr>
-          <a:xfrm>
-            <a:off x="457200" y="3017520"/>
-            <a:ext cx="1965960" cy="457200"/>
-          </a:xfrm>
-          <a:prstGeom prst="rect">
-            <a:avLst/>
-          </a:prstGeom>
-          <a:noFill/>
-          <a:ln/>
-        </p:spPr>
-        <p:txBody>
-          <a:bodyPr wrap="square" rtlCol="0" anchor="ctr"/>
-          <a:lstStyle/>
-          <a:p>
-            <a:pPr algn="ctr" indent="0" marL="0">
-              <a:buNone/>
-            </a:pPr>
-            <a:r>
-              <a:rPr lang="en-US" sz="1200" dirty="0">
-                <a:solidFill>
-                  <a:srgbClr val="E6F0F0"/>
-                </a:solidFill>
-                <a:latin typeface="Calibri" pitchFamily="34" charset="0"/>
-                <a:ea typeface="Calibri" pitchFamily="34" charset="-122"/>
-                <a:cs typeface="Calibri" pitchFamily="34" charset="-120"/>
-              </a:rPr>
-              <a:t>a la rama main</a:t>
-            </a:r>
-            <a:endParaRPr lang="en-US" sz="1200" dirty="0"/>
-          </a:p>
-        </p:txBody>
-      </p:sp>
-      <p:sp>
-        <p:nvSpPr>
-          <p:cNvPr id="6" name="Shape 4"/>
-          <p:cNvSpPr/>
-          <p:nvPr/>
-        </p:nvSpPr>
-        <p:spPr>
-          <a:xfrm>
-            <a:off x="2423160" y="2926080"/>
-            <a:ext cx="320040" cy="0"/>
-          </a:xfrm>
-          <a:prstGeom prst="line">
-            <a:avLst/>
-          </a:prstGeom>
-          <a:noFill/>
-          <a:ln w="25400">
-            <a:solidFill>
-              <a:srgbClr val="5A6B7B"/>
+              <a:srgbClr val="CFE0F2"/>
             </a:solidFill>
             <a:prstDash val="solid"/>
             <a:tailEnd type="triangle"/>
@@ -4408,127 +5110,168 @@
       </p:sp>
       <p:sp>
         <p:nvSpPr>
-          <p:cNvPr id="7" name="Shape 5"/>
-          <p:cNvSpPr/>
-          <p:nvPr/>
-        </p:nvSpPr>
-        <p:spPr>
-          <a:xfrm>
-            <a:off x="2743200" y="2194560"/>
-            <a:ext cx="1965960" cy="1463040"/>
+          <p:cNvPr id="11" name="Shape 9"/>
+          <p:cNvSpPr/>
+          <p:nvPr/>
+        </p:nvSpPr>
+        <p:spPr>
+          <a:xfrm>
+            <a:off x="2743200" y="2286000"/>
+            <a:ext cx="1956816" cy="1508760"/>
           </a:xfrm>
           <a:prstGeom prst="roundRect">
             <a:avLst>
-              <a:gd name="adj" fmla="val 7500"/>
+              <a:gd name="adj" fmla="val 7273"/>
             </a:avLst>
           </a:prstGeom>
           <a:solidFill>
-            <a:srgbClr val="02C39A"/>
-          </a:solidFill>
-          <a:ln w="12700">
+            <a:srgbClr val="10D6A3"/>
+          </a:solidFill>
+          <a:ln/>
+          <a:effectLst>
+            <a:outerShdw sx="100000" sy="100000" kx="0" ky="0" algn="bl" rotWithShape="0" blurRad="101600" dist="38100" dir="5400000">
+              <a:srgbClr val="000000">
+                <a:alpha val="40000"/>
+              </a:srgbClr>
+            </a:outerShdw>
+          </a:effectLst>
+        </p:spPr>
+      </p:sp>
+      <p:sp>
+        <p:nvSpPr>
+          <p:cNvPr id="12" name="Text 10"/>
+          <p:cNvSpPr/>
+          <p:nvPr/>
+        </p:nvSpPr>
+        <p:spPr>
+          <a:xfrm>
+            <a:off x="2880360" y="2395728"/>
+            <a:ext cx="457200" cy="365760"/>
+          </a:xfrm>
+          <a:prstGeom prst="rect">
+            <a:avLst/>
+          </a:prstGeom>
+          <a:noFill/>
+          <a:ln/>
+        </p:spPr>
+        <p:txBody>
+          <a:bodyPr wrap="square" rtlCol="0" anchor="ctr"/>
+          <a:lstStyle/>
+          <a:p>
+            <a:pPr indent="0" marL="0">
+              <a:buNone/>
+            </a:pPr>
+            <a:r>
+              <a:rPr lang="en-US" sz="1300" b="1" dirty="0">
+                <a:solidFill>
+                  <a:srgbClr val="BFF3E5"/>
+                </a:solidFill>
+                <a:latin typeface="Calibri" pitchFamily="34" charset="0"/>
+                <a:ea typeface="Calibri" pitchFamily="34" charset="-122"/>
+                <a:cs typeface="Calibri" pitchFamily="34" charset="-120"/>
+              </a:rPr>
+              <a:t>2</a:t>
+            </a:r>
+            <a:endParaRPr lang="en-US" sz="1300" dirty="0"/>
+          </a:p>
+        </p:txBody>
+      </p:sp>
+      <p:sp>
+        <p:nvSpPr>
+          <p:cNvPr id="13" name="Text 11"/>
+          <p:cNvSpPr/>
+          <p:nvPr/>
+        </p:nvSpPr>
+        <p:spPr>
+          <a:xfrm>
+            <a:off x="2743200" y="2743200"/>
+            <a:ext cx="1956816" cy="457200"/>
+          </a:xfrm>
+          <a:prstGeom prst="rect">
+            <a:avLst/>
+          </a:prstGeom>
+          <a:noFill/>
+          <a:ln/>
+        </p:spPr>
+        <p:txBody>
+          <a:bodyPr wrap="square" rtlCol="0" anchor="ctr"/>
+          <a:lstStyle/>
+          <a:p>
+            <a:pPr algn="ctr" indent="0" marL="0">
+              <a:buNone/>
+            </a:pPr>
+            <a:r>
+              <a:rPr lang="en-US" sz="1700" b="1" dirty="0">
+                <a:solidFill>
+                  <a:srgbClr val="FFFFFF"/>
+                </a:solidFill>
+                <a:latin typeface="Calibri" pitchFamily="34" charset="0"/>
+                <a:ea typeface="Calibri" pitchFamily="34" charset="-122"/>
+                <a:cs typeface="Calibri" pitchFamily="34" charset="-120"/>
+              </a:rPr>
+              <a:t>Test</a:t>
+            </a:r>
+            <a:endParaRPr lang="en-US" sz="1700" dirty="0"/>
+          </a:p>
+        </p:txBody>
+      </p:sp>
+      <p:sp>
+        <p:nvSpPr>
+          <p:cNvPr id="14" name="Text 12"/>
+          <p:cNvSpPr/>
+          <p:nvPr/>
+        </p:nvSpPr>
+        <p:spPr>
+          <a:xfrm>
+            <a:off x="2743200" y="3218688"/>
+            <a:ext cx="1956816" cy="457200"/>
+          </a:xfrm>
+          <a:prstGeom prst="rect">
+            <a:avLst/>
+          </a:prstGeom>
+          <a:noFill/>
+          <a:ln/>
+        </p:spPr>
+        <p:txBody>
+          <a:bodyPr wrap="square" rtlCol="0" anchor="ctr"/>
+          <a:lstStyle/>
+          <a:p>
+            <a:pPr algn="ctr" indent="0" marL="0">
+              <a:buNone/>
+            </a:pPr>
+            <a:r>
+              <a:rPr lang="en-US" sz="1150" dirty="0">
+                <a:solidFill>
+                  <a:srgbClr val="E6FBF4"/>
+                </a:solidFill>
+                <a:latin typeface="Calibri" pitchFamily="34" charset="0"/>
+                <a:ea typeface="Calibri" pitchFamily="34" charset="-122"/>
+                <a:cs typeface="Calibri" pitchFamily="34" charset="-120"/>
+              </a:rPr>
+              <a:t>Jest + Supertest</a:t>
+            </a:r>
+            <a:endParaRPr lang="en-US" sz="1150" dirty="0"/>
+          </a:p>
+        </p:txBody>
+      </p:sp>
+      <p:sp>
+        <p:nvSpPr>
+          <p:cNvPr id="15" name="Shape 13"/>
+          <p:cNvSpPr/>
+          <p:nvPr/>
+        </p:nvSpPr>
+        <p:spPr>
+          <a:xfrm>
+            <a:off x="4700016" y="3035808"/>
+            <a:ext cx="329184" cy="0"/>
+          </a:xfrm>
+          <a:prstGeom prst="line">
+            <a:avLst/>
+          </a:prstGeom>
+          <a:noFill/>
+          <a:ln w="31750">
             <a:solidFill>
-              <a:srgbClr val="02C39A"/>
-            </a:solidFill>
-            <a:prstDash val="solid"/>
-          </a:ln>
-        </p:spPr>
-      </p:sp>
-      <p:sp>
-        <p:nvSpPr>
-          <p:cNvPr id="8" name="Text 6"/>
-          <p:cNvSpPr/>
-          <p:nvPr/>
-        </p:nvSpPr>
-        <p:spPr>
-          <a:xfrm>
-            <a:off x="2743200" y="2514600"/>
-            <a:ext cx="1965960" cy="457200"/>
-          </a:xfrm>
-          <a:prstGeom prst="rect">
-            <a:avLst/>
-          </a:prstGeom>
-          <a:noFill/>
-          <a:ln/>
-        </p:spPr>
-        <p:txBody>
-          <a:bodyPr wrap="square" rtlCol="0" anchor="ctr"/>
-          <a:lstStyle/>
-          <a:p>
-            <a:pPr algn="ctr" indent="0" marL="0">
-              <a:buNone/>
-            </a:pPr>
-            <a:r>
-              <a:rPr lang="en-US" sz="1700" b="1" dirty="0">
-                <a:solidFill>
-                  <a:srgbClr val="FFFFFF"/>
-                </a:solidFill>
-                <a:latin typeface="Cambria" pitchFamily="34" charset="0"/>
-                <a:ea typeface="Cambria" pitchFamily="34" charset="-122"/>
-                <a:cs typeface="Cambria" pitchFamily="34" charset="-120"/>
-              </a:rPr>
-              <a:t>Test</a:t>
-            </a:r>
-            <a:endParaRPr lang="en-US" sz="1700" dirty="0"/>
-          </a:p>
-        </p:txBody>
-      </p:sp>
-      <p:sp>
-        <p:nvSpPr>
-          <p:cNvPr id="9" name="Text 7"/>
-          <p:cNvSpPr/>
-          <p:nvPr/>
-        </p:nvSpPr>
-        <p:spPr>
-          <a:xfrm>
-            <a:off x="2743200" y="3017520"/>
-            <a:ext cx="1965960" cy="457200"/>
-          </a:xfrm>
-          <a:prstGeom prst="rect">
-            <a:avLst/>
-          </a:prstGeom>
-          <a:noFill/>
-          <a:ln/>
-        </p:spPr>
-        <p:txBody>
-          <a:bodyPr wrap="square" rtlCol="0" anchor="ctr"/>
-          <a:lstStyle/>
-          <a:p>
-            <a:pPr algn="ctr" indent="0" marL="0">
-              <a:buNone/>
-            </a:pPr>
-            <a:r>
-              <a:rPr lang="en-US" sz="1200" dirty="0">
-                <a:solidFill>
-                  <a:srgbClr val="E6F0F0"/>
-                </a:solidFill>
-                <a:latin typeface="Calibri" pitchFamily="34" charset="0"/>
-                <a:ea typeface="Calibri" pitchFamily="34" charset="-122"/>
-                <a:cs typeface="Calibri" pitchFamily="34" charset="-120"/>
-              </a:rPr>
-              <a:t>Jest + Supertest</a:t>
-            </a:r>
-            <a:endParaRPr lang="en-US" sz="1200" dirty="0"/>
-          </a:p>
-        </p:txBody>
-      </p:sp>
-      <p:sp>
-        <p:nvSpPr>
-          <p:cNvPr id="10" name="Shape 8"/>
-          <p:cNvSpPr/>
-          <p:nvPr/>
-        </p:nvSpPr>
-        <p:spPr>
-          <a:xfrm>
-            <a:off x="4709160" y="2926080"/>
-            <a:ext cx="320040" cy="0"/>
-          </a:xfrm>
-          <a:prstGeom prst="line">
-            <a:avLst/>
-          </a:prstGeom>
-          <a:noFill/>
-          <a:ln w="25400">
-            <a:solidFill>
-              <a:srgbClr val="5A6B7B"/>
+              <a:srgbClr val="CFE0F2"/>
             </a:solidFill>
             <a:prstDash val="solid"/>
             <a:tailEnd type="triangle"/>
@@ -4537,127 +5280,168 @@
       </p:sp>
       <p:sp>
         <p:nvSpPr>
-          <p:cNvPr id="11" name="Shape 9"/>
-          <p:cNvSpPr/>
-          <p:nvPr/>
-        </p:nvSpPr>
-        <p:spPr>
-          <a:xfrm>
-            <a:off x="5029200" y="2194560"/>
-            <a:ext cx="1965960" cy="1463040"/>
+          <p:cNvPr id="16" name="Shape 14"/>
+          <p:cNvSpPr/>
+          <p:nvPr/>
+        </p:nvSpPr>
+        <p:spPr>
+          <a:xfrm>
+            <a:off x="5029200" y="2286000"/>
+            <a:ext cx="1956816" cy="1508760"/>
           </a:xfrm>
           <a:prstGeom prst="roundRect">
             <a:avLst>
-              <a:gd name="adj" fmla="val 7500"/>
+              <a:gd name="adj" fmla="val 7273"/>
             </a:avLst>
           </a:prstGeom>
           <a:solidFill>
-            <a:srgbClr val="1C7293"/>
-          </a:solidFill>
-          <a:ln w="12700">
+            <a:srgbClr val="3AA0B8"/>
+          </a:solidFill>
+          <a:ln/>
+          <a:effectLst>
+            <a:outerShdw sx="100000" sy="100000" kx="0" ky="0" algn="bl" rotWithShape="0" blurRad="101600" dist="38100" dir="5400000">
+              <a:srgbClr val="000000">
+                <a:alpha val="40000"/>
+              </a:srgbClr>
+            </a:outerShdw>
+          </a:effectLst>
+        </p:spPr>
+      </p:sp>
+      <p:sp>
+        <p:nvSpPr>
+          <p:cNvPr id="17" name="Text 15"/>
+          <p:cNvSpPr/>
+          <p:nvPr/>
+        </p:nvSpPr>
+        <p:spPr>
+          <a:xfrm>
+            <a:off x="5166360" y="2395728"/>
+            <a:ext cx="457200" cy="365760"/>
+          </a:xfrm>
+          <a:prstGeom prst="rect">
+            <a:avLst/>
+          </a:prstGeom>
+          <a:noFill/>
+          <a:ln/>
+        </p:spPr>
+        <p:txBody>
+          <a:bodyPr wrap="square" rtlCol="0" anchor="ctr"/>
+          <a:lstStyle/>
+          <a:p>
+            <a:pPr indent="0" marL="0">
+              <a:buNone/>
+            </a:pPr>
+            <a:r>
+              <a:rPr lang="en-US" sz="1300" b="1" dirty="0">
+                <a:solidFill>
+                  <a:srgbClr val="BFF3E5"/>
+                </a:solidFill>
+                <a:latin typeface="Calibri" pitchFamily="34" charset="0"/>
+                <a:ea typeface="Calibri" pitchFamily="34" charset="-122"/>
+                <a:cs typeface="Calibri" pitchFamily="34" charset="-120"/>
+              </a:rPr>
+              <a:t>3</a:t>
+            </a:r>
+            <a:endParaRPr lang="en-US" sz="1300" dirty="0"/>
+          </a:p>
+        </p:txBody>
+      </p:sp>
+      <p:sp>
+        <p:nvSpPr>
+          <p:cNvPr id="18" name="Text 16"/>
+          <p:cNvSpPr/>
+          <p:nvPr/>
+        </p:nvSpPr>
+        <p:spPr>
+          <a:xfrm>
+            <a:off x="5029200" y="2743200"/>
+            <a:ext cx="1956816" cy="457200"/>
+          </a:xfrm>
+          <a:prstGeom prst="rect">
+            <a:avLst/>
+          </a:prstGeom>
+          <a:noFill/>
+          <a:ln/>
+        </p:spPr>
+        <p:txBody>
+          <a:bodyPr wrap="square" rtlCol="0" anchor="ctr"/>
+          <a:lstStyle/>
+          <a:p>
+            <a:pPr algn="ctr" indent="0" marL="0">
+              <a:buNone/>
+            </a:pPr>
+            <a:r>
+              <a:rPr lang="en-US" sz="1700" b="1" dirty="0">
+                <a:solidFill>
+                  <a:srgbClr val="FFFFFF"/>
+                </a:solidFill>
+                <a:latin typeface="Calibri" pitchFamily="34" charset="0"/>
+                <a:ea typeface="Calibri" pitchFamily="34" charset="-122"/>
+                <a:cs typeface="Calibri" pitchFamily="34" charset="-120"/>
+              </a:rPr>
+              <a:t>Build</a:t>
+            </a:r>
+            <a:endParaRPr lang="en-US" sz="1700" dirty="0"/>
+          </a:p>
+        </p:txBody>
+      </p:sp>
+      <p:sp>
+        <p:nvSpPr>
+          <p:cNvPr id="19" name="Text 17"/>
+          <p:cNvSpPr/>
+          <p:nvPr/>
+        </p:nvSpPr>
+        <p:spPr>
+          <a:xfrm>
+            <a:off x="5029200" y="3218688"/>
+            <a:ext cx="1956816" cy="457200"/>
+          </a:xfrm>
+          <a:prstGeom prst="rect">
+            <a:avLst/>
+          </a:prstGeom>
+          <a:noFill/>
+          <a:ln/>
+        </p:spPr>
+        <p:txBody>
+          <a:bodyPr wrap="square" rtlCol="0" anchor="ctr"/>
+          <a:lstStyle/>
+          <a:p>
+            <a:pPr algn="ctr" indent="0" marL="0">
+              <a:buNone/>
+            </a:pPr>
+            <a:r>
+              <a:rPr lang="en-US" sz="1150" dirty="0">
+                <a:solidFill>
+                  <a:srgbClr val="E6FBF4"/>
+                </a:solidFill>
+                <a:latin typeface="Calibri" pitchFamily="34" charset="0"/>
+                <a:ea typeface="Calibri" pitchFamily="34" charset="-122"/>
+                <a:cs typeface="Calibri" pitchFamily="34" charset="-120"/>
+              </a:rPr>
+              <a:t>imagen Docker</a:t>
+            </a:r>
+            <a:endParaRPr lang="en-US" sz="1150" dirty="0"/>
+          </a:p>
+        </p:txBody>
+      </p:sp>
+      <p:sp>
+        <p:nvSpPr>
+          <p:cNvPr id="20" name="Shape 18"/>
+          <p:cNvSpPr/>
+          <p:nvPr/>
+        </p:nvSpPr>
+        <p:spPr>
+          <a:xfrm>
+            <a:off x="6986016" y="3035808"/>
+            <a:ext cx="329184" cy="0"/>
+          </a:xfrm>
+          <a:prstGeom prst="line">
+            <a:avLst/>
+          </a:prstGeom>
+          <a:noFill/>
+          <a:ln w="31750">
             <a:solidFill>
-              <a:srgbClr val="1C7293"/>
-            </a:solidFill>
-            <a:prstDash val="solid"/>
-          </a:ln>
-        </p:spPr>
-      </p:sp>
-      <p:sp>
-        <p:nvSpPr>
-          <p:cNvPr id="12" name="Text 10"/>
-          <p:cNvSpPr/>
-          <p:nvPr/>
-        </p:nvSpPr>
-        <p:spPr>
-          <a:xfrm>
-            <a:off x="5029200" y="2514600"/>
-            <a:ext cx="1965960" cy="457200"/>
-          </a:xfrm>
-          <a:prstGeom prst="rect">
-            <a:avLst/>
-          </a:prstGeom>
-          <a:noFill/>
-          <a:ln/>
-        </p:spPr>
-        <p:txBody>
-          <a:bodyPr wrap="square" rtlCol="0" anchor="ctr"/>
-          <a:lstStyle/>
-          <a:p>
-            <a:pPr algn="ctr" indent="0" marL="0">
-              <a:buNone/>
-            </a:pPr>
-            <a:r>
-              <a:rPr lang="en-US" sz="1700" b="1" dirty="0">
-                <a:solidFill>
-                  <a:srgbClr val="FFFFFF"/>
-                </a:solidFill>
-                <a:latin typeface="Cambria" pitchFamily="34" charset="0"/>
-                <a:ea typeface="Cambria" pitchFamily="34" charset="-122"/>
-                <a:cs typeface="Cambria" pitchFamily="34" charset="-120"/>
-              </a:rPr>
-              <a:t>Build</a:t>
-            </a:r>
-            <a:endParaRPr lang="en-US" sz="1700" dirty="0"/>
-          </a:p>
-        </p:txBody>
-      </p:sp>
-      <p:sp>
-        <p:nvSpPr>
-          <p:cNvPr id="13" name="Text 11"/>
-          <p:cNvSpPr/>
-          <p:nvPr/>
-        </p:nvSpPr>
-        <p:spPr>
-          <a:xfrm>
-            <a:off x="5029200" y="3017520"/>
-            <a:ext cx="1965960" cy="457200"/>
-          </a:xfrm>
-          <a:prstGeom prst="rect">
-            <a:avLst/>
-          </a:prstGeom>
-          <a:noFill/>
-          <a:ln/>
-        </p:spPr>
-        <p:txBody>
-          <a:bodyPr wrap="square" rtlCol="0" anchor="ctr"/>
-          <a:lstStyle/>
-          <a:p>
-            <a:pPr algn="ctr" indent="0" marL="0">
-              <a:buNone/>
-            </a:pPr>
-            <a:r>
-              <a:rPr lang="en-US" sz="1200" dirty="0">
-                <a:solidFill>
-                  <a:srgbClr val="E6F0F0"/>
-                </a:solidFill>
-                <a:latin typeface="Calibri" pitchFamily="34" charset="0"/>
-                <a:ea typeface="Calibri" pitchFamily="34" charset="-122"/>
-                <a:cs typeface="Calibri" pitchFamily="34" charset="-120"/>
-              </a:rPr>
-              <a:t>imagen Docker</a:t>
-            </a:r>
-            <a:endParaRPr lang="en-US" sz="1200" dirty="0"/>
-          </a:p>
-        </p:txBody>
-      </p:sp>
-      <p:sp>
-        <p:nvSpPr>
-          <p:cNvPr id="14" name="Shape 12"/>
-          <p:cNvSpPr/>
-          <p:nvPr/>
-        </p:nvSpPr>
-        <p:spPr>
-          <a:xfrm>
-            <a:off x="6995160" y="2926080"/>
-            <a:ext cx="320040" cy="0"/>
-          </a:xfrm>
-          <a:prstGeom prst="line">
-            <a:avLst/>
-          </a:prstGeom>
-          <a:noFill/>
-          <a:ln w="25400">
-            <a:solidFill>
-              <a:srgbClr val="5A6B7B"/>
+              <a:srgbClr val="CFE0F2"/>
             </a:solidFill>
             <a:prstDash val="solid"/>
             <a:tailEnd type="triangle"/>
@@ -4666,127 +5450,168 @@
       </p:sp>
       <p:sp>
         <p:nvSpPr>
-          <p:cNvPr id="15" name="Shape 13"/>
-          <p:cNvSpPr/>
-          <p:nvPr/>
-        </p:nvSpPr>
-        <p:spPr>
-          <a:xfrm>
-            <a:off x="7315200" y="2194560"/>
-            <a:ext cx="1965960" cy="1463040"/>
+          <p:cNvPr id="21" name="Shape 19"/>
+          <p:cNvSpPr/>
+          <p:nvPr/>
+        </p:nvSpPr>
+        <p:spPr>
+          <a:xfrm>
+            <a:off x="7315200" y="2286000"/>
+            <a:ext cx="1956816" cy="1508760"/>
           </a:xfrm>
           <a:prstGeom prst="roundRect">
             <a:avLst>
-              <a:gd name="adj" fmla="val 7500"/>
+              <a:gd name="adj" fmla="val 7273"/>
             </a:avLst>
           </a:prstGeom>
           <a:solidFill>
-            <a:srgbClr val="02C39A"/>
-          </a:solidFill>
-          <a:ln w="12700">
+            <a:srgbClr val="10D6A3"/>
+          </a:solidFill>
+          <a:ln/>
+          <a:effectLst>
+            <a:outerShdw sx="100000" sy="100000" kx="0" ky="0" algn="bl" rotWithShape="0" blurRad="101600" dist="38100" dir="5400000">
+              <a:srgbClr val="000000">
+                <a:alpha val="40000"/>
+              </a:srgbClr>
+            </a:outerShdw>
+          </a:effectLst>
+        </p:spPr>
+      </p:sp>
+      <p:sp>
+        <p:nvSpPr>
+          <p:cNvPr id="22" name="Text 20"/>
+          <p:cNvSpPr/>
+          <p:nvPr/>
+        </p:nvSpPr>
+        <p:spPr>
+          <a:xfrm>
+            <a:off x="7452360" y="2395728"/>
+            <a:ext cx="457200" cy="365760"/>
+          </a:xfrm>
+          <a:prstGeom prst="rect">
+            <a:avLst/>
+          </a:prstGeom>
+          <a:noFill/>
+          <a:ln/>
+        </p:spPr>
+        <p:txBody>
+          <a:bodyPr wrap="square" rtlCol="0" anchor="ctr"/>
+          <a:lstStyle/>
+          <a:p>
+            <a:pPr indent="0" marL="0">
+              <a:buNone/>
+            </a:pPr>
+            <a:r>
+              <a:rPr lang="en-US" sz="1300" b="1" dirty="0">
+                <a:solidFill>
+                  <a:srgbClr val="BFF3E5"/>
+                </a:solidFill>
+                <a:latin typeface="Calibri" pitchFamily="34" charset="0"/>
+                <a:ea typeface="Calibri" pitchFamily="34" charset="-122"/>
+                <a:cs typeface="Calibri" pitchFamily="34" charset="-120"/>
+              </a:rPr>
+              <a:t>4</a:t>
+            </a:r>
+            <a:endParaRPr lang="en-US" sz="1300" dirty="0"/>
+          </a:p>
+        </p:txBody>
+      </p:sp>
+      <p:sp>
+        <p:nvSpPr>
+          <p:cNvPr id="23" name="Text 21"/>
+          <p:cNvSpPr/>
+          <p:nvPr/>
+        </p:nvSpPr>
+        <p:spPr>
+          <a:xfrm>
+            <a:off x="7315200" y="2743200"/>
+            <a:ext cx="1956816" cy="457200"/>
+          </a:xfrm>
+          <a:prstGeom prst="rect">
+            <a:avLst/>
+          </a:prstGeom>
+          <a:noFill/>
+          <a:ln/>
+        </p:spPr>
+        <p:txBody>
+          <a:bodyPr wrap="square" rtlCol="0" anchor="ctr"/>
+          <a:lstStyle/>
+          <a:p>
+            <a:pPr algn="ctr" indent="0" marL="0">
+              <a:buNone/>
+            </a:pPr>
+            <a:r>
+              <a:rPr lang="en-US" sz="1700" b="1" dirty="0">
+                <a:solidFill>
+                  <a:srgbClr val="FFFFFF"/>
+                </a:solidFill>
+                <a:latin typeface="Calibri" pitchFamily="34" charset="0"/>
+                <a:ea typeface="Calibri" pitchFamily="34" charset="-122"/>
+                <a:cs typeface="Calibri" pitchFamily="34" charset="-120"/>
+              </a:rPr>
+              <a:t>Push ECR</a:t>
+            </a:r>
+            <a:endParaRPr lang="en-US" sz="1700" dirty="0"/>
+          </a:p>
+        </p:txBody>
+      </p:sp>
+      <p:sp>
+        <p:nvSpPr>
+          <p:cNvPr id="24" name="Text 22"/>
+          <p:cNvSpPr/>
+          <p:nvPr/>
+        </p:nvSpPr>
+        <p:spPr>
+          <a:xfrm>
+            <a:off x="7315200" y="3218688"/>
+            <a:ext cx="1956816" cy="457200"/>
+          </a:xfrm>
+          <a:prstGeom prst="rect">
+            <a:avLst/>
+          </a:prstGeom>
+          <a:noFill/>
+          <a:ln/>
+        </p:spPr>
+        <p:txBody>
+          <a:bodyPr wrap="square" rtlCol="0" anchor="ctr"/>
+          <a:lstStyle/>
+          <a:p>
+            <a:pPr algn="ctr" indent="0" marL="0">
+              <a:buNone/>
+            </a:pPr>
+            <a:r>
+              <a:rPr lang="en-US" sz="1150" dirty="0">
+                <a:solidFill>
+                  <a:srgbClr val="E6FBF4"/>
+                </a:solidFill>
+                <a:latin typeface="Calibri" pitchFamily="34" charset="0"/>
+                <a:ea typeface="Calibri" pitchFamily="34" charset="-122"/>
+                <a:cs typeface="Calibri" pitchFamily="34" charset="-120"/>
+              </a:rPr>
+              <a:t>tag: latest + sha</a:t>
+            </a:r>
+            <a:endParaRPr lang="en-US" sz="1150" dirty="0"/>
+          </a:p>
+        </p:txBody>
+      </p:sp>
+      <p:sp>
+        <p:nvSpPr>
+          <p:cNvPr id="25" name="Shape 23"/>
+          <p:cNvSpPr/>
+          <p:nvPr/>
+        </p:nvSpPr>
+        <p:spPr>
+          <a:xfrm>
+            <a:off x="9272016" y="3035808"/>
+            <a:ext cx="329184" cy="0"/>
+          </a:xfrm>
+          <a:prstGeom prst="line">
+            <a:avLst/>
+          </a:prstGeom>
+          <a:noFill/>
+          <a:ln w="31750">
             <a:solidFill>
-              <a:srgbClr val="02C39A"/>
-            </a:solidFill>
-            <a:prstDash val="solid"/>
-          </a:ln>
-        </p:spPr>
-      </p:sp>
-      <p:sp>
-        <p:nvSpPr>
-          <p:cNvPr id="16" name="Text 14"/>
-          <p:cNvSpPr/>
-          <p:nvPr/>
-        </p:nvSpPr>
-        <p:spPr>
-          <a:xfrm>
-            <a:off x="7315200" y="2514600"/>
-            <a:ext cx="1965960" cy="457200"/>
-          </a:xfrm>
-          <a:prstGeom prst="rect">
-            <a:avLst/>
-          </a:prstGeom>
-          <a:noFill/>
-          <a:ln/>
-        </p:spPr>
-        <p:txBody>
-          <a:bodyPr wrap="square" rtlCol="0" anchor="ctr"/>
-          <a:lstStyle/>
-          <a:p>
-            <a:pPr algn="ctr" indent="0" marL="0">
-              <a:buNone/>
-            </a:pPr>
-            <a:r>
-              <a:rPr lang="en-US" sz="1700" b="1" dirty="0">
-                <a:solidFill>
-                  <a:srgbClr val="FFFFFF"/>
-                </a:solidFill>
-                <a:latin typeface="Cambria" pitchFamily="34" charset="0"/>
-                <a:ea typeface="Cambria" pitchFamily="34" charset="-122"/>
-                <a:cs typeface="Cambria" pitchFamily="34" charset="-120"/>
-              </a:rPr>
-              <a:t>Push ECR</a:t>
-            </a:r>
-            <a:endParaRPr lang="en-US" sz="1700" dirty="0"/>
-          </a:p>
-        </p:txBody>
-      </p:sp>
-      <p:sp>
-        <p:nvSpPr>
-          <p:cNvPr id="17" name="Text 15"/>
-          <p:cNvSpPr/>
-          <p:nvPr/>
-        </p:nvSpPr>
-        <p:spPr>
-          <a:xfrm>
-            <a:off x="7315200" y="3017520"/>
-            <a:ext cx="1965960" cy="457200"/>
-          </a:xfrm>
-          <a:prstGeom prst="rect">
-            <a:avLst/>
-          </a:prstGeom>
-          <a:noFill/>
-          <a:ln/>
-        </p:spPr>
-        <p:txBody>
-          <a:bodyPr wrap="square" rtlCol="0" anchor="ctr"/>
-          <a:lstStyle/>
-          <a:p>
-            <a:pPr algn="ctr" indent="0" marL="0">
-              <a:buNone/>
-            </a:pPr>
-            <a:r>
-              <a:rPr lang="en-US" sz="1200" dirty="0">
-                <a:solidFill>
-                  <a:srgbClr val="E6F0F0"/>
-                </a:solidFill>
-                <a:latin typeface="Calibri" pitchFamily="34" charset="0"/>
-                <a:ea typeface="Calibri" pitchFamily="34" charset="-122"/>
-                <a:cs typeface="Calibri" pitchFamily="34" charset="-120"/>
-              </a:rPr>
-              <a:t>tag: latest + sha</a:t>
-            </a:r>
-            <a:endParaRPr lang="en-US" sz="1200" dirty="0"/>
-          </a:p>
-        </p:txBody>
-      </p:sp>
-      <p:sp>
-        <p:nvSpPr>
-          <p:cNvPr id="18" name="Shape 16"/>
-          <p:cNvSpPr/>
-          <p:nvPr/>
-        </p:nvSpPr>
-        <p:spPr>
-          <a:xfrm>
-            <a:off x="9281160" y="2926080"/>
-            <a:ext cx="320040" cy="0"/>
-          </a:xfrm>
-          <a:prstGeom prst="line">
-            <a:avLst/>
-          </a:prstGeom>
-          <a:noFill/>
-          <a:ln w="25400">
-            <a:solidFill>
-              <a:srgbClr val="5A6B7B"/>
+              <a:srgbClr val="CFE0F2"/>
             </a:solidFill>
             <a:prstDash val="solid"/>
             <a:tailEnd type="triangle"/>
@@ -4795,41 +5620,82 @@
       </p:sp>
       <p:sp>
         <p:nvSpPr>
-          <p:cNvPr id="19" name="Shape 17"/>
-          <p:cNvSpPr/>
-          <p:nvPr/>
-        </p:nvSpPr>
-        <p:spPr>
-          <a:xfrm>
-            <a:off x="9601200" y="2194560"/>
-            <a:ext cx="1965960" cy="1463040"/>
+          <p:cNvPr id="26" name="Shape 24"/>
+          <p:cNvSpPr/>
+          <p:nvPr/>
+        </p:nvSpPr>
+        <p:spPr>
+          <a:xfrm>
+            <a:off x="9601200" y="2286000"/>
+            <a:ext cx="1956816" cy="1508760"/>
           </a:xfrm>
           <a:prstGeom prst="roundRect">
             <a:avLst>
-              <a:gd name="adj" fmla="val 7500"/>
+              <a:gd name="adj" fmla="val 7273"/>
             </a:avLst>
           </a:prstGeom>
           <a:solidFill>
-            <a:srgbClr val="13315C"/>
-          </a:solidFill>
-          <a:ln w="12700">
-            <a:solidFill>
-              <a:srgbClr val="13315C"/>
-            </a:solidFill>
-            <a:prstDash val="solid"/>
-          </a:ln>
-        </p:spPr>
-      </p:sp>
-      <p:sp>
-        <p:nvSpPr>
-          <p:cNvPr id="20" name="Text 18"/>
-          <p:cNvSpPr/>
-          <p:nvPr/>
-        </p:nvSpPr>
-        <p:spPr>
-          <a:xfrm>
-            <a:off x="9601200" y="2514600"/>
-            <a:ext cx="1965960" cy="457200"/>
+            <a:srgbClr val="0B7D62"/>
+          </a:solidFill>
+          <a:ln/>
+          <a:effectLst>
+            <a:outerShdw sx="100000" sy="100000" kx="0" ky="0" algn="bl" rotWithShape="0" blurRad="101600" dist="38100" dir="5400000">
+              <a:srgbClr val="000000">
+                <a:alpha val="40000"/>
+              </a:srgbClr>
+            </a:outerShdw>
+          </a:effectLst>
+        </p:spPr>
+      </p:sp>
+      <p:sp>
+        <p:nvSpPr>
+          <p:cNvPr id="27" name="Text 25"/>
+          <p:cNvSpPr/>
+          <p:nvPr/>
+        </p:nvSpPr>
+        <p:spPr>
+          <a:xfrm>
+            <a:off x="9738360" y="2395728"/>
+            <a:ext cx="457200" cy="365760"/>
+          </a:xfrm>
+          <a:prstGeom prst="rect">
+            <a:avLst/>
+          </a:prstGeom>
+          <a:noFill/>
+          <a:ln/>
+        </p:spPr>
+        <p:txBody>
+          <a:bodyPr wrap="square" rtlCol="0" anchor="ctr"/>
+          <a:lstStyle/>
+          <a:p>
+            <a:pPr indent="0" marL="0">
+              <a:buNone/>
+            </a:pPr>
+            <a:r>
+              <a:rPr lang="en-US" sz="1300" b="1" dirty="0">
+                <a:solidFill>
+                  <a:srgbClr val="BFF3E5"/>
+                </a:solidFill>
+                <a:latin typeface="Calibri" pitchFamily="34" charset="0"/>
+                <a:ea typeface="Calibri" pitchFamily="34" charset="-122"/>
+                <a:cs typeface="Calibri" pitchFamily="34" charset="-120"/>
+              </a:rPr>
+              <a:t>5</a:t>
+            </a:r>
+            <a:endParaRPr lang="en-US" sz="1300" dirty="0"/>
+          </a:p>
+        </p:txBody>
+      </p:sp>
+      <p:sp>
+        <p:nvSpPr>
+          <p:cNvPr id="28" name="Text 26"/>
+          <p:cNvSpPr/>
+          <p:nvPr/>
+        </p:nvSpPr>
+        <p:spPr>
+          <a:xfrm>
+            <a:off x="9601200" y="2743200"/>
+            <a:ext cx="1956816" cy="457200"/>
           </a:xfrm>
           <a:prstGeom prst="rect">
             <a:avLst/>
@@ -4849,9 +5715,9 @@
                 <a:solidFill>
                   <a:srgbClr val="FFFFFF"/>
                 </a:solidFill>
-                <a:latin typeface="Cambria" pitchFamily="34" charset="0"/>
-                <a:ea typeface="Cambria" pitchFamily="34" charset="-122"/>
-                <a:cs typeface="Cambria" pitchFamily="34" charset="-120"/>
+                <a:latin typeface="Calibri" pitchFamily="34" charset="0"/>
+                <a:ea typeface="Calibri" pitchFamily="34" charset="-122"/>
+                <a:cs typeface="Calibri" pitchFamily="34" charset="-120"/>
               </a:rPr>
               <a:t>Deploy</a:t>
             </a:r>
@@ -4861,14 +5727,14 @@
       </p:sp>
       <p:sp>
         <p:nvSpPr>
-          <p:cNvPr id="21" name="Text 19"/>
-          <p:cNvSpPr/>
-          <p:nvPr/>
-        </p:nvSpPr>
-        <p:spPr>
-          <a:xfrm>
-            <a:off x="9601200" y="3017520"/>
-            <a:ext cx="1965960" cy="457200"/>
+          <p:cNvPr id="29" name="Text 27"/>
+          <p:cNvSpPr/>
+          <p:nvPr/>
+        </p:nvSpPr>
+        <p:spPr>
+          <a:xfrm>
+            <a:off x="9601200" y="3218688"/>
+            <a:ext cx="1956816" cy="457200"/>
           </a:xfrm>
           <a:prstGeom prst="rect">
             <a:avLst/>
@@ -4884,9 +5750,9 @@
               <a:buNone/>
             </a:pPr>
             <a:r>
-              <a:rPr lang="en-US" sz="1200" dirty="0">
-                <a:solidFill>
-                  <a:srgbClr val="E6F0F0"/>
+              <a:rPr lang="en-US" sz="1150" dirty="0">
+                <a:solidFill>
+                  <a:srgbClr val="E6FBF4"/>
                 </a:solidFill>
                 <a:latin typeface="Calibri" pitchFamily="34" charset="0"/>
                 <a:ea typeface="Calibri" pitchFamily="34" charset="-122"/>
@@ -4894,19 +5760,19 @@
               </a:rPr>
               <a:t>a AWS EKS</a:t>
             </a:r>
-            <a:endParaRPr lang="en-US" sz="1200" dirty="0"/>
-          </a:p>
-        </p:txBody>
-      </p:sp>
-      <p:sp>
-        <p:nvSpPr>
-          <p:cNvPr id="22" name="Text 20"/>
-          <p:cNvSpPr/>
-          <p:nvPr/>
-        </p:nvSpPr>
-        <p:spPr>
-          <a:xfrm>
-            <a:off x="457200" y="4206240"/>
+            <a:endParaRPr lang="en-US" sz="1150" dirty="0"/>
+          </a:p>
+        </p:txBody>
+      </p:sp>
+      <p:sp>
+        <p:nvSpPr>
+          <p:cNvPr id="30" name="Text 28"/>
+          <p:cNvSpPr/>
+          <p:nvPr/>
+        </p:nvSpPr>
+        <p:spPr>
+          <a:xfrm>
+            <a:off x="457200" y="4343400"/>
             <a:ext cx="11247120" cy="548640"/>
           </a:xfrm>
           <a:prstGeom prst="rect">
@@ -4925,13 +5791,13 @@
             <a:r>
               <a:rPr lang="en-US" sz="1400" i="1" dirty="0">
                 <a:solidFill>
-                  <a:srgbClr val="1C7293"/>
-                </a:solidFill>
-                <a:latin typeface="Calibri" pitchFamily="34" charset="0"/>
-                <a:ea typeface="Calibri" pitchFamily="34" charset="-122"/>
-                <a:cs typeface="Calibri" pitchFamily="34" charset="-120"/>
-              </a:rPr>
-              <a:t>Si las pruebas fallan, el pipeline se detiene y no despliega  ·  Secretos gestionados con GitHub Secrets  ·  Un pipeline por componente</a:t>
+                  <a:srgbClr val="10D6A3"/>
+                </a:solidFill>
+                <a:latin typeface="Calibri" pitchFamily="34" charset="0"/>
+                <a:ea typeface="Calibri" pitchFamily="34" charset="-122"/>
+                <a:cs typeface="Calibri" pitchFamily="34" charset="-120"/>
+              </a:rPr>
+              <a:t>Si las pruebas fallan, el pipeline se detiene y no despliega   ·   Secretos con GitHub Secrets   ·   Un pipeline por componente</a:t>
             </a:r>
             <a:endParaRPr lang="en-US" sz="1400" dirty="0"/>
           </a:p>
@@ -4951,7 +5817,7 @@
     <p:bg>
       <p:bgPr>
         <a:solidFill>
-          <a:srgbClr val="0B2545"/>
+          <a:srgbClr val="0A1E33"/>
         </a:solidFill>
       </p:bgPr>
     </p:bg>
@@ -4971,42 +5837,23 @@
       </p:grpSpPr>
       <p:sp>
         <p:nvSpPr>
-          <p:cNvPr id="2" name="Text 0"/>
-          <p:cNvSpPr/>
-          <p:nvPr/>
-        </p:nvSpPr>
-        <p:spPr>
-          <a:xfrm>
-            <a:off x="548640" y="365760"/>
-            <a:ext cx="11064240" cy="731520"/>
-          </a:xfrm>
-          <a:prstGeom prst="rect">
-            <a:avLst/>
-          </a:prstGeom>
-          <a:noFill/>
-          <a:ln/>
-        </p:spPr>
-        <p:txBody>
-          <a:bodyPr wrap="square" rtlCol="0" anchor="ctr"/>
-          <a:lstStyle/>
-          <a:p>
-            <a:pPr indent="0" marL="0">
-              <a:buNone/>
-            </a:pPr>
-            <a:r>
-              <a:rPr lang="en-US" sz="3200" b="1" dirty="0">
-                <a:solidFill>
-                  <a:srgbClr val="FFFFFF"/>
-                </a:solidFill>
-                <a:latin typeface="Cambria" pitchFamily="34" charset="0"/>
-                <a:ea typeface="Cambria" pitchFamily="34" charset="-122"/>
-                <a:cs typeface="Cambria" pitchFamily="34" charset="-120"/>
-              </a:rPr>
-              <a:t>Despliegue en la nube (AWS)</a:t>
-            </a:r>
-            <a:endParaRPr lang="en-US" sz="3200" dirty="0"/>
-          </a:p>
-        </p:txBody>
+          <p:cNvPr id="2" name="Shape 0"/>
+          <p:cNvSpPr/>
+          <p:nvPr/>
+        </p:nvSpPr>
+        <p:spPr>
+          <a:xfrm>
+            <a:off x="9418320" y="-2011680"/>
+            <a:ext cx="5029200" cy="5029200"/>
+          </a:xfrm>
+          <a:prstGeom prst="ellipse">
+            <a:avLst/>
+          </a:prstGeom>
+          <a:solidFill>
+            <a:srgbClr val="102A46"/>
+          </a:solidFill>
+          <a:ln/>
+        </p:spPr>
       </p:sp>
       <p:sp>
         <p:nvSpPr>
@@ -5016,35 +5863,142 @@
         </p:nvSpPr>
         <p:spPr>
           <a:xfrm>
-            <a:off x="640080" y="1828800"/>
-            <a:ext cx="3383280" cy="1828800"/>
+            <a:off x="548640" y="502920"/>
+            <a:ext cx="566928" cy="566928"/>
           </a:xfrm>
           <a:prstGeom prst="roundRect">
             <a:avLst>
-              <a:gd name="adj" fmla="val 6000"/>
+              <a:gd name="adj" fmla="val 50000"/>
             </a:avLst>
           </a:prstGeom>
           <a:solidFill>
-            <a:srgbClr val="13315C"/>
+            <a:srgbClr val="10D6A3"/>
+          </a:solidFill>
+          <a:ln/>
+        </p:spPr>
+      </p:sp>
+      <p:sp>
+        <p:nvSpPr>
+          <p:cNvPr id="4" name="Text 2"/>
+          <p:cNvSpPr/>
+          <p:nvPr/>
+        </p:nvSpPr>
+        <p:spPr>
+          <a:xfrm>
+            <a:off x="548640" y="502920"/>
+            <a:ext cx="566928" cy="566928"/>
+          </a:xfrm>
+          <a:prstGeom prst="rect">
+            <a:avLst/>
+          </a:prstGeom>
+          <a:noFill/>
+          <a:ln/>
+        </p:spPr>
+        <p:txBody>
+          <a:bodyPr wrap="square" rtlCol="0" anchor="ctr"/>
+          <a:lstStyle/>
+          <a:p>
+            <a:pPr algn="ctr" indent="0" marL="0">
+              <a:buNone/>
+            </a:pPr>
+            <a:r>
+              <a:rPr lang="en-US" sz="2200" b="1" dirty="0">
+                <a:solidFill>
+                  <a:srgbClr val="0A1E33"/>
+                </a:solidFill>
+                <a:latin typeface="Calibri" pitchFamily="34" charset="0"/>
+                <a:ea typeface="Calibri" pitchFamily="34" charset="-122"/>
+                <a:cs typeface="Calibri" pitchFamily="34" charset="-120"/>
+              </a:rPr>
+              <a:t>4</a:t>
+            </a:r>
+            <a:endParaRPr lang="en-US" sz="2200" dirty="0"/>
+          </a:p>
+        </p:txBody>
+      </p:sp>
+      <p:sp>
+        <p:nvSpPr>
+          <p:cNvPr id="5" name="Text 3"/>
+          <p:cNvSpPr/>
+          <p:nvPr/>
+        </p:nvSpPr>
+        <p:spPr>
+          <a:xfrm>
+            <a:off x="1280160" y="457200"/>
+            <a:ext cx="10241280" cy="685800"/>
+          </a:xfrm>
+          <a:prstGeom prst="rect">
+            <a:avLst/>
+          </a:prstGeom>
+          <a:noFill/>
+          <a:ln/>
+        </p:spPr>
+        <p:txBody>
+          <a:bodyPr wrap="square" rtlCol="0" anchor="ctr"/>
+          <a:lstStyle/>
+          <a:p>
+            <a:pPr indent="0" marL="0">
+              <a:buNone/>
+            </a:pPr>
+            <a:r>
+              <a:rPr lang="en-US" sz="3000" b="1" dirty="0">
+                <a:solidFill>
+                  <a:srgbClr val="FFFFFF"/>
+                </a:solidFill>
+                <a:latin typeface="Calibri" pitchFamily="34" charset="0"/>
+                <a:ea typeface="Calibri" pitchFamily="34" charset="-122"/>
+                <a:cs typeface="Calibri" pitchFamily="34" charset="-120"/>
+              </a:rPr>
+              <a:t>Despliegue en la nube (AWS)</a:t>
+            </a:r>
+            <a:endParaRPr lang="en-US" sz="3000" dirty="0"/>
+          </a:p>
+        </p:txBody>
+      </p:sp>
+      <p:sp>
+        <p:nvSpPr>
+          <p:cNvPr id="6" name="Shape 4"/>
+          <p:cNvSpPr/>
+          <p:nvPr/>
+        </p:nvSpPr>
+        <p:spPr>
+          <a:xfrm>
+            <a:off x="640080" y="1737360"/>
+            <a:ext cx="3383280" cy="2011680"/>
+          </a:xfrm>
+          <a:prstGeom prst="roundRect">
+            <a:avLst>
+              <a:gd name="adj" fmla="val 4545"/>
+            </a:avLst>
+          </a:prstGeom>
+          <a:solidFill>
+            <a:srgbClr val="102A46"/>
           </a:solidFill>
           <a:ln w="12700">
             <a:solidFill>
-              <a:srgbClr val="1C7293"/>
+              <a:srgbClr val="2A5578"/>
             </a:solidFill>
             <a:prstDash val="solid"/>
           </a:ln>
-        </p:spPr>
-      </p:sp>
-      <p:sp>
-        <p:nvSpPr>
-          <p:cNvPr id="4" name="Text 2"/>
-          <p:cNvSpPr/>
-          <p:nvPr/>
-        </p:nvSpPr>
-        <p:spPr>
-          <a:xfrm>
-            <a:off x="640080" y="2194560"/>
-            <a:ext cx="3383280" cy="731520"/>
+          <a:effectLst>
+            <a:outerShdw sx="100000" sy="100000" kx="0" ky="0" algn="bl" rotWithShape="0" blurRad="114300" dist="50800" dir="5400000">
+              <a:srgbClr val="000000">
+                <a:alpha val="45000"/>
+              </a:srgbClr>
+            </a:outerShdw>
+          </a:effectLst>
+        </p:spPr>
+      </p:sp>
+      <p:sp>
+        <p:nvSpPr>
+          <p:cNvPr id="7" name="Text 5"/>
+          <p:cNvSpPr/>
+          <p:nvPr/>
+        </p:nvSpPr>
+        <p:spPr>
+          <a:xfrm>
+            <a:off x="640080" y="2011680"/>
+            <a:ext cx="3383280" cy="914400"/>
           </a:xfrm>
           <a:prstGeom prst="rect">
             <a:avLst/>
@@ -5060,29 +6014,29 @@
               <a:buNone/>
             </a:pPr>
             <a:r>
-              <a:rPr lang="en-US" sz="3000" b="1" dirty="0">
-                <a:solidFill>
-                  <a:srgbClr val="02C39A"/>
-                </a:solidFill>
-                <a:latin typeface="Cambria" pitchFamily="34" charset="0"/>
-                <a:ea typeface="Cambria" pitchFamily="34" charset="-122"/>
-                <a:cs typeface="Cambria" pitchFamily="34" charset="-120"/>
-              </a:rPr>
-              <a:t>ECR</a:t>
-            </a:r>
-            <a:endParaRPr lang="en-US" sz="3000" dirty="0"/>
-          </a:p>
-        </p:txBody>
-      </p:sp>
-      <p:sp>
-        <p:nvSpPr>
-          <p:cNvPr id="5" name="Text 3"/>
-          <p:cNvSpPr/>
-          <p:nvPr/>
-        </p:nvSpPr>
-        <p:spPr>
-          <a:xfrm>
-            <a:off x="640080" y="2971800"/>
+              <a:rPr lang="en-US" sz="5200" b="1" dirty="0">
+                <a:solidFill>
+                  <a:srgbClr val="10D6A3"/>
+                </a:solidFill>
+                <a:latin typeface="Calibri" pitchFamily="34" charset="0"/>
+                <a:ea typeface="Calibri" pitchFamily="34" charset="-122"/>
+                <a:cs typeface="Calibri" pitchFamily="34" charset="-120"/>
+              </a:rPr>
+              <a:t>3</a:t>
+            </a:r>
+            <a:endParaRPr lang="en-US" sz="5200" dirty="0"/>
+          </a:p>
+        </p:txBody>
+      </p:sp>
+      <p:sp>
+        <p:nvSpPr>
+          <p:cNvPr id="8" name="Text 6"/>
+          <p:cNvSpPr/>
+          <p:nvPr/>
+        </p:nvSpPr>
+        <p:spPr>
+          <a:xfrm>
+            <a:off x="640080" y="3108960"/>
             <a:ext cx="3383280" cy="457200"/>
           </a:xfrm>
           <a:prstGeom prst="rect">
@@ -5099,57 +6053,64 @@
               <a:buNone/>
             </a:pPr>
             <a:r>
-              <a:rPr lang="en-US" sz="1400" dirty="0">
-                <a:solidFill>
-                  <a:srgbClr val="CADCFC"/>
-                </a:solidFill>
-                <a:latin typeface="Calibri" pitchFamily="34" charset="0"/>
-                <a:ea typeface="Calibri" pitchFamily="34" charset="-122"/>
-                <a:cs typeface="Calibri" pitchFamily="34" charset="-120"/>
-              </a:rPr>
-              <a:t>3 repositorios de imágenes</a:t>
-            </a:r>
-            <a:endParaRPr lang="en-US" sz="1400" dirty="0"/>
-          </a:p>
-        </p:txBody>
-      </p:sp>
-      <p:sp>
-        <p:nvSpPr>
-          <p:cNvPr id="6" name="Shape 4"/>
-          <p:cNvSpPr/>
-          <p:nvPr/>
-        </p:nvSpPr>
-        <p:spPr>
-          <a:xfrm>
-            <a:off x="4297680" y="1828800"/>
-            <a:ext cx="3383280" cy="1828800"/>
+              <a:rPr lang="en-US" sz="1500" dirty="0">
+                <a:solidFill>
+                  <a:srgbClr val="CFE0F2"/>
+                </a:solidFill>
+                <a:latin typeface="Calibri" pitchFamily="34" charset="0"/>
+                <a:ea typeface="Calibri" pitchFamily="34" charset="-122"/>
+                <a:cs typeface="Calibri" pitchFamily="34" charset="-120"/>
+              </a:rPr>
+              <a:t>repositorios ECR</a:t>
+            </a:r>
+            <a:endParaRPr lang="en-US" sz="1500" dirty="0"/>
+          </a:p>
+        </p:txBody>
+      </p:sp>
+      <p:sp>
+        <p:nvSpPr>
+          <p:cNvPr id="9" name="Shape 7"/>
+          <p:cNvSpPr/>
+          <p:nvPr/>
+        </p:nvSpPr>
+        <p:spPr>
+          <a:xfrm>
+            <a:off x="4297680" y="1737360"/>
+            <a:ext cx="3383280" cy="2011680"/>
           </a:xfrm>
           <a:prstGeom prst="roundRect">
             <a:avLst>
-              <a:gd name="adj" fmla="val 6000"/>
+              <a:gd name="adj" fmla="val 4545"/>
             </a:avLst>
           </a:prstGeom>
           <a:solidFill>
-            <a:srgbClr val="13315C"/>
+            <a:srgbClr val="102A46"/>
           </a:solidFill>
           <a:ln w="12700">
             <a:solidFill>
-              <a:srgbClr val="1C7293"/>
+              <a:srgbClr val="2A5578"/>
             </a:solidFill>
             <a:prstDash val="solid"/>
           </a:ln>
-        </p:spPr>
-      </p:sp>
-      <p:sp>
-        <p:nvSpPr>
-          <p:cNvPr id="7" name="Text 5"/>
-          <p:cNvSpPr/>
-          <p:nvPr/>
-        </p:nvSpPr>
-        <p:spPr>
-          <a:xfrm>
-            <a:off x="4297680" y="2194560"/>
-            <a:ext cx="3383280" cy="731520"/>
+          <a:effectLst>
+            <a:outerShdw sx="100000" sy="100000" kx="0" ky="0" algn="bl" rotWithShape="0" blurRad="114300" dist="50800" dir="5400000">
+              <a:srgbClr val="000000">
+                <a:alpha val="45000"/>
+              </a:srgbClr>
+            </a:outerShdw>
+          </a:effectLst>
+        </p:spPr>
+      </p:sp>
+      <p:sp>
+        <p:nvSpPr>
+          <p:cNvPr id="10" name="Text 8"/>
+          <p:cNvSpPr/>
+          <p:nvPr/>
+        </p:nvSpPr>
+        <p:spPr>
+          <a:xfrm>
+            <a:off x="4297680" y="2011680"/>
+            <a:ext cx="3383280" cy="914400"/>
           </a:xfrm>
           <a:prstGeom prst="rect">
             <a:avLst/>
@@ -5165,29 +6126,29 @@
               <a:buNone/>
             </a:pPr>
             <a:r>
-              <a:rPr lang="en-US" sz="3000" b="1" dirty="0">
-                <a:solidFill>
-                  <a:srgbClr val="02C39A"/>
-                </a:solidFill>
-                <a:latin typeface="Cambria" pitchFamily="34" charset="0"/>
-                <a:ea typeface="Cambria" pitchFamily="34" charset="-122"/>
-                <a:cs typeface="Cambria" pitchFamily="34" charset="-120"/>
-              </a:rPr>
-              <a:t>EKS</a:t>
-            </a:r>
-            <a:endParaRPr lang="en-US" sz="3000" dirty="0"/>
-          </a:p>
-        </p:txBody>
-      </p:sp>
-      <p:sp>
-        <p:nvSpPr>
-          <p:cNvPr id="8" name="Text 6"/>
-          <p:cNvSpPr/>
-          <p:nvPr/>
-        </p:nvSpPr>
-        <p:spPr>
-          <a:xfrm>
-            <a:off x="4297680" y="2971800"/>
+              <a:rPr lang="en-US" sz="5200" b="1" dirty="0">
+                <a:solidFill>
+                  <a:srgbClr val="10D6A3"/>
+                </a:solidFill>
+                <a:latin typeface="Calibri" pitchFamily="34" charset="0"/>
+                <a:ea typeface="Calibri" pitchFamily="34" charset="-122"/>
+                <a:cs typeface="Calibri" pitchFamily="34" charset="-120"/>
+              </a:rPr>
+              <a:t>5</a:t>
+            </a:r>
+            <a:endParaRPr lang="en-US" sz="5200" dirty="0"/>
+          </a:p>
+        </p:txBody>
+      </p:sp>
+      <p:sp>
+        <p:nvSpPr>
+          <p:cNvPr id="11" name="Text 9"/>
+          <p:cNvSpPr/>
+          <p:nvPr/>
+        </p:nvSpPr>
+        <p:spPr>
+          <a:xfrm>
+            <a:off x="4297680" y="3108960"/>
             <a:ext cx="3383280" cy="457200"/>
           </a:xfrm>
           <a:prstGeom prst="rect">
@@ -5204,57 +6165,64 @@
               <a:buNone/>
             </a:pPr>
             <a:r>
-              <a:rPr lang="en-US" sz="1400" dirty="0">
-                <a:solidFill>
-                  <a:srgbClr val="CADCFC"/>
-                </a:solidFill>
-                <a:latin typeface="Calibri" pitchFamily="34" charset="0"/>
-                <a:ea typeface="Calibri" pitchFamily="34" charset="-122"/>
-                <a:cs typeface="Calibri" pitchFamily="34" charset="-120"/>
-              </a:rPr>
-              <a:t>2 nodos · 5 pods</a:t>
-            </a:r>
-            <a:endParaRPr lang="en-US" sz="1400" dirty="0"/>
-          </a:p>
-        </p:txBody>
-      </p:sp>
-      <p:sp>
-        <p:nvSpPr>
-          <p:cNvPr id="9" name="Shape 7"/>
-          <p:cNvSpPr/>
-          <p:nvPr/>
-        </p:nvSpPr>
-        <p:spPr>
-          <a:xfrm>
-            <a:off x="7955280" y="1828800"/>
-            <a:ext cx="3383280" cy="1828800"/>
+              <a:rPr lang="en-US" sz="1500" dirty="0">
+                <a:solidFill>
+                  <a:srgbClr val="CFE0F2"/>
+                </a:solidFill>
+                <a:latin typeface="Calibri" pitchFamily="34" charset="0"/>
+                <a:ea typeface="Calibri" pitchFamily="34" charset="-122"/>
+                <a:cs typeface="Calibri" pitchFamily="34" charset="-120"/>
+              </a:rPr>
+              <a:t>pods en EKS</a:t>
+            </a:r>
+            <a:endParaRPr lang="en-US" sz="1500" dirty="0"/>
+          </a:p>
+        </p:txBody>
+      </p:sp>
+      <p:sp>
+        <p:nvSpPr>
+          <p:cNvPr id="12" name="Shape 10"/>
+          <p:cNvSpPr/>
+          <p:nvPr/>
+        </p:nvSpPr>
+        <p:spPr>
+          <a:xfrm>
+            <a:off x="7955280" y="1737360"/>
+            <a:ext cx="3383280" cy="2011680"/>
           </a:xfrm>
           <a:prstGeom prst="roundRect">
             <a:avLst>
-              <a:gd name="adj" fmla="val 6000"/>
+              <a:gd name="adj" fmla="val 4545"/>
             </a:avLst>
           </a:prstGeom>
           <a:solidFill>
-            <a:srgbClr val="13315C"/>
+            <a:srgbClr val="102A46"/>
           </a:solidFill>
           <a:ln w="12700">
             <a:solidFill>
-              <a:srgbClr val="1C7293"/>
+              <a:srgbClr val="2A5578"/>
             </a:solidFill>
             <a:prstDash val="solid"/>
           </a:ln>
-        </p:spPr>
-      </p:sp>
-      <p:sp>
-        <p:nvSpPr>
-          <p:cNvPr id="10" name="Text 8"/>
-          <p:cNvSpPr/>
-          <p:nvPr/>
-        </p:nvSpPr>
-        <p:spPr>
-          <a:xfrm>
-            <a:off x="7955280" y="2194560"/>
-            <a:ext cx="3383280" cy="731520"/>
+          <a:effectLst>
+            <a:outerShdw sx="100000" sy="100000" kx="0" ky="0" algn="bl" rotWithShape="0" blurRad="114300" dist="50800" dir="5400000">
+              <a:srgbClr val="000000">
+                <a:alpha val="45000"/>
+              </a:srgbClr>
+            </a:outerShdw>
+          </a:effectLst>
+        </p:spPr>
+      </p:sp>
+      <p:sp>
+        <p:nvSpPr>
+          <p:cNvPr id="13" name="Text 11"/>
+          <p:cNvSpPr/>
+          <p:nvPr/>
+        </p:nvSpPr>
+        <p:spPr>
+          <a:xfrm>
+            <a:off x="7955280" y="2011680"/>
+            <a:ext cx="3383280" cy="914400"/>
           </a:xfrm>
           <a:prstGeom prst="rect">
             <a:avLst/>
@@ -5270,29 +6238,29 @@
               <a:buNone/>
             </a:pPr>
             <a:r>
-              <a:rPr lang="en-US" sz="3000" b="1" dirty="0">
-                <a:solidFill>
-                  <a:srgbClr val="02C39A"/>
-                </a:solidFill>
-                <a:latin typeface="Cambria" pitchFamily="34" charset="0"/>
-                <a:ea typeface="Cambria" pitchFamily="34" charset="-122"/>
-                <a:cs typeface="Cambria" pitchFamily="34" charset="-120"/>
-              </a:rPr>
-              <a:t>LoadBalancer</a:t>
-            </a:r>
-            <a:endParaRPr lang="en-US" sz="3000" dirty="0"/>
-          </a:p>
-        </p:txBody>
-      </p:sp>
-      <p:sp>
-        <p:nvSpPr>
-          <p:cNvPr id="11" name="Text 9"/>
-          <p:cNvSpPr/>
-          <p:nvPr/>
-        </p:nvSpPr>
-        <p:spPr>
-          <a:xfrm>
-            <a:off x="7955280" y="2971800"/>
+              <a:rPr lang="en-US" sz="5200" b="1" dirty="0">
+                <a:solidFill>
+                  <a:srgbClr val="10D6A3"/>
+                </a:solidFill>
+                <a:latin typeface="Calibri" pitchFamily="34" charset="0"/>
+                <a:ea typeface="Calibri" pitchFamily="34" charset="-122"/>
+                <a:cs typeface="Calibri" pitchFamily="34" charset="-120"/>
+              </a:rPr>
+              <a:t>1</a:t>
+            </a:r>
+            <a:endParaRPr lang="en-US" sz="5200" dirty="0"/>
+          </a:p>
+        </p:txBody>
+      </p:sp>
+      <p:sp>
+        <p:nvSpPr>
+          <p:cNvPr id="14" name="Text 12"/>
+          <p:cNvSpPr/>
+          <p:nvPr/>
+        </p:nvSpPr>
+        <p:spPr>
+          <a:xfrm>
+            <a:off x="7955280" y="3108960"/>
             <a:ext cx="3383280" cy="457200"/>
           </a:xfrm>
           <a:prstGeom prst="rect">
@@ -5309,29 +6277,29 @@
               <a:buNone/>
             </a:pPr>
             <a:r>
-              <a:rPr lang="en-US" sz="1400" dirty="0">
-                <a:solidFill>
-                  <a:srgbClr val="CADCFC"/>
-                </a:solidFill>
-                <a:latin typeface="Calibri" pitchFamily="34" charset="0"/>
-                <a:ea typeface="Calibri" pitchFamily="34" charset="-122"/>
-                <a:cs typeface="Calibri" pitchFamily="34" charset="-120"/>
-              </a:rPr>
-              <a:t>URL pública (ELB)</a:t>
-            </a:r>
-            <a:endParaRPr lang="en-US" sz="1400" dirty="0"/>
-          </a:p>
-        </p:txBody>
-      </p:sp>
-      <p:sp>
-        <p:nvSpPr>
-          <p:cNvPr id="12" name="Text 10"/>
-          <p:cNvSpPr/>
-          <p:nvPr/>
-        </p:nvSpPr>
-        <p:spPr>
-          <a:xfrm>
-            <a:off x="640080" y="4206240"/>
+              <a:rPr lang="en-US" sz="1500" dirty="0">
+                <a:solidFill>
+                  <a:srgbClr val="CFE0F2"/>
+                </a:solidFill>
+                <a:latin typeface="Calibri" pitchFamily="34" charset="0"/>
+                <a:ea typeface="Calibri" pitchFamily="34" charset="-122"/>
+                <a:cs typeface="Calibri" pitchFamily="34" charset="-120"/>
+              </a:rPr>
+              <a:t>LoadBalancer público</a:t>
+            </a:r>
+            <a:endParaRPr lang="en-US" sz="1500" dirty="0"/>
+          </a:p>
+        </p:txBody>
+      </p:sp>
+      <p:sp>
+        <p:nvSpPr>
+          <p:cNvPr id="15" name="Text 13"/>
+          <p:cNvSpPr/>
+          <p:nvPr/>
+        </p:nvSpPr>
+        <p:spPr>
+          <a:xfrm>
+            <a:off x="640080" y="4160520"/>
             <a:ext cx="10881360" cy="914400"/>
           </a:xfrm>
           <a:prstGeom prst="rect">
@@ -5350,13 +6318,13 @@
             <a:r>
               <a:rPr lang="en-US" sz="1500" dirty="0">
                 <a:solidFill>
-                  <a:srgbClr val="CADCFC"/>
-                </a:solidFill>
-                <a:latin typeface="Calibri" pitchFamily="34" charset="0"/>
-                <a:ea typeface="Calibri" pitchFamily="34" charset="-122"/>
-                <a:cs typeface="Calibri" pitchFamily="34" charset="-120"/>
-              </a:rPr>
-              <a:t>La aplicación se construye y despliega automáticamente al hacer push. El frontend queda accesible por la URL del LoadBalancer, conectado al backend y a la base de datos.</a:t>
+                  <a:srgbClr val="CFE0F2"/>
+                </a:solidFill>
+                <a:latin typeface="Calibri" pitchFamily="34" charset="0"/>
+                <a:ea typeface="Calibri" pitchFamily="34" charset="-122"/>
+                <a:cs typeface="Calibri" pitchFamily="34" charset="-120"/>
+              </a:rPr>
+              <a:t>La aplicación se construye y despliega automáticamente al hacer push. El frontend queda accesible por la URL del LoadBalancer, conectado al backend y a la base de datos MySQL.</a:t>
             </a:r>
             <a:endParaRPr lang="en-US" sz="1500" dirty="0"/>
           </a:p>
@@ -5376,7 +6344,7 @@
     <p:bg>
       <p:bgPr>
         <a:solidFill>
-          <a:srgbClr val="FFFFFF"/>
+          <a:srgbClr val="0A1E33"/>
         </a:solidFill>
       </p:bgPr>
     </p:bg>
@@ -5396,42 +6364,23 @@
       </p:grpSpPr>
       <p:sp>
         <p:nvSpPr>
-          <p:cNvPr id="2" name="Text 0"/>
-          <p:cNvSpPr/>
-          <p:nvPr/>
-        </p:nvSpPr>
-        <p:spPr>
-          <a:xfrm>
-            <a:off x="548640" y="365760"/>
-            <a:ext cx="11064240" cy="731520"/>
-          </a:xfrm>
-          <a:prstGeom prst="rect">
-            <a:avLst/>
-          </a:prstGeom>
-          <a:noFill/>
-          <a:ln/>
-        </p:spPr>
-        <p:txBody>
-          <a:bodyPr wrap="square" rtlCol="0" anchor="ctr"/>
-          <a:lstStyle/>
-          <a:p>
-            <a:pPr indent="0" marL="0">
-              <a:buNone/>
-            </a:pPr>
-            <a:r>
-              <a:rPr lang="en-US" sz="3200" b="1" dirty="0">
-                <a:solidFill>
-                  <a:srgbClr val="13315C"/>
-                </a:solidFill>
-                <a:latin typeface="Cambria" pitchFamily="34" charset="0"/>
-                <a:ea typeface="Cambria" pitchFamily="34" charset="-122"/>
-                <a:cs typeface="Cambria" pitchFamily="34" charset="-120"/>
-              </a:rPr>
-              <a:t>Orquestación y escalabilidad (EKS)</a:t>
-            </a:r>
-            <a:endParaRPr lang="en-US" sz="3200" dirty="0"/>
-          </a:p>
-        </p:txBody>
+          <p:cNvPr id="2" name="Shape 0"/>
+          <p:cNvSpPr/>
+          <p:nvPr/>
+        </p:nvSpPr>
+        <p:spPr>
+          <a:xfrm>
+            <a:off x="9418320" y="-2011680"/>
+            <a:ext cx="5029200" cy="5029200"/>
+          </a:xfrm>
+          <a:prstGeom prst="ellipse">
+            <a:avLst/>
+          </a:prstGeom>
+          <a:solidFill>
+            <a:srgbClr val="102A46"/>
+          </a:solidFill>
+          <a:ln/>
+        </p:spPr>
       </p:sp>
       <p:sp>
         <p:nvSpPr>
@@ -5441,35 +6390,8 @@
         </p:nvSpPr>
         <p:spPr>
           <a:xfrm>
-            <a:off x="640080" y="1554480"/>
-            <a:ext cx="5212080" cy="1463040"/>
-          </a:xfrm>
-          <a:prstGeom prst="roundRect">
-            <a:avLst>
-              <a:gd name="adj" fmla="val 6250"/>
-            </a:avLst>
-          </a:prstGeom>
-          <a:solidFill>
-            <a:srgbClr val="F4F7FA"/>
-          </a:solidFill>
-          <a:ln w="12700">
-            <a:solidFill>
-              <a:srgbClr val="D8E1EA"/>
-            </a:solidFill>
-            <a:prstDash val="solid"/>
-          </a:ln>
-        </p:spPr>
-      </p:sp>
-      <p:sp>
-        <p:nvSpPr>
-          <p:cNvPr id="4" name="Shape 2"/>
-          <p:cNvSpPr/>
-          <p:nvPr/>
-        </p:nvSpPr>
-        <p:spPr>
-          <a:xfrm>
-            <a:off x="914400" y="1965960"/>
-            <a:ext cx="640080" cy="640080"/>
+            <a:off x="548640" y="502920"/>
+            <a:ext cx="566928" cy="566928"/>
           </a:xfrm>
           <a:prstGeom prst="roundRect">
             <a:avLst>
@@ -5477,27 +6399,154 @@
             </a:avLst>
           </a:prstGeom>
           <a:solidFill>
-            <a:srgbClr val="1C7293"/>
+            <a:srgbClr val="10D6A3"/>
+          </a:solidFill>
+          <a:ln/>
+        </p:spPr>
+      </p:sp>
+      <p:sp>
+        <p:nvSpPr>
+          <p:cNvPr id="4" name="Text 2"/>
+          <p:cNvSpPr/>
+          <p:nvPr/>
+        </p:nvSpPr>
+        <p:spPr>
+          <a:xfrm>
+            <a:off x="548640" y="502920"/>
+            <a:ext cx="566928" cy="566928"/>
+          </a:xfrm>
+          <a:prstGeom prst="rect">
+            <a:avLst/>
+          </a:prstGeom>
+          <a:noFill/>
+          <a:ln/>
+        </p:spPr>
+        <p:txBody>
+          <a:bodyPr wrap="square" rtlCol="0" anchor="ctr"/>
+          <a:lstStyle/>
+          <a:p>
+            <a:pPr algn="ctr" indent="0" marL="0">
+              <a:buNone/>
+            </a:pPr>
+            <a:r>
+              <a:rPr lang="en-US" sz="2200" b="1" dirty="0">
+                <a:solidFill>
+                  <a:srgbClr val="0A1E33"/>
+                </a:solidFill>
+                <a:latin typeface="Calibri" pitchFamily="34" charset="0"/>
+                <a:ea typeface="Calibri" pitchFamily="34" charset="-122"/>
+                <a:cs typeface="Calibri" pitchFamily="34" charset="-120"/>
+              </a:rPr>
+              <a:t>5</a:t>
+            </a:r>
+            <a:endParaRPr lang="en-US" sz="2200" dirty="0"/>
+          </a:p>
+        </p:txBody>
+      </p:sp>
+      <p:sp>
+        <p:nvSpPr>
+          <p:cNvPr id="5" name="Text 3"/>
+          <p:cNvSpPr/>
+          <p:nvPr/>
+        </p:nvSpPr>
+        <p:spPr>
+          <a:xfrm>
+            <a:off x="1280160" y="457200"/>
+            <a:ext cx="10241280" cy="685800"/>
+          </a:xfrm>
+          <a:prstGeom prst="rect">
+            <a:avLst/>
+          </a:prstGeom>
+          <a:noFill/>
+          <a:ln/>
+        </p:spPr>
+        <p:txBody>
+          <a:bodyPr wrap="square" rtlCol="0" anchor="ctr"/>
+          <a:lstStyle/>
+          <a:p>
+            <a:pPr indent="0" marL="0">
+              <a:buNone/>
+            </a:pPr>
+            <a:r>
+              <a:rPr lang="en-US" sz="3000" b="1" dirty="0">
+                <a:solidFill>
+                  <a:srgbClr val="FFFFFF"/>
+                </a:solidFill>
+                <a:latin typeface="Calibri" pitchFamily="34" charset="0"/>
+                <a:ea typeface="Calibri" pitchFamily="34" charset="-122"/>
+                <a:cs typeface="Calibri" pitchFamily="34" charset="-120"/>
+              </a:rPr>
+              <a:t>Orquestación y escalabilidad (EKS)</a:t>
+            </a:r>
+            <a:endParaRPr lang="en-US" sz="3000" dirty="0"/>
+          </a:p>
+        </p:txBody>
+      </p:sp>
+      <p:sp>
+        <p:nvSpPr>
+          <p:cNvPr id="6" name="Shape 4"/>
+          <p:cNvSpPr/>
+          <p:nvPr/>
+        </p:nvSpPr>
+        <p:spPr>
+          <a:xfrm>
+            <a:off x="640080" y="1554480"/>
+            <a:ext cx="5257800" cy="1508760"/>
+          </a:xfrm>
+          <a:prstGeom prst="roundRect">
+            <a:avLst>
+              <a:gd name="adj" fmla="val 6061"/>
+            </a:avLst>
+          </a:prstGeom>
+          <a:solidFill>
+            <a:srgbClr val="163A5C"/>
           </a:solidFill>
           <a:ln w="12700">
             <a:solidFill>
-              <a:srgbClr val="1C7293"/>
+              <a:srgbClr val="2A5578"/>
             </a:solidFill>
             <a:prstDash val="solid"/>
           </a:ln>
-        </p:spPr>
-      </p:sp>
-      <p:sp>
-        <p:nvSpPr>
-          <p:cNvPr id="5" name="Text 3"/>
-          <p:cNvSpPr/>
-          <p:nvPr/>
-        </p:nvSpPr>
-        <p:spPr>
-          <a:xfrm>
-            <a:off x="914400" y="1965960"/>
+          <a:effectLst>
+            <a:outerShdw sx="100000" sy="100000" kx="0" ky="0" algn="bl" rotWithShape="0" blurRad="114300" dist="50800" dir="5400000">
+              <a:srgbClr val="000000">
+                <a:alpha val="45000"/>
+              </a:srgbClr>
+            </a:outerShdw>
+          </a:effectLst>
+        </p:spPr>
+      </p:sp>
+      <p:sp>
+        <p:nvSpPr>
+          <p:cNvPr id="7" name="Shape 5"/>
+          <p:cNvSpPr/>
+          <p:nvPr/>
+        </p:nvSpPr>
+        <p:spPr>
+          <a:xfrm>
+            <a:off x="914400" y="1993392"/>
             <a:ext cx="640080" cy="640080"/>
           </a:xfrm>
+          <a:prstGeom prst="ellipse">
+            <a:avLst/>
+          </a:prstGeom>
+          <a:solidFill>
+            <a:srgbClr val="10D6A3"/>
+          </a:solidFill>
+          <a:ln/>
+        </p:spPr>
+      </p:sp>
+      <p:sp>
+        <p:nvSpPr>
+          <p:cNvPr id="8" name="Text 6"/>
+          <p:cNvSpPr/>
+          <p:nvPr/>
+        </p:nvSpPr>
+        <p:spPr>
+          <a:xfrm>
+            <a:off x="914400" y="1993392"/>
+            <a:ext cx="640080" cy="640080"/>
+          </a:xfrm>
           <a:prstGeom prst="rect">
             <a:avLst/>
           </a:prstGeom>
@@ -5512,27 +6561,27 @@
               <a:buNone/>
             </a:pPr>
             <a:r>
-              <a:rPr lang="en-US" sz="2000" dirty="0">
+              <a:rPr lang="en-US" sz="2100" dirty="0">
                 <a:solidFill>
                   <a:srgbClr val="000000"/>
                 </a:solidFill>
               </a:rPr>
               <a:t>📈</a:t>
             </a:r>
-            <a:endParaRPr lang="en-US" sz="2000" dirty="0"/>
-          </a:p>
-        </p:txBody>
-      </p:sp>
-      <p:sp>
-        <p:nvSpPr>
-          <p:cNvPr id="6" name="Text 4"/>
-          <p:cNvSpPr/>
-          <p:nvPr/>
-        </p:nvSpPr>
-        <p:spPr>
-          <a:xfrm>
-            <a:off x="1737360" y="1783080"/>
-            <a:ext cx="3931920" cy="457200"/>
+            <a:endParaRPr lang="en-US" sz="2100" dirty="0"/>
+          </a:p>
+        </p:txBody>
+      </p:sp>
+      <p:sp>
+        <p:nvSpPr>
+          <p:cNvPr id="9" name="Text 7"/>
+          <p:cNvSpPr/>
+          <p:nvPr/>
+        </p:nvSpPr>
+        <p:spPr>
+          <a:xfrm>
+            <a:off x="1737360" y="1810512"/>
+            <a:ext cx="4023360" cy="457200"/>
           </a:xfrm>
           <a:prstGeom prst="rect">
             <a:avLst/>
@@ -5550,11 +6599,11 @@
             <a:r>
               <a:rPr lang="en-US" sz="1600" b="1" dirty="0">
                 <a:solidFill>
-                  <a:srgbClr val="13315C"/>
-                </a:solidFill>
-                <a:latin typeface="Cambria" pitchFamily="34" charset="0"/>
-                <a:ea typeface="Cambria" pitchFamily="34" charset="-122"/>
-                <a:cs typeface="Cambria" pitchFamily="34" charset="-120"/>
+                  <a:srgbClr val="FFFFFF"/>
+                </a:solidFill>
+                <a:latin typeface="Calibri" pitchFamily="34" charset="0"/>
+                <a:ea typeface="Calibri" pitchFamily="34" charset="-122"/>
+                <a:cs typeface="Calibri" pitchFamily="34" charset="-120"/>
               </a:rPr>
               <a:t>Autoescalado (HPA)</a:t>
             </a:r>
@@ -5564,14 +6613,14 @@
       </p:sp>
       <p:sp>
         <p:nvSpPr>
-          <p:cNvPr id="7" name="Text 5"/>
-          <p:cNvSpPr/>
-          <p:nvPr/>
-        </p:nvSpPr>
-        <p:spPr>
-          <a:xfrm>
-            <a:off x="1737360" y="2240280"/>
-            <a:ext cx="3931920" cy="640080"/>
+          <p:cNvPr id="10" name="Text 8"/>
+          <p:cNvSpPr/>
+          <p:nvPr/>
+        </p:nvSpPr>
+        <p:spPr>
+          <a:xfrm>
+            <a:off x="1737360" y="2267712"/>
+            <a:ext cx="4023360" cy="640080"/>
           </a:xfrm>
           <a:prstGeom prst="rect">
             <a:avLst/>
@@ -5589,7 +6638,7 @@
             <a:r>
               <a:rPr lang="en-US" sz="1250" dirty="0">
                 <a:solidFill>
-                  <a:srgbClr val="1A2330"/>
+                  <a:srgbClr val="CFE0F2"/>
                 </a:solidFill>
                 <a:latin typeface="Calibri" pitchFamily="34" charset="0"/>
                 <a:ea typeface="Calibri" pitchFamily="34" charset="-122"/>
@@ -5603,69 +6652,237 @@
       </p:sp>
       <p:sp>
         <p:nvSpPr>
-          <p:cNvPr id="8" name="Shape 6"/>
-          <p:cNvSpPr/>
-          <p:nvPr/>
-        </p:nvSpPr>
-        <p:spPr>
-          <a:xfrm>
-            <a:off x="6217920" y="1554480"/>
-            <a:ext cx="5212080" cy="1463040"/>
+          <p:cNvPr id="11" name="Shape 9"/>
+          <p:cNvSpPr/>
+          <p:nvPr/>
+        </p:nvSpPr>
+        <p:spPr>
+          <a:xfrm>
+            <a:off x="6263640" y="1554480"/>
+            <a:ext cx="5257800" cy="1508760"/>
           </a:xfrm>
           <a:prstGeom prst="roundRect">
             <a:avLst>
-              <a:gd name="adj" fmla="val 6250"/>
+              <a:gd name="adj" fmla="val 6061"/>
             </a:avLst>
           </a:prstGeom>
           <a:solidFill>
-            <a:srgbClr val="F4F7FA"/>
+            <a:srgbClr val="163A5C"/>
           </a:solidFill>
           <a:ln w="12700">
             <a:solidFill>
-              <a:srgbClr val="D8E1EA"/>
+              <a:srgbClr val="2A5578"/>
             </a:solidFill>
             <a:prstDash val="solid"/>
           </a:ln>
-        </p:spPr>
-      </p:sp>
-      <p:sp>
-        <p:nvSpPr>
-          <p:cNvPr id="9" name="Shape 7"/>
-          <p:cNvSpPr/>
-          <p:nvPr/>
-        </p:nvSpPr>
-        <p:spPr>
-          <a:xfrm>
-            <a:off x="6492240" y="1965960"/>
+          <a:effectLst>
+            <a:outerShdw sx="100000" sy="100000" kx="0" ky="0" algn="bl" rotWithShape="0" blurRad="114300" dist="50800" dir="5400000">
+              <a:srgbClr val="000000">
+                <a:alpha val="45000"/>
+              </a:srgbClr>
+            </a:outerShdw>
+          </a:effectLst>
+        </p:spPr>
+      </p:sp>
+      <p:sp>
+        <p:nvSpPr>
+          <p:cNvPr id="12" name="Shape 10"/>
+          <p:cNvSpPr/>
+          <p:nvPr/>
+        </p:nvSpPr>
+        <p:spPr>
+          <a:xfrm>
+            <a:off x="6537960" y="1993392"/>
             <a:ext cx="640080" cy="640080"/>
+          </a:xfrm>
+          <a:prstGeom prst="ellipse">
+            <a:avLst/>
+          </a:prstGeom>
+          <a:solidFill>
+            <a:srgbClr val="3AA0B8"/>
+          </a:solidFill>
+          <a:ln/>
+        </p:spPr>
+      </p:sp>
+      <p:sp>
+        <p:nvSpPr>
+          <p:cNvPr id="13" name="Text 11"/>
+          <p:cNvSpPr/>
+          <p:nvPr/>
+        </p:nvSpPr>
+        <p:spPr>
+          <a:xfrm>
+            <a:off x="6537960" y="1993392"/>
+            <a:ext cx="640080" cy="640080"/>
+          </a:xfrm>
+          <a:prstGeom prst="rect">
+            <a:avLst/>
+          </a:prstGeom>
+          <a:noFill/>
+          <a:ln/>
+        </p:spPr>
+        <p:txBody>
+          <a:bodyPr wrap="square" rtlCol="0" anchor="ctr"/>
+          <a:lstStyle/>
+          <a:p>
+            <a:pPr algn="ctr" indent="0" marL="0">
+              <a:buNone/>
+            </a:pPr>
+            <a:r>
+              <a:rPr lang="en-US" sz="2100" dirty="0">
+                <a:solidFill>
+                  <a:srgbClr val="000000"/>
+                </a:solidFill>
+              </a:rPr>
+              <a:t>❤️</a:t>
+            </a:r>
+            <a:endParaRPr lang="en-US" sz="2100" dirty="0"/>
+          </a:p>
+        </p:txBody>
+      </p:sp>
+      <p:sp>
+        <p:nvSpPr>
+          <p:cNvPr id="14" name="Text 12"/>
+          <p:cNvSpPr/>
+          <p:nvPr/>
+        </p:nvSpPr>
+        <p:spPr>
+          <a:xfrm>
+            <a:off x="7360920" y="1810512"/>
+            <a:ext cx="4023360" cy="457200"/>
+          </a:xfrm>
+          <a:prstGeom prst="rect">
+            <a:avLst/>
+          </a:prstGeom>
+          <a:noFill/>
+          <a:ln/>
+        </p:spPr>
+        <p:txBody>
+          <a:bodyPr wrap="square" rtlCol="0" anchor="ctr"/>
+          <a:lstStyle/>
+          <a:p>
+            <a:pPr indent="0" marL="0">
+              <a:buNone/>
+            </a:pPr>
+            <a:r>
+              <a:rPr lang="en-US" sz="1600" b="1" dirty="0">
+                <a:solidFill>
+                  <a:srgbClr val="FFFFFF"/>
+                </a:solidFill>
+                <a:latin typeface="Calibri" pitchFamily="34" charset="0"/>
+                <a:ea typeface="Calibri" pitchFamily="34" charset="-122"/>
+                <a:cs typeface="Calibri" pitchFamily="34" charset="-120"/>
+              </a:rPr>
+              <a:t>Auto-recuperación</a:t>
+            </a:r>
+            <a:endParaRPr lang="en-US" sz="1600" dirty="0"/>
+          </a:p>
+        </p:txBody>
+      </p:sp>
+      <p:sp>
+        <p:nvSpPr>
+          <p:cNvPr id="15" name="Text 13"/>
+          <p:cNvSpPr/>
+          <p:nvPr/>
+        </p:nvSpPr>
+        <p:spPr>
+          <a:xfrm>
+            <a:off x="7360920" y="2267712"/>
+            <a:ext cx="4023360" cy="640080"/>
+          </a:xfrm>
+          <a:prstGeom prst="rect">
+            <a:avLst/>
+          </a:prstGeom>
+          <a:noFill/>
+          <a:ln/>
+        </p:spPr>
+        <p:txBody>
+          <a:bodyPr wrap="square" rtlCol="0" anchor="ctr"/>
+          <a:lstStyle/>
+          <a:p>
+            <a:pPr indent="0" marL="0">
+              <a:buNone/>
+            </a:pPr>
+            <a:r>
+              <a:rPr lang="en-US" sz="1250" dirty="0">
+                <a:solidFill>
+                  <a:srgbClr val="CFE0F2"/>
+                </a:solidFill>
+                <a:latin typeface="Calibri" pitchFamily="34" charset="0"/>
+                <a:ea typeface="Calibri" pitchFamily="34" charset="-122"/>
+                <a:cs typeface="Calibri" pitchFamily="34" charset="-120"/>
+              </a:rPr>
+              <a:t>Las probes reinician automáticamente los pods que fallan.</a:t>
+            </a:r>
+            <a:endParaRPr lang="en-US" sz="1250" dirty="0"/>
+          </a:p>
+        </p:txBody>
+      </p:sp>
+      <p:sp>
+        <p:nvSpPr>
+          <p:cNvPr id="16" name="Shape 14"/>
+          <p:cNvSpPr/>
+          <p:nvPr/>
+        </p:nvSpPr>
+        <p:spPr>
+          <a:xfrm>
+            <a:off x="640080" y="3337560"/>
+            <a:ext cx="5257800" cy="1508760"/>
           </a:xfrm>
           <a:prstGeom prst="roundRect">
             <a:avLst>
-              <a:gd name="adj" fmla="val 50000"/>
+              <a:gd name="adj" fmla="val 6061"/>
             </a:avLst>
           </a:prstGeom>
           <a:solidFill>
-            <a:srgbClr val="1C7293"/>
+            <a:srgbClr val="163A5C"/>
           </a:solidFill>
           <a:ln w="12700">
             <a:solidFill>
-              <a:srgbClr val="1C7293"/>
+              <a:srgbClr val="2A5578"/>
             </a:solidFill>
             <a:prstDash val="solid"/>
           </a:ln>
-        </p:spPr>
-      </p:sp>
-      <p:sp>
-        <p:nvSpPr>
-          <p:cNvPr id="10" name="Text 8"/>
-          <p:cNvSpPr/>
-          <p:nvPr/>
-        </p:nvSpPr>
-        <p:spPr>
-          <a:xfrm>
-            <a:off x="6492240" y="1965960"/>
+          <a:effectLst>
+            <a:outerShdw sx="100000" sy="100000" kx="0" ky="0" algn="bl" rotWithShape="0" blurRad="114300" dist="50800" dir="5400000">
+              <a:srgbClr val="000000">
+                <a:alpha val="45000"/>
+              </a:srgbClr>
+            </a:outerShdw>
+          </a:effectLst>
+        </p:spPr>
+      </p:sp>
+      <p:sp>
+        <p:nvSpPr>
+          <p:cNvPr id="17" name="Shape 15"/>
+          <p:cNvSpPr/>
+          <p:nvPr/>
+        </p:nvSpPr>
+        <p:spPr>
+          <a:xfrm>
+            <a:off x="914400" y="3776472"/>
             <a:ext cx="640080" cy="640080"/>
           </a:xfrm>
+          <a:prstGeom prst="ellipse">
+            <a:avLst/>
+          </a:prstGeom>
+          <a:solidFill>
+            <a:srgbClr val="10D6A3"/>
+          </a:solidFill>
+          <a:ln/>
+        </p:spPr>
+      </p:sp>
+      <p:sp>
+        <p:nvSpPr>
+          <p:cNvPr id="18" name="Text 16"/>
+          <p:cNvSpPr/>
+          <p:nvPr/>
+        </p:nvSpPr>
+        <p:spPr>
+          <a:xfrm>
+            <a:off x="914400" y="3776472"/>
+            <a:ext cx="640080" cy="640080"/>
+          </a:xfrm>
           <a:prstGeom prst="rect">
             <a:avLst/>
           </a:prstGeom>
@@ -5680,27 +6897,27 @@
               <a:buNone/>
             </a:pPr>
             <a:r>
-              <a:rPr lang="en-US" sz="2000" dirty="0">
+              <a:rPr lang="en-US" sz="2100" dirty="0">
                 <a:solidFill>
                   <a:srgbClr val="000000"/>
                 </a:solidFill>
               </a:rPr>
-              <a:t>❤️</a:t>
-            </a:r>
-            <a:endParaRPr lang="en-US" sz="2000" dirty="0"/>
-          </a:p>
-        </p:txBody>
-      </p:sp>
-      <p:sp>
-        <p:nvSpPr>
-          <p:cNvPr id="11" name="Text 9"/>
-          <p:cNvSpPr/>
-          <p:nvPr/>
-        </p:nvSpPr>
-        <p:spPr>
-          <a:xfrm>
-            <a:off x="7315200" y="1783080"/>
-            <a:ext cx="3931920" cy="457200"/>
+              <a:t>⚖️</a:t>
+            </a:r>
+            <a:endParaRPr lang="en-US" sz="2100" dirty="0"/>
+          </a:p>
+        </p:txBody>
+      </p:sp>
+      <p:sp>
+        <p:nvSpPr>
+          <p:cNvPr id="19" name="Text 17"/>
+          <p:cNvSpPr/>
+          <p:nvPr/>
+        </p:nvSpPr>
+        <p:spPr>
+          <a:xfrm>
+            <a:off x="1737360" y="3593592"/>
+            <a:ext cx="4023360" cy="457200"/>
           </a:xfrm>
           <a:prstGeom prst="rect">
             <a:avLst/>
@@ -5718,13 +6935,13 @@
             <a:r>
               <a:rPr lang="en-US" sz="1600" b="1" dirty="0">
                 <a:solidFill>
-                  <a:srgbClr val="13315C"/>
-                </a:solidFill>
-                <a:latin typeface="Cambria" pitchFamily="34" charset="0"/>
-                <a:ea typeface="Cambria" pitchFamily="34" charset="-122"/>
-                <a:cs typeface="Cambria" pitchFamily="34" charset="-120"/>
-              </a:rPr>
-              <a:t>Auto-recuperación</a:t>
+                  <a:srgbClr val="FFFFFF"/>
+                </a:solidFill>
+                <a:latin typeface="Calibri" pitchFamily="34" charset="0"/>
+                <a:ea typeface="Calibri" pitchFamily="34" charset="-122"/>
+                <a:cs typeface="Calibri" pitchFamily="34" charset="-120"/>
+              </a:rPr>
+              <a:t>Balanceo de carga</a:t>
             </a:r>
             <a:endParaRPr lang="en-US" sz="1600" dirty="0"/>
           </a:p>
@@ -5732,14 +6949,14 @@
       </p:sp>
       <p:sp>
         <p:nvSpPr>
-          <p:cNvPr id="12" name="Text 10"/>
-          <p:cNvSpPr/>
-          <p:nvPr/>
-        </p:nvSpPr>
-        <p:spPr>
-          <a:xfrm>
-            <a:off x="7315200" y="2240280"/>
-            <a:ext cx="3931920" cy="640080"/>
+          <p:cNvPr id="20" name="Text 18"/>
+          <p:cNvSpPr/>
+          <p:nvPr/>
+        </p:nvSpPr>
+        <p:spPr>
+          <a:xfrm>
+            <a:off x="1737360" y="4050792"/>
+            <a:ext cx="4023360" cy="640080"/>
           </a:xfrm>
           <a:prstGeom prst="rect">
             <a:avLst/>
@@ -5757,13 +6974,13 @@
             <a:r>
               <a:rPr lang="en-US" sz="1250" dirty="0">
                 <a:solidFill>
-                  <a:srgbClr val="1A2330"/>
-                </a:solidFill>
-                <a:latin typeface="Calibri" pitchFamily="34" charset="0"/>
-                <a:ea typeface="Calibri" pitchFamily="34" charset="-122"/>
-                <a:cs typeface="Calibri" pitchFamily="34" charset="-120"/>
-              </a:rPr>
-              <a:t>Probes de liveness/readiness reinician los pods que fallan.</a:t>
+                  <a:srgbClr val="CFE0F2"/>
+                </a:solidFill>
+                <a:latin typeface="Calibri" pitchFamily="34" charset="0"/>
+                <a:ea typeface="Calibri" pitchFamily="34" charset="-122"/>
+                <a:cs typeface="Calibri" pitchFamily="34" charset="-120"/>
+              </a:rPr>
+              <a:t>El servicio reparte el tráfico entre las réplicas.</a:t>
             </a:r>
             <a:endParaRPr lang="en-US" sz="1250" dirty="0"/>
           </a:p>
@@ -5771,67 +6988,67 @@
       </p:sp>
       <p:sp>
         <p:nvSpPr>
-          <p:cNvPr id="13" name="Shape 11"/>
-          <p:cNvSpPr/>
-          <p:nvPr/>
-        </p:nvSpPr>
-        <p:spPr>
-          <a:xfrm>
-            <a:off x="640080" y="3291840"/>
-            <a:ext cx="5212080" cy="1463040"/>
+          <p:cNvPr id="21" name="Shape 19"/>
+          <p:cNvSpPr/>
+          <p:nvPr/>
+        </p:nvSpPr>
+        <p:spPr>
+          <a:xfrm>
+            <a:off x="6263640" y="3337560"/>
+            <a:ext cx="5257800" cy="1508760"/>
           </a:xfrm>
           <a:prstGeom prst="roundRect">
             <a:avLst>
-              <a:gd name="adj" fmla="val 6250"/>
+              <a:gd name="adj" fmla="val 6061"/>
             </a:avLst>
           </a:prstGeom>
           <a:solidFill>
-            <a:srgbClr val="F4F7FA"/>
+            <a:srgbClr val="163A5C"/>
           </a:solidFill>
           <a:ln w="12700">
             <a:solidFill>
-              <a:srgbClr val="D8E1EA"/>
+              <a:srgbClr val="2A5578"/>
             </a:solidFill>
             <a:prstDash val="solid"/>
           </a:ln>
-        </p:spPr>
-      </p:sp>
-      <p:sp>
-        <p:nvSpPr>
-          <p:cNvPr id="14" name="Shape 12"/>
-          <p:cNvSpPr/>
-          <p:nvPr/>
-        </p:nvSpPr>
-        <p:spPr>
-          <a:xfrm>
-            <a:off x="914400" y="3703320"/>
+          <a:effectLst>
+            <a:outerShdw sx="100000" sy="100000" kx="0" ky="0" algn="bl" rotWithShape="0" blurRad="114300" dist="50800" dir="5400000">
+              <a:srgbClr val="000000">
+                <a:alpha val="45000"/>
+              </a:srgbClr>
+            </a:outerShdw>
+          </a:effectLst>
+        </p:spPr>
+      </p:sp>
+      <p:sp>
+        <p:nvSpPr>
+          <p:cNvPr id="22" name="Shape 20"/>
+          <p:cNvSpPr/>
+          <p:nvPr/>
+        </p:nvSpPr>
+        <p:spPr>
+          <a:xfrm>
+            <a:off x="6537960" y="3776472"/>
             <a:ext cx="640080" cy="640080"/>
           </a:xfrm>
-          <a:prstGeom prst="roundRect">
-            <a:avLst>
-              <a:gd name="adj" fmla="val 50000"/>
-            </a:avLst>
-          </a:prstGeom>
-          <a:solidFill>
-            <a:srgbClr val="1C7293"/>
-          </a:solidFill>
-          <a:ln w="12700">
-            <a:solidFill>
-              <a:srgbClr val="1C7293"/>
-            </a:solidFill>
-            <a:prstDash val="solid"/>
-          </a:ln>
-        </p:spPr>
-      </p:sp>
-      <p:sp>
-        <p:nvSpPr>
-          <p:cNvPr id="15" name="Text 13"/>
-          <p:cNvSpPr/>
-          <p:nvPr/>
-        </p:nvSpPr>
-        <p:spPr>
-          <a:xfrm>
-            <a:off x="914400" y="3703320"/>
+          <a:prstGeom prst="ellipse">
+            <a:avLst/>
+          </a:prstGeom>
+          <a:solidFill>
+            <a:srgbClr val="3AA0B8"/>
+          </a:solidFill>
+          <a:ln/>
+        </p:spPr>
+      </p:sp>
+      <p:sp>
+        <p:nvSpPr>
+          <p:cNvPr id="23" name="Text 21"/>
+          <p:cNvSpPr/>
+          <p:nvPr/>
+        </p:nvSpPr>
+        <p:spPr>
+          <a:xfrm>
+            <a:off x="6537960" y="3776472"/>
             <a:ext cx="640080" cy="640080"/>
           </a:xfrm>
           <a:prstGeom prst="rect">
@@ -5848,27 +7065,27 @@
               <a:buNone/>
             </a:pPr>
             <a:r>
-              <a:rPr lang="en-US" sz="2000" dirty="0">
+              <a:rPr lang="en-US" sz="2100" dirty="0">
                 <a:solidFill>
                   <a:srgbClr val="000000"/>
                 </a:solidFill>
               </a:rPr>
-              <a:t>⚖️</a:t>
-            </a:r>
-            <a:endParaRPr lang="en-US" sz="2000" dirty="0"/>
-          </a:p>
-        </p:txBody>
-      </p:sp>
-      <p:sp>
-        <p:nvSpPr>
-          <p:cNvPr id="16" name="Text 14"/>
-          <p:cNvSpPr/>
-          <p:nvPr/>
-        </p:nvSpPr>
-        <p:spPr>
-          <a:xfrm>
-            <a:off x="1737360" y="3520440"/>
-            <a:ext cx="3931920" cy="457200"/>
+              <a:t>🔁</a:t>
+            </a:r>
+            <a:endParaRPr lang="en-US" sz="2100" dirty="0"/>
+          </a:p>
+        </p:txBody>
+      </p:sp>
+      <p:sp>
+        <p:nvSpPr>
+          <p:cNvPr id="24" name="Text 22"/>
+          <p:cNvSpPr/>
+          <p:nvPr/>
+        </p:nvSpPr>
+        <p:spPr>
+          <a:xfrm>
+            <a:off x="7360920" y="3593592"/>
+            <a:ext cx="4023360" cy="457200"/>
           </a:xfrm>
           <a:prstGeom prst="rect">
             <a:avLst/>
@@ -5886,13 +7103,13 @@
             <a:r>
               <a:rPr lang="en-US" sz="1600" b="1" dirty="0">
                 <a:solidFill>
-                  <a:srgbClr val="13315C"/>
-                </a:solidFill>
-                <a:latin typeface="Cambria" pitchFamily="34" charset="0"/>
-                <a:ea typeface="Cambria" pitchFamily="34" charset="-122"/>
-                <a:cs typeface="Cambria" pitchFamily="34" charset="-120"/>
-              </a:rPr>
-              <a:t>Balanceo de carga</a:t>
+                  <a:srgbClr val="FFFFFF"/>
+                </a:solidFill>
+                <a:latin typeface="Calibri" pitchFamily="34" charset="0"/>
+                <a:ea typeface="Calibri" pitchFamily="34" charset="-122"/>
+                <a:cs typeface="Calibri" pitchFamily="34" charset="-120"/>
+              </a:rPr>
+              <a:t>Alta disponibilidad</a:t>
             </a:r>
             <a:endParaRPr lang="en-US" sz="1600" dirty="0"/>
           </a:p>
@@ -5900,14 +7117,14 @@
       </p:sp>
       <p:sp>
         <p:nvSpPr>
-          <p:cNvPr id="17" name="Text 15"/>
-          <p:cNvSpPr/>
-          <p:nvPr/>
-        </p:nvSpPr>
-        <p:spPr>
-          <a:xfrm>
-            <a:off x="1737360" y="3977640"/>
-            <a:ext cx="3931920" cy="640080"/>
+          <p:cNvPr id="25" name="Text 23"/>
+          <p:cNvSpPr/>
+          <p:nvPr/>
+        </p:nvSpPr>
+        <p:spPr>
+          <a:xfrm>
+            <a:off x="7360920" y="4050792"/>
+            <a:ext cx="4023360" cy="640080"/>
           </a:xfrm>
           <a:prstGeom prst="rect">
             <a:avLst/>
@@ -5925,181 +7142,13 @@
             <a:r>
               <a:rPr lang="en-US" sz="1250" dirty="0">
                 <a:solidFill>
-                  <a:srgbClr val="1A2330"/>
-                </a:solidFill>
-                <a:latin typeface="Calibri" pitchFamily="34" charset="0"/>
-                <a:ea typeface="Calibri" pitchFamily="34" charset="-122"/>
-                <a:cs typeface="Calibri" pitchFamily="34" charset="-120"/>
-              </a:rPr>
-              <a:t>El servicio reparte el tráfico entre las réplicas.</a:t>
-            </a:r>
-            <a:endParaRPr lang="en-US" sz="1250" dirty="0"/>
-          </a:p>
-        </p:txBody>
-      </p:sp>
-      <p:sp>
-        <p:nvSpPr>
-          <p:cNvPr id="18" name="Shape 16"/>
-          <p:cNvSpPr/>
-          <p:nvPr/>
-        </p:nvSpPr>
-        <p:spPr>
-          <a:xfrm>
-            <a:off x="6217920" y="3291840"/>
-            <a:ext cx="5212080" cy="1463040"/>
-          </a:xfrm>
-          <a:prstGeom prst="roundRect">
-            <a:avLst>
-              <a:gd name="adj" fmla="val 6250"/>
-            </a:avLst>
-          </a:prstGeom>
-          <a:solidFill>
-            <a:srgbClr val="F4F7FA"/>
-          </a:solidFill>
-          <a:ln w="12700">
-            <a:solidFill>
-              <a:srgbClr val="D8E1EA"/>
-            </a:solidFill>
-            <a:prstDash val="solid"/>
-          </a:ln>
-        </p:spPr>
-      </p:sp>
-      <p:sp>
-        <p:nvSpPr>
-          <p:cNvPr id="19" name="Shape 17"/>
-          <p:cNvSpPr/>
-          <p:nvPr/>
-        </p:nvSpPr>
-        <p:spPr>
-          <a:xfrm>
-            <a:off x="6492240" y="3703320"/>
-            <a:ext cx="640080" cy="640080"/>
-          </a:xfrm>
-          <a:prstGeom prst="roundRect">
-            <a:avLst>
-              <a:gd name="adj" fmla="val 50000"/>
-            </a:avLst>
-          </a:prstGeom>
-          <a:solidFill>
-            <a:srgbClr val="1C7293"/>
-          </a:solidFill>
-          <a:ln w="12700">
-            <a:solidFill>
-              <a:srgbClr val="1C7293"/>
-            </a:solidFill>
-            <a:prstDash val="solid"/>
-          </a:ln>
-        </p:spPr>
-      </p:sp>
-      <p:sp>
-        <p:nvSpPr>
-          <p:cNvPr id="20" name="Text 18"/>
-          <p:cNvSpPr/>
-          <p:nvPr/>
-        </p:nvSpPr>
-        <p:spPr>
-          <a:xfrm>
-            <a:off x="6492240" y="3703320"/>
-            <a:ext cx="640080" cy="640080"/>
-          </a:xfrm>
-          <a:prstGeom prst="rect">
-            <a:avLst/>
-          </a:prstGeom>
-          <a:noFill/>
-          <a:ln/>
-        </p:spPr>
-        <p:txBody>
-          <a:bodyPr wrap="square" rtlCol="0" anchor="ctr"/>
-          <a:lstStyle/>
-          <a:p>
-            <a:pPr algn="ctr" indent="0" marL="0">
-              <a:buNone/>
-            </a:pPr>
-            <a:r>
-              <a:rPr lang="en-US" sz="2000" dirty="0">
-                <a:solidFill>
-                  <a:srgbClr val="000000"/>
-                </a:solidFill>
-              </a:rPr>
-              <a:t>🔁</a:t>
-            </a:r>
-            <a:endParaRPr lang="en-US" sz="2000" dirty="0"/>
-          </a:p>
-        </p:txBody>
-      </p:sp>
-      <p:sp>
-        <p:nvSpPr>
-          <p:cNvPr id="21" name="Text 19"/>
-          <p:cNvSpPr/>
-          <p:nvPr/>
-        </p:nvSpPr>
-        <p:spPr>
-          <a:xfrm>
-            <a:off x="7315200" y="3520440"/>
-            <a:ext cx="3931920" cy="457200"/>
-          </a:xfrm>
-          <a:prstGeom prst="rect">
-            <a:avLst/>
-          </a:prstGeom>
-          <a:noFill/>
-          <a:ln/>
-        </p:spPr>
-        <p:txBody>
-          <a:bodyPr wrap="square" rtlCol="0" anchor="ctr"/>
-          <a:lstStyle/>
-          <a:p>
-            <a:pPr indent="0" marL="0">
-              <a:buNone/>
-            </a:pPr>
-            <a:r>
-              <a:rPr lang="en-US" sz="1600" b="1" dirty="0">
-                <a:solidFill>
-                  <a:srgbClr val="13315C"/>
-                </a:solidFill>
-                <a:latin typeface="Cambria" pitchFamily="34" charset="0"/>
-                <a:ea typeface="Cambria" pitchFamily="34" charset="-122"/>
-                <a:cs typeface="Cambria" pitchFamily="34" charset="-120"/>
-              </a:rPr>
-              <a:t>Alta disponibilidad</a:t>
-            </a:r>
-            <a:endParaRPr lang="en-US" sz="1600" dirty="0"/>
-          </a:p>
-        </p:txBody>
-      </p:sp>
-      <p:sp>
-        <p:nvSpPr>
-          <p:cNvPr id="22" name="Text 20"/>
-          <p:cNvSpPr/>
-          <p:nvPr/>
-        </p:nvSpPr>
-        <p:spPr>
-          <a:xfrm>
-            <a:off x="7315200" y="3977640"/>
-            <a:ext cx="3931920" cy="640080"/>
-          </a:xfrm>
-          <a:prstGeom prst="rect">
-            <a:avLst/>
-          </a:prstGeom>
-          <a:noFill/>
-          <a:ln/>
-        </p:spPr>
-        <p:txBody>
-          <a:bodyPr wrap="square" rtlCol="0" anchor="ctr"/>
-          <a:lstStyle/>
-          <a:p>
-            <a:pPr indent="0" marL="0">
-              <a:buNone/>
-            </a:pPr>
-            <a:r>
-              <a:rPr lang="en-US" sz="1250" dirty="0">
-                <a:solidFill>
-                  <a:srgbClr val="1A2330"/>
-                </a:solidFill>
-                <a:latin typeface="Calibri" pitchFamily="34" charset="0"/>
-                <a:ea typeface="Calibri" pitchFamily="34" charset="-122"/>
-                <a:cs typeface="Calibri" pitchFamily="34" charset="-120"/>
-              </a:rPr>
-              <a:t>Múltiples réplicas evitan un único punto de falla.</a:t>
+                  <a:srgbClr val="CFE0F2"/>
+                </a:solidFill>
+                <a:latin typeface="Calibri" pitchFamily="34" charset="0"/>
+                <a:ea typeface="Calibri" pitchFamily="34" charset="-122"/>
+                <a:cs typeface="Calibri" pitchFamily="34" charset="-120"/>
+              </a:rPr>
+              <a:t>Varias réplicas evitan un único punto de falla.</a:t>
             </a:r>
             <a:endParaRPr lang="en-US" sz="1250" dirty="0"/>
           </a:p>
@@ -6119,7 +7168,7 @@
     <p:bg>
       <p:bgPr>
         <a:solidFill>
-          <a:srgbClr val="FFFFFF"/>
+          <a:srgbClr val="0A1E33"/>
         </a:solidFill>
       </p:bgPr>
     </p:bg>
@@ -6139,42 +7188,23 @@
       </p:grpSpPr>
       <p:sp>
         <p:nvSpPr>
-          <p:cNvPr id="2" name="Text 0"/>
-          <p:cNvSpPr/>
-          <p:nvPr/>
-        </p:nvSpPr>
-        <p:spPr>
-          <a:xfrm>
-            <a:off x="548640" y="365760"/>
-            <a:ext cx="11064240" cy="731520"/>
-          </a:xfrm>
-          <a:prstGeom prst="rect">
-            <a:avLst/>
-          </a:prstGeom>
-          <a:noFill/>
-          <a:ln/>
-        </p:spPr>
-        <p:txBody>
-          <a:bodyPr wrap="square" rtlCol="0" anchor="ctr"/>
-          <a:lstStyle/>
-          <a:p>
-            <a:pPr indent="0" marL="0">
-              <a:buNone/>
-            </a:pPr>
-            <a:r>
-              <a:rPr lang="en-US" sz="3200" b="1" dirty="0">
-                <a:solidFill>
-                  <a:srgbClr val="13315C"/>
-                </a:solidFill>
-                <a:latin typeface="Cambria" pitchFamily="34" charset="0"/>
-                <a:ea typeface="Cambria" pitchFamily="34" charset="-122"/>
-                <a:cs typeface="Cambria" pitchFamily="34" charset="-120"/>
-              </a:rPr>
-              <a:t>Seguridad y observabilidad</a:t>
-            </a:r>
-            <a:endParaRPr lang="en-US" sz="3200" dirty="0"/>
-          </a:p>
-        </p:txBody>
+          <p:cNvPr id="2" name="Shape 0"/>
+          <p:cNvSpPr/>
+          <p:nvPr/>
+        </p:nvSpPr>
+        <p:spPr>
+          <a:xfrm>
+            <a:off x="9418320" y="-2011680"/>
+            <a:ext cx="5029200" cy="5029200"/>
+          </a:xfrm>
+          <a:prstGeom prst="ellipse">
+            <a:avLst/>
+          </a:prstGeom>
+          <a:solidFill>
+            <a:srgbClr val="102A46"/>
+          </a:solidFill>
+          <a:ln/>
+        </p:spPr>
       </p:sp>
       <p:sp>
         <p:nvSpPr>
@@ -6184,35 +7214,162 @@
         </p:nvSpPr>
         <p:spPr>
           <a:xfrm>
-            <a:off x="640080" y="1463040"/>
-            <a:ext cx="822960" cy="822960"/>
+            <a:off x="548640" y="502920"/>
+            <a:ext cx="566928" cy="566928"/>
           </a:xfrm>
           <a:prstGeom prst="roundRect">
             <a:avLst>
-              <a:gd name="adj" fmla="val 16667"/>
+              <a:gd name="adj" fmla="val 50000"/>
             </a:avLst>
           </a:prstGeom>
           <a:solidFill>
-            <a:srgbClr val="13315C"/>
+            <a:srgbClr val="10D6A3"/>
+          </a:solidFill>
+          <a:ln/>
+        </p:spPr>
+      </p:sp>
+      <p:sp>
+        <p:nvSpPr>
+          <p:cNvPr id="4" name="Text 2"/>
+          <p:cNvSpPr/>
+          <p:nvPr/>
+        </p:nvSpPr>
+        <p:spPr>
+          <a:xfrm>
+            <a:off x="548640" y="502920"/>
+            <a:ext cx="566928" cy="566928"/>
+          </a:xfrm>
+          <a:prstGeom prst="rect">
+            <a:avLst/>
+          </a:prstGeom>
+          <a:noFill/>
+          <a:ln/>
+        </p:spPr>
+        <p:txBody>
+          <a:bodyPr wrap="square" rtlCol="0" anchor="ctr"/>
+          <a:lstStyle/>
+          <a:p>
+            <a:pPr algn="ctr" indent="0" marL="0">
+              <a:buNone/>
+            </a:pPr>
+            <a:r>
+              <a:rPr lang="en-US" sz="2200" b="1" dirty="0">
+                <a:solidFill>
+                  <a:srgbClr val="0A1E33"/>
+                </a:solidFill>
+                <a:latin typeface="Calibri" pitchFamily="34" charset="0"/>
+                <a:ea typeface="Calibri" pitchFamily="34" charset="-122"/>
+                <a:cs typeface="Calibri" pitchFamily="34" charset="-120"/>
+              </a:rPr>
+              <a:t>6</a:t>
+            </a:r>
+            <a:endParaRPr lang="en-US" sz="2200" dirty="0"/>
+          </a:p>
+        </p:txBody>
+      </p:sp>
+      <p:sp>
+        <p:nvSpPr>
+          <p:cNvPr id="5" name="Text 3"/>
+          <p:cNvSpPr/>
+          <p:nvPr/>
+        </p:nvSpPr>
+        <p:spPr>
+          <a:xfrm>
+            <a:off x="1280160" y="457200"/>
+            <a:ext cx="10241280" cy="685800"/>
+          </a:xfrm>
+          <a:prstGeom prst="rect">
+            <a:avLst/>
+          </a:prstGeom>
+          <a:noFill/>
+          <a:ln/>
+        </p:spPr>
+        <p:txBody>
+          <a:bodyPr wrap="square" rtlCol="0" anchor="ctr"/>
+          <a:lstStyle/>
+          <a:p>
+            <a:pPr indent="0" marL="0">
+              <a:buNone/>
+            </a:pPr>
+            <a:r>
+              <a:rPr lang="en-US" sz="3000" b="1" dirty="0">
+                <a:solidFill>
+                  <a:srgbClr val="FFFFFF"/>
+                </a:solidFill>
+                <a:latin typeface="Calibri" pitchFamily="34" charset="0"/>
+                <a:ea typeface="Calibri" pitchFamily="34" charset="-122"/>
+                <a:cs typeface="Calibri" pitchFamily="34" charset="-120"/>
+              </a:rPr>
+              <a:t>Seguridad y observabilidad</a:t>
+            </a:r>
+            <a:endParaRPr lang="en-US" sz="3000" dirty="0"/>
+          </a:p>
+        </p:txBody>
+      </p:sp>
+      <p:sp>
+        <p:nvSpPr>
+          <p:cNvPr id="6" name="Shape 4"/>
+          <p:cNvSpPr/>
+          <p:nvPr/>
+        </p:nvSpPr>
+        <p:spPr>
+          <a:xfrm>
+            <a:off x="640080" y="1508760"/>
+            <a:ext cx="10972800" cy="1005840"/>
+          </a:xfrm>
+          <a:prstGeom prst="roundRect">
+            <a:avLst>
+              <a:gd name="adj" fmla="val 9091"/>
+            </a:avLst>
+          </a:prstGeom>
+          <a:solidFill>
+            <a:srgbClr val="163A5C"/>
           </a:solidFill>
           <a:ln w="12700">
             <a:solidFill>
-              <a:srgbClr val="13315C"/>
+              <a:srgbClr val="2A5578"/>
             </a:solidFill>
             <a:prstDash val="solid"/>
           </a:ln>
-        </p:spPr>
-      </p:sp>
-      <p:sp>
-        <p:nvSpPr>
-          <p:cNvPr id="4" name="Text 2"/>
-          <p:cNvSpPr/>
-          <p:nvPr/>
-        </p:nvSpPr>
-        <p:spPr>
-          <a:xfrm>
-            <a:off x="640080" y="1463040"/>
-            <a:ext cx="822960" cy="822960"/>
+          <a:effectLst>
+            <a:outerShdw sx="100000" sy="100000" kx="0" ky="0" algn="bl" rotWithShape="0" blurRad="114300" dist="50800" dir="5400000">
+              <a:srgbClr val="000000">
+                <a:alpha val="45000"/>
+              </a:srgbClr>
+            </a:outerShdw>
+          </a:effectLst>
+        </p:spPr>
+      </p:sp>
+      <p:sp>
+        <p:nvSpPr>
+          <p:cNvPr id="7" name="Shape 5"/>
+          <p:cNvSpPr/>
+          <p:nvPr/>
+        </p:nvSpPr>
+        <p:spPr>
+          <a:xfrm>
+            <a:off x="868680" y="1691640"/>
+            <a:ext cx="640080" cy="640080"/>
+          </a:xfrm>
+          <a:prstGeom prst="ellipse">
+            <a:avLst/>
+          </a:prstGeom>
+          <a:solidFill>
+            <a:srgbClr val="3AA0B8"/>
+          </a:solidFill>
+          <a:ln/>
+        </p:spPr>
+      </p:sp>
+      <p:sp>
+        <p:nvSpPr>
+          <p:cNvPr id="8" name="Text 6"/>
+          <p:cNvSpPr/>
+          <p:nvPr/>
+        </p:nvSpPr>
+        <p:spPr>
+          <a:xfrm>
+            <a:off x="868680" y="1691640"/>
+            <a:ext cx="640080" cy="640080"/>
           </a:xfrm>
           <a:prstGeom prst="rect">
             <a:avLst/>
@@ -6228,27 +7385,27 @@
               <a:buNone/>
             </a:pPr>
             <a:r>
-              <a:rPr lang="en-US" sz="2200" dirty="0">
+              <a:rPr lang="en-US" sz="2100" dirty="0">
                 <a:solidFill>
                   <a:srgbClr val="000000"/>
                 </a:solidFill>
               </a:rPr>
               <a:t>🛡️</a:t>
             </a:r>
-            <a:endParaRPr lang="en-US" sz="2200" dirty="0"/>
-          </a:p>
-        </p:txBody>
-      </p:sp>
-      <p:sp>
-        <p:nvSpPr>
-          <p:cNvPr id="5" name="Text 3"/>
-          <p:cNvSpPr/>
-          <p:nvPr/>
-        </p:nvSpPr>
-        <p:spPr>
-          <a:xfrm>
-            <a:off x="1645920" y="1508760"/>
-            <a:ext cx="9601200" cy="457200"/>
+            <a:endParaRPr lang="en-US" sz="2100" dirty="0"/>
+          </a:p>
+        </p:txBody>
+      </p:sp>
+      <p:sp>
+        <p:nvSpPr>
+          <p:cNvPr id="9" name="Text 7"/>
+          <p:cNvSpPr/>
+          <p:nvPr/>
+        </p:nvSpPr>
+        <p:spPr>
+          <a:xfrm>
+            <a:off x="1783080" y="1618488"/>
+            <a:ext cx="9509760" cy="457200"/>
           </a:xfrm>
           <a:prstGeom prst="rect">
             <a:avLst/>
@@ -6264,30 +7421,30 @@
               <a:buNone/>
             </a:pPr>
             <a:r>
-              <a:rPr lang="en-US" sz="1700" b="1" dirty="0">
-                <a:solidFill>
-                  <a:srgbClr val="13315C"/>
-                </a:solidFill>
-                <a:latin typeface="Cambria" pitchFamily="34" charset="0"/>
-                <a:ea typeface="Cambria" pitchFamily="34" charset="-122"/>
-                <a:cs typeface="Cambria" pitchFamily="34" charset="-120"/>
+              <a:rPr lang="en-US" sz="1600" b="1" dirty="0">
+                <a:solidFill>
+                  <a:srgbClr val="FFFFFF"/>
+                </a:solidFill>
+                <a:latin typeface="Calibri" pitchFamily="34" charset="0"/>
+                <a:ea typeface="Calibri" pitchFamily="34" charset="-122"/>
+                <a:cs typeface="Calibri" pitchFamily="34" charset="-120"/>
               </a:rPr>
               <a:t>Endurecimiento de imágenes</a:t>
             </a:r>
-            <a:endParaRPr lang="en-US" sz="1700" dirty="0"/>
-          </a:p>
-        </p:txBody>
-      </p:sp>
-      <p:sp>
-        <p:nvSpPr>
-          <p:cNvPr id="6" name="Text 4"/>
-          <p:cNvSpPr/>
-          <p:nvPr/>
-        </p:nvSpPr>
-        <p:spPr>
-          <a:xfrm>
-            <a:off x="1645920" y="1920240"/>
-            <a:ext cx="9601200" cy="457200"/>
+            <a:endParaRPr lang="en-US" sz="1600" dirty="0"/>
+          </a:p>
+        </p:txBody>
+      </p:sp>
+      <p:sp>
+        <p:nvSpPr>
+          <p:cNvPr id="10" name="Text 8"/>
+          <p:cNvSpPr/>
+          <p:nvPr/>
+        </p:nvSpPr>
+        <p:spPr>
+          <a:xfrm>
+            <a:off x="1783080" y="2039112"/>
+            <a:ext cx="9509760" cy="411480"/>
           </a:xfrm>
           <a:prstGeom prst="rect">
             <a:avLst/>
@@ -6303,9 +7460,9 @@
               <a:buNone/>
             </a:pPr>
             <a:r>
-              <a:rPr lang="en-US" sz="1350" dirty="0">
-                <a:solidFill>
-                  <a:srgbClr val="1A2330"/>
+              <a:rPr lang="en-US" sz="1300" dirty="0">
+                <a:solidFill>
+                  <a:srgbClr val="CFE0F2"/>
                 </a:solidFill>
                 <a:latin typeface="Calibri" pitchFamily="34" charset="0"/>
                 <a:ea typeface="Calibri" pitchFamily="34" charset="-122"/>
@@ -6313,47 +7470,74 @@
               </a:rPr>
               <a:t>Base alpine, multietapa y usuario no-root.</a:t>
             </a:r>
-            <a:endParaRPr lang="en-US" sz="1350" dirty="0"/>
-          </a:p>
-        </p:txBody>
-      </p:sp>
-      <p:sp>
-        <p:nvSpPr>
-          <p:cNvPr id="7" name="Shape 5"/>
-          <p:cNvSpPr/>
-          <p:nvPr/>
-        </p:nvSpPr>
-        <p:spPr>
-          <a:xfrm>
-            <a:off x="640080" y="2697480"/>
-            <a:ext cx="822960" cy="822960"/>
+            <a:endParaRPr lang="en-US" sz="1300" dirty="0"/>
+          </a:p>
+        </p:txBody>
+      </p:sp>
+      <p:sp>
+        <p:nvSpPr>
+          <p:cNvPr id="11" name="Shape 9"/>
+          <p:cNvSpPr/>
+          <p:nvPr/>
+        </p:nvSpPr>
+        <p:spPr>
+          <a:xfrm>
+            <a:off x="640080" y="2679192"/>
+            <a:ext cx="10972800" cy="1005840"/>
           </a:xfrm>
           <a:prstGeom prst="roundRect">
             <a:avLst>
-              <a:gd name="adj" fmla="val 16667"/>
+              <a:gd name="adj" fmla="val 9091"/>
             </a:avLst>
           </a:prstGeom>
           <a:solidFill>
-            <a:srgbClr val="13315C"/>
+            <a:srgbClr val="163A5C"/>
           </a:solidFill>
           <a:ln w="12700">
             <a:solidFill>
-              <a:srgbClr val="13315C"/>
+              <a:srgbClr val="2A5578"/>
             </a:solidFill>
             <a:prstDash val="solid"/>
           </a:ln>
-        </p:spPr>
-      </p:sp>
-      <p:sp>
-        <p:nvSpPr>
-          <p:cNvPr id="8" name="Text 6"/>
-          <p:cNvSpPr/>
-          <p:nvPr/>
-        </p:nvSpPr>
-        <p:spPr>
-          <a:xfrm>
-            <a:off x="640080" y="2697480"/>
-            <a:ext cx="822960" cy="822960"/>
+          <a:effectLst>
+            <a:outerShdw sx="100000" sy="100000" kx="0" ky="0" algn="bl" rotWithShape="0" blurRad="114300" dist="50800" dir="5400000">
+              <a:srgbClr val="000000">
+                <a:alpha val="45000"/>
+              </a:srgbClr>
+            </a:outerShdw>
+          </a:effectLst>
+        </p:spPr>
+      </p:sp>
+      <p:sp>
+        <p:nvSpPr>
+          <p:cNvPr id="12" name="Shape 10"/>
+          <p:cNvSpPr/>
+          <p:nvPr/>
+        </p:nvSpPr>
+        <p:spPr>
+          <a:xfrm>
+            <a:off x="868680" y="2862072"/>
+            <a:ext cx="640080" cy="640080"/>
+          </a:xfrm>
+          <a:prstGeom prst="ellipse">
+            <a:avLst/>
+          </a:prstGeom>
+          <a:solidFill>
+            <a:srgbClr val="3AA0B8"/>
+          </a:solidFill>
+          <a:ln/>
+        </p:spPr>
+      </p:sp>
+      <p:sp>
+        <p:nvSpPr>
+          <p:cNvPr id="13" name="Text 11"/>
+          <p:cNvSpPr/>
+          <p:nvPr/>
+        </p:nvSpPr>
+        <p:spPr>
+          <a:xfrm>
+            <a:off x="868680" y="2862072"/>
+            <a:ext cx="640080" cy="640080"/>
           </a:xfrm>
           <a:prstGeom prst="rect">
             <a:avLst/>
@@ -6369,27 +7553,27 @@
               <a:buNone/>
             </a:pPr>
             <a:r>
-              <a:rPr lang="en-US" sz="2200" dirty="0">
+              <a:rPr lang="en-US" sz="2100" dirty="0">
                 <a:solidFill>
                   <a:srgbClr val="000000"/>
                 </a:solidFill>
               </a:rPr>
               <a:t>🔒</a:t>
             </a:r>
-            <a:endParaRPr lang="en-US" sz="2200" dirty="0"/>
-          </a:p>
-        </p:txBody>
-      </p:sp>
-      <p:sp>
-        <p:nvSpPr>
-          <p:cNvPr id="9" name="Text 7"/>
-          <p:cNvSpPr/>
-          <p:nvPr/>
-        </p:nvSpPr>
-        <p:spPr>
-          <a:xfrm>
-            <a:off x="1645920" y="2743200"/>
-            <a:ext cx="9601200" cy="457200"/>
+            <a:endParaRPr lang="en-US" sz="2100" dirty="0"/>
+          </a:p>
+        </p:txBody>
+      </p:sp>
+      <p:sp>
+        <p:nvSpPr>
+          <p:cNvPr id="14" name="Text 12"/>
+          <p:cNvSpPr/>
+          <p:nvPr/>
+        </p:nvSpPr>
+        <p:spPr>
+          <a:xfrm>
+            <a:off x="1783080" y="2788920"/>
+            <a:ext cx="9509760" cy="457200"/>
           </a:xfrm>
           <a:prstGeom prst="rect">
             <a:avLst/>
@@ -6405,30 +7589,30 @@
               <a:buNone/>
             </a:pPr>
             <a:r>
-              <a:rPr lang="en-US" sz="1700" b="1" dirty="0">
-                <a:solidFill>
-                  <a:srgbClr val="13315C"/>
-                </a:solidFill>
-                <a:latin typeface="Cambria" pitchFamily="34" charset="0"/>
-                <a:ea typeface="Cambria" pitchFamily="34" charset="-122"/>
-                <a:cs typeface="Cambria" pitchFamily="34" charset="-120"/>
+              <a:rPr lang="en-US" sz="1600" b="1" dirty="0">
+                <a:solidFill>
+                  <a:srgbClr val="FFFFFF"/>
+                </a:solidFill>
+                <a:latin typeface="Calibri" pitchFamily="34" charset="0"/>
+                <a:ea typeface="Calibri" pitchFamily="34" charset="-122"/>
+                <a:cs typeface="Calibri" pitchFamily="34" charset="-120"/>
               </a:rPr>
               <a:t>Exposición mínima</a:t>
             </a:r>
-            <a:endParaRPr lang="en-US" sz="1700" dirty="0"/>
-          </a:p>
-        </p:txBody>
-      </p:sp>
-      <p:sp>
-        <p:nvSpPr>
-          <p:cNvPr id="10" name="Text 8"/>
-          <p:cNvSpPr/>
-          <p:nvPr/>
-        </p:nvSpPr>
-        <p:spPr>
-          <a:xfrm>
-            <a:off x="1645920" y="3154680"/>
-            <a:ext cx="9601200" cy="457200"/>
+            <a:endParaRPr lang="en-US" sz="1600" dirty="0"/>
+          </a:p>
+        </p:txBody>
+      </p:sp>
+      <p:sp>
+        <p:nvSpPr>
+          <p:cNvPr id="15" name="Text 13"/>
+          <p:cNvSpPr/>
+          <p:nvPr/>
+        </p:nvSpPr>
+        <p:spPr>
+          <a:xfrm>
+            <a:off x="1783080" y="3209544"/>
+            <a:ext cx="9509760" cy="411480"/>
           </a:xfrm>
           <a:prstGeom prst="rect">
             <a:avLst/>
@@ -6444,9 +7628,9 @@
               <a:buNone/>
             </a:pPr>
             <a:r>
-              <a:rPr lang="en-US" sz="1350" dirty="0">
-                <a:solidFill>
-                  <a:srgbClr val="1A2330"/>
+              <a:rPr lang="en-US" sz="1300" dirty="0">
+                <a:solidFill>
+                  <a:srgbClr val="CFE0F2"/>
                 </a:solidFill>
                 <a:latin typeface="Calibri" pitchFamily="34" charset="0"/>
                 <a:ea typeface="Calibri" pitchFamily="34" charset="-122"/>
@@ -6454,47 +7638,74 @@
               </a:rPr>
               <a:t>Solo el frontend es público; backend y BD internos (ClusterIP).</a:t>
             </a:r>
-            <a:endParaRPr lang="en-US" sz="1350" dirty="0"/>
-          </a:p>
-        </p:txBody>
-      </p:sp>
-      <p:sp>
-        <p:nvSpPr>
-          <p:cNvPr id="11" name="Shape 9"/>
-          <p:cNvSpPr/>
-          <p:nvPr/>
-        </p:nvSpPr>
-        <p:spPr>
-          <a:xfrm>
-            <a:off x="640080" y="3931920"/>
-            <a:ext cx="822960" cy="822960"/>
+            <a:endParaRPr lang="en-US" sz="1300" dirty="0"/>
+          </a:p>
+        </p:txBody>
+      </p:sp>
+      <p:sp>
+        <p:nvSpPr>
+          <p:cNvPr id="16" name="Shape 14"/>
+          <p:cNvSpPr/>
+          <p:nvPr/>
+        </p:nvSpPr>
+        <p:spPr>
+          <a:xfrm>
+            <a:off x="640080" y="3849624"/>
+            <a:ext cx="10972800" cy="1005840"/>
           </a:xfrm>
           <a:prstGeom prst="roundRect">
             <a:avLst>
-              <a:gd name="adj" fmla="val 16667"/>
+              <a:gd name="adj" fmla="val 9091"/>
             </a:avLst>
           </a:prstGeom>
           <a:solidFill>
-            <a:srgbClr val="13315C"/>
+            <a:srgbClr val="163A5C"/>
           </a:solidFill>
           <a:ln w="12700">
             <a:solidFill>
-              <a:srgbClr val="13315C"/>
+              <a:srgbClr val="2A5578"/>
             </a:solidFill>
             <a:prstDash val="solid"/>
           </a:ln>
-        </p:spPr>
-      </p:sp>
-      <p:sp>
-        <p:nvSpPr>
-          <p:cNvPr id="12" name="Text 10"/>
-          <p:cNvSpPr/>
-          <p:nvPr/>
-        </p:nvSpPr>
-        <p:spPr>
-          <a:xfrm>
-            <a:off x="640080" y="3931920"/>
-            <a:ext cx="822960" cy="822960"/>
+          <a:effectLst>
+            <a:outerShdw sx="100000" sy="100000" kx="0" ky="0" algn="bl" rotWithShape="0" blurRad="114300" dist="50800" dir="5400000">
+              <a:srgbClr val="000000">
+                <a:alpha val="45000"/>
+              </a:srgbClr>
+            </a:outerShdw>
+          </a:effectLst>
+        </p:spPr>
+      </p:sp>
+      <p:sp>
+        <p:nvSpPr>
+          <p:cNvPr id="17" name="Shape 15"/>
+          <p:cNvSpPr/>
+          <p:nvPr/>
+        </p:nvSpPr>
+        <p:spPr>
+          <a:xfrm>
+            <a:off x="868680" y="4032504"/>
+            <a:ext cx="640080" cy="640080"/>
+          </a:xfrm>
+          <a:prstGeom prst="ellipse">
+            <a:avLst/>
+          </a:prstGeom>
+          <a:solidFill>
+            <a:srgbClr val="3AA0B8"/>
+          </a:solidFill>
+          <a:ln/>
+        </p:spPr>
+      </p:sp>
+      <p:sp>
+        <p:nvSpPr>
+          <p:cNvPr id="18" name="Text 16"/>
+          <p:cNvSpPr/>
+          <p:nvPr/>
+        </p:nvSpPr>
+        <p:spPr>
+          <a:xfrm>
+            <a:off x="868680" y="4032504"/>
+            <a:ext cx="640080" cy="640080"/>
           </a:xfrm>
           <a:prstGeom prst="rect">
             <a:avLst/>
@@ -6510,27 +7721,27 @@
               <a:buNone/>
             </a:pPr>
             <a:r>
-              <a:rPr lang="en-US" sz="2200" dirty="0">
+              <a:rPr lang="en-US" sz="2100" dirty="0">
                 <a:solidFill>
                   <a:srgbClr val="000000"/>
                 </a:solidFill>
               </a:rPr>
               <a:t>🔑</a:t>
             </a:r>
-            <a:endParaRPr lang="en-US" sz="2200" dirty="0"/>
-          </a:p>
-        </p:txBody>
-      </p:sp>
-      <p:sp>
-        <p:nvSpPr>
-          <p:cNvPr id="13" name="Text 11"/>
-          <p:cNvSpPr/>
-          <p:nvPr/>
-        </p:nvSpPr>
-        <p:spPr>
-          <a:xfrm>
-            <a:off x="1645920" y="3977640"/>
-            <a:ext cx="9601200" cy="457200"/>
+            <a:endParaRPr lang="en-US" sz="2100" dirty="0"/>
+          </a:p>
+        </p:txBody>
+      </p:sp>
+      <p:sp>
+        <p:nvSpPr>
+          <p:cNvPr id="19" name="Text 17"/>
+          <p:cNvSpPr/>
+          <p:nvPr/>
+        </p:nvSpPr>
+        <p:spPr>
+          <a:xfrm>
+            <a:off x="1783080" y="3959352"/>
+            <a:ext cx="9509760" cy="457200"/>
           </a:xfrm>
           <a:prstGeom prst="rect">
             <a:avLst/>
@@ -6546,30 +7757,30 @@
               <a:buNone/>
             </a:pPr>
             <a:r>
-              <a:rPr lang="en-US" sz="1700" b="1" dirty="0">
-                <a:solidFill>
-                  <a:srgbClr val="13315C"/>
-                </a:solidFill>
-                <a:latin typeface="Cambria" pitchFamily="34" charset="0"/>
-                <a:ea typeface="Cambria" pitchFamily="34" charset="-122"/>
-                <a:cs typeface="Cambria" pitchFamily="34" charset="-120"/>
+              <a:rPr lang="en-US" sz="1600" b="1" dirty="0">
+                <a:solidFill>
+                  <a:srgbClr val="FFFFFF"/>
+                </a:solidFill>
+                <a:latin typeface="Calibri" pitchFamily="34" charset="0"/>
+                <a:ea typeface="Calibri" pitchFamily="34" charset="-122"/>
+                <a:cs typeface="Calibri" pitchFamily="34" charset="-120"/>
               </a:rPr>
               <a:t>Gestión de secretos</a:t>
             </a:r>
-            <a:endParaRPr lang="en-US" sz="1700" dirty="0"/>
-          </a:p>
-        </p:txBody>
-      </p:sp>
-      <p:sp>
-        <p:nvSpPr>
-          <p:cNvPr id="14" name="Text 12"/>
-          <p:cNvSpPr/>
-          <p:nvPr/>
-        </p:nvSpPr>
-        <p:spPr>
-          <a:xfrm>
-            <a:off x="1645920" y="4389120"/>
-            <a:ext cx="9601200" cy="457200"/>
+            <a:endParaRPr lang="en-US" sz="1600" dirty="0"/>
+          </a:p>
+        </p:txBody>
+      </p:sp>
+      <p:sp>
+        <p:nvSpPr>
+          <p:cNvPr id="20" name="Text 18"/>
+          <p:cNvSpPr/>
+          <p:nvPr/>
+        </p:nvSpPr>
+        <p:spPr>
+          <a:xfrm>
+            <a:off x="1783080" y="4379976"/>
+            <a:ext cx="9509760" cy="411480"/>
           </a:xfrm>
           <a:prstGeom prst="rect">
             <a:avLst/>
@@ -6585,57 +7796,84 @@
               <a:buNone/>
             </a:pPr>
             <a:r>
-              <a:rPr lang="en-US" sz="1350" dirty="0">
-                <a:solidFill>
-                  <a:srgbClr val="1A2330"/>
-                </a:solidFill>
-                <a:latin typeface="Calibri" pitchFamily="34" charset="0"/>
-                <a:ea typeface="Calibri" pitchFamily="34" charset="-122"/>
-                <a:cs typeface="Calibri" pitchFamily="34" charset="-120"/>
-              </a:rPr>
-              <a:t>GitHub Secrets y Kubernetes Secrets (nada en el código).</a:t>
-            </a:r>
-            <a:endParaRPr lang="en-US" sz="1350" dirty="0"/>
-          </a:p>
-        </p:txBody>
-      </p:sp>
-      <p:sp>
-        <p:nvSpPr>
-          <p:cNvPr id="15" name="Shape 13"/>
-          <p:cNvSpPr/>
-          <p:nvPr/>
-        </p:nvSpPr>
-        <p:spPr>
-          <a:xfrm>
-            <a:off x="640080" y="5166360"/>
-            <a:ext cx="822960" cy="822960"/>
+              <a:rPr lang="en-US" sz="1300" dirty="0">
+                <a:solidFill>
+                  <a:srgbClr val="CFE0F2"/>
+                </a:solidFill>
+                <a:latin typeface="Calibri" pitchFamily="34" charset="0"/>
+                <a:ea typeface="Calibri" pitchFamily="34" charset="-122"/>
+                <a:cs typeface="Calibri" pitchFamily="34" charset="-120"/>
+              </a:rPr>
+              <a:t>GitHub Secrets y Kubernetes Secrets — nada en el código.</a:t>
+            </a:r>
+            <a:endParaRPr lang="en-US" sz="1300" dirty="0"/>
+          </a:p>
+        </p:txBody>
+      </p:sp>
+      <p:sp>
+        <p:nvSpPr>
+          <p:cNvPr id="21" name="Shape 19"/>
+          <p:cNvSpPr/>
+          <p:nvPr/>
+        </p:nvSpPr>
+        <p:spPr>
+          <a:xfrm>
+            <a:off x="640080" y="5020056"/>
+            <a:ext cx="10972800" cy="1005840"/>
           </a:xfrm>
           <a:prstGeom prst="roundRect">
             <a:avLst>
-              <a:gd name="adj" fmla="val 16667"/>
+              <a:gd name="adj" fmla="val 9091"/>
             </a:avLst>
           </a:prstGeom>
           <a:solidFill>
-            <a:srgbClr val="13315C"/>
+            <a:srgbClr val="163A5C"/>
           </a:solidFill>
           <a:ln w="12700">
             <a:solidFill>
-              <a:srgbClr val="13315C"/>
+              <a:srgbClr val="2A5578"/>
             </a:solidFill>
             <a:prstDash val="solid"/>
           </a:ln>
-        </p:spPr>
-      </p:sp>
-      <p:sp>
-        <p:nvSpPr>
-          <p:cNvPr id="16" name="Text 14"/>
-          <p:cNvSpPr/>
-          <p:nvPr/>
-        </p:nvSpPr>
-        <p:spPr>
-          <a:xfrm>
-            <a:off x="640080" y="5166360"/>
-            <a:ext cx="822960" cy="822960"/>
+          <a:effectLst>
+            <a:outerShdw sx="100000" sy="100000" kx="0" ky="0" algn="bl" rotWithShape="0" blurRad="114300" dist="50800" dir="5400000">
+              <a:srgbClr val="000000">
+                <a:alpha val="45000"/>
+              </a:srgbClr>
+            </a:outerShdw>
+          </a:effectLst>
+        </p:spPr>
+      </p:sp>
+      <p:sp>
+        <p:nvSpPr>
+          <p:cNvPr id="22" name="Shape 20"/>
+          <p:cNvSpPr/>
+          <p:nvPr/>
+        </p:nvSpPr>
+        <p:spPr>
+          <a:xfrm>
+            <a:off x="868680" y="5202936"/>
+            <a:ext cx="640080" cy="640080"/>
+          </a:xfrm>
+          <a:prstGeom prst="ellipse">
+            <a:avLst/>
+          </a:prstGeom>
+          <a:solidFill>
+            <a:srgbClr val="3AA0B8"/>
+          </a:solidFill>
+          <a:ln/>
+        </p:spPr>
+      </p:sp>
+      <p:sp>
+        <p:nvSpPr>
+          <p:cNvPr id="23" name="Text 21"/>
+          <p:cNvSpPr/>
+          <p:nvPr/>
+        </p:nvSpPr>
+        <p:spPr>
+          <a:xfrm>
+            <a:off x="868680" y="5202936"/>
+            <a:ext cx="640080" cy="640080"/>
           </a:xfrm>
           <a:prstGeom prst="rect">
             <a:avLst/>
@@ -6651,27 +7889,27 @@
               <a:buNone/>
             </a:pPr>
             <a:r>
-              <a:rPr lang="en-US" sz="2200" dirty="0">
+              <a:rPr lang="en-US" sz="2100" dirty="0">
                 <a:solidFill>
                   <a:srgbClr val="000000"/>
                 </a:solidFill>
               </a:rPr>
               <a:t>📊</a:t>
             </a:r>
-            <a:endParaRPr lang="en-US" sz="2200" dirty="0"/>
-          </a:p>
-        </p:txBody>
-      </p:sp>
-      <p:sp>
-        <p:nvSpPr>
-          <p:cNvPr id="17" name="Text 15"/>
-          <p:cNvSpPr/>
-          <p:nvPr/>
-        </p:nvSpPr>
-        <p:spPr>
-          <a:xfrm>
-            <a:off x="1645920" y="5212080"/>
-            <a:ext cx="9601200" cy="457200"/>
+            <a:endParaRPr lang="en-US" sz="2100" dirty="0"/>
+          </a:p>
+        </p:txBody>
+      </p:sp>
+      <p:sp>
+        <p:nvSpPr>
+          <p:cNvPr id="24" name="Text 22"/>
+          <p:cNvSpPr/>
+          <p:nvPr/>
+        </p:nvSpPr>
+        <p:spPr>
+          <a:xfrm>
+            <a:off x="1783080" y="5129784"/>
+            <a:ext cx="9509760" cy="457200"/>
           </a:xfrm>
           <a:prstGeom prst="rect">
             <a:avLst/>
@@ -6687,30 +7925,30 @@
               <a:buNone/>
             </a:pPr>
             <a:r>
-              <a:rPr lang="en-US" sz="1700" b="1" dirty="0">
-                <a:solidFill>
-                  <a:srgbClr val="13315C"/>
-                </a:solidFill>
-                <a:latin typeface="Cambria" pitchFamily="34" charset="0"/>
-                <a:ea typeface="Cambria" pitchFamily="34" charset="-122"/>
-                <a:cs typeface="Cambria" pitchFamily="34" charset="-120"/>
+              <a:rPr lang="en-US" sz="1600" b="1" dirty="0">
+                <a:solidFill>
+                  <a:srgbClr val="FFFFFF"/>
+                </a:solidFill>
+                <a:latin typeface="Calibri" pitchFamily="34" charset="0"/>
+                <a:ea typeface="Calibri" pitchFamily="34" charset="-122"/>
+                <a:cs typeface="Calibri" pitchFamily="34" charset="-120"/>
               </a:rPr>
               <a:t>Observabilidad</a:t>
             </a:r>
-            <a:endParaRPr lang="en-US" sz="1700" dirty="0"/>
-          </a:p>
-        </p:txBody>
-      </p:sp>
-      <p:sp>
-        <p:nvSpPr>
-          <p:cNvPr id="18" name="Text 16"/>
-          <p:cNvSpPr/>
-          <p:nvPr/>
-        </p:nvSpPr>
-        <p:spPr>
-          <a:xfrm>
-            <a:off x="1645920" y="5623560"/>
-            <a:ext cx="9601200" cy="457200"/>
+            <a:endParaRPr lang="en-US" sz="1600" dirty="0"/>
+          </a:p>
+        </p:txBody>
+      </p:sp>
+      <p:sp>
+        <p:nvSpPr>
+          <p:cNvPr id="25" name="Text 23"/>
+          <p:cNvSpPr/>
+          <p:nvPr/>
+        </p:nvSpPr>
+        <p:spPr>
+          <a:xfrm>
+            <a:off x="1783080" y="5550408"/>
+            <a:ext cx="9509760" cy="411480"/>
           </a:xfrm>
           <a:prstGeom prst="rect">
             <a:avLst/>
@@ -6726,17 +7964,17 @@
               <a:buNone/>
             </a:pPr>
             <a:r>
-              <a:rPr lang="en-US" sz="1350" dirty="0">
-                <a:solidFill>
-                  <a:srgbClr val="1A2330"/>
-                </a:solidFill>
-                <a:latin typeface="Calibri" pitchFamily="34" charset="0"/>
-                <a:ea typeface="Calibri" pitchFamily="34" charset="-122"/>
-                <a:cs typeface="Calibri" pitchFamily="34" charset="-120"/>
-              </a:rPr>
-              <a:t>Logs del pipeline en Actions y métricas de recursos (CPU/memoria).</a:t>
-            </a:r>
-            <a:endParaRPr lang="en-US" sz="1350" dirty="0"/>
+              <a:rPr lang="en-US" sz="1300" dirty="0">
+                <a:solidFill>
+                  <a:srgbClr val="CFE0F2"/>
+                </a:solidFill>
+                <a:latin typeface="Calibri" pitchFamily="34" charset="0"/>
+                <a:ea typeface="Calibri" pitchFamily="34" charset="-122"/>
+                <a:cs typeface="Calibri" pitchFamily="34" charset="-120"/>
+              </a:rPr>
+              <a:t>Logs del pipeline en Actions y métricas de CPU/memoria.</a:t>
+            </a:r>
+            <a:endParaRPr lang="en-US" sz="1300" dirty="0"/>
           </a:p>
         </p:txBody>
       </p:sp>
@@ -6754,7 +7992,7 @@
     <p:bg>
       <p:bgPr>
         <a:solidFill>
-          <a:srgbClr val="FFFFFF"/>
+          <a:srgbClr val="0A1E33"/>
         </a:solidFill>
       </p:bgPr>
     </p:bg>
@@ -6774,42 +8012,23 @@
       </p:grpSpPr>
       <p:sp>
         <p:nvSpPr>
-          <p:cNvPr id="2" name="Text 0"/>
-          <p:cNvSpPr/>
-          <p:nvPr/>
-        </p:nvSpPr>
-        <p:spPr>
-          <a:xfrm>
-            <a:off x="548640" y="365760"/>
-            <a:ext cx="11064240" cy="731520"/>
-          </a:xfrm>
-          <a:prstGeom prst="rect">
-            <a:avLst/>
-          </a:prstGeom>
-          <a:noFill/>
-          <a:ln/>
-        </p:spPr>
-        <p:txBody>
-          <a:bodyPr wrap="square" rtlCol="0" anchor="ctr"/>
-          <a:lstStyle/>
-          <a:p>
-            <a:pPr indent="0" marL="0">
-              <a:buNone/>
-            </a:pPr>
-            <a:r>
-              <a:rPr lang="en-US" sz="3200" b="1" dirty="0">
-                <a:solidFill>
-                  <a:srgbClr val="13315C"/>
-                </a:solidFill>
-                <a:latin typeface="Cambria" pitchFamily="34" charset="0"/>
-                <a:ea typeface="Cambria" pitchFamily="34" charset="-122"/>
-                <a:cs typeface="Cambria" pitchFamily="34" charset="-120"/>
-              </a:rPr>
-              <a:t>Demostración en vivo</a:t>
-            </a:r>
-            <a:endParaRPr lang="en-US" sz="3200" dirty="0"/>
-          </a:p>
-        </p:txBody>
+          <p:cNvPr id="2" name="Shape 0"/>
+          <p:cNvSpPr/>
+          <p:nvPr/>
+        </p:nvSpPr>
+        <p:spPr>
+          <a:xfrm>
+            <a:off x="9418320" y="-2011680"/>
+            <a:ext cx="5029200" cy="5029200"/>
+          </a:xfrm>
+          <a:prstGeom prst="ellipse">
+            <a:avLst/>
+          </a:prstGeom>
+          <a:solidFill>
+            <a:srgbClr val="102A46"/>
+          </a:solidFill>
+          <a:ln/>
+        </p:spPr>
       </p:sp>
       <p:sp>
         <p:nvSpPr>
@@ -6819,35 +8038,162 @@
         </p:nvSpPr>
         <p:spPr>
           <a:xfrm>
-            <a:off x="731520" y="1600200"/>
-            <a:ext cx="457200" cy="457200"/>
+            <a:off x="548640" y="502920"/>
+            <a:ext cx="566928" cy="566928"/>
           </a:xfrm>
           <a:prstGeom prst="roundRect">
             <a:avLst>
-              <a:gd name="adj" fmla="val 16000"/>
+              <a:gd name="adj" fmla="val 50000"/>
             </a:avLst>
           </a:prstGeom>
           <a:solidFill>
-            <a:srgbClr val="02C39A"/>
+            <a:srgbClr val="10D6A3"/>
+          </a:solidFill>
+          <a:ln/>
+        </p:spPr>
+      </p:sp>
+      <p:sp>
+        <p:nvSpPr>
+          <p:cNvPr id="4" name="Text 2"/>
+          <p:cNvSpPr/>
+          <p:nvPr/>
+        </p:nvSpPr>
+        <p:spPr>
+          <a:xfrm>
+            <a:off x="548640" y="502920"/>
+            <a:ext cx="566928" cy="566928"/>
+          </a:xfrm>
+          <a:prstGeom prst="rect">
+            <a:avLst/>
+          </a:prstGeom>
+          <a:noFill/>
+          <a:ln/>
+        </p:spPr>
+        <p:txBody>
+          <a:bodyPr wrap="square" rtlCol="0" anchor="ctr"/>
+          <a:lstStyle/>
+          <a:p>
+            <a:pPr algn="ctr" indent="0" marL="0">
+              <a:buNone/>
+            </a:pPr>
+            <a:r>
+              <a:rPr lang="en-US" sz="2200" b="1" dirty="0">
+                <a:solidFill>
+                  <a:srgbClr val="0A1E33"/>
+                </a:solidFill>
+                <a:latin typeface="Calibri" pitchFamily="34" charset="0"/>
+                <a:ea typeface="Calibri" pitchFamily="34" charset="-122"/>
+                <a:cs typeface="Calibri" pitchFamily="34" charset="-120"/>
+              </a:rPr>
+              <a:t>▶</a:t>
+            </a:r>
+            <a:endParaRPr lang="en-US" sz="2200" dirty="0"/>
+          </a:p>
+        </p:txBody>
+      </p:sp>
+      <p:sp>
+        <p:nvSpPr>
+          <p:cNvPr id="5" name="Text 3"/>
+          <p:cNvSpPr/>
+          <p:nvPr/>
+        </p:nvSpPr>
+        <p:spPr>
+          <a:xfrm>
+            <a:off x="1280160" y="457200"/>
+            <a:ext cx="10241280" cy="685800"/>
+          </a:xfrm>
+          <a:prstGeom prst="rect">
+            <a:avLst/>
+          </a:prstGeom>
+          <a:noFill/>
+          <a:ln/>
+        </p:spPr>
+        <p:txBody>
+          <a:bodyPr wrap="square" rtlCol="0" anchor="ctr"/>
+          <a:lstStyle/>
+          <a:p>
+            <a:pPr indent="0" marL="0">
+              <a:buNone/>
+            </a:pPr>
+            <a:r>
+              <a:rPr lang="en-US" sz="3000" b="1" dirty="0">
+                <a:solidFill>
+                  <a:srgbClr val="FFFFFF"/>
+                </a:solidFill>
+                <a:latin typeface="Calibri" pitchFamily="34" charset="0"/>
+                <a:ea typeface="Calibri" pitchFamily="34" charset="-122"/>
+                <a:cs typeface="Calibri" pitchFamily="34" charset="-120"/>
+              </a:rPr>
+              <a:t>Demostración en vivo</a:t>
+            </a:r>
+            <a:endParaRPr lang="en-US" sz="3000" dirty="0"/>
+          </a:p>
+        </p:txBody>
+      </p:sp>
+      <p:sp>
+        <p:nvSpPr>
+          <p:cNvPr id="6" name="Shape 4"/>
+          <p:cNvSpPr/>
+          <p:nvPr/>
+        </p:nvSpPr>
+        <p:spPr>
+          <a:xfrm>
+            <a:off x="640080" y="1554480"/>
+            <a:ext cx="10972800" cy="658368"/>
+          </a:xfrm>
+          <a:prstGeom prst="roundRect">
+            <a:avLst>
+              <a:gd name="adj" fmla="val 13889"/>
+            </a:avLst>
+          </a:prstGeom>
+          <a:solidFill>
+            <a:srgbClr val="102A46"/>
           </a:solidFill>
           <a:ln w="12700">
             <a:solidFill>
-              <a:srgbClr val="02C39A"/>
+              <a:srgbClr val="2A5578"/>
             </a:solidFill>
             <a:prstDash val="solid"/>
           </a:ln>
-        </p:spPr>
-      </p:sp>
-      <p:sp>
-        <p:nvSpPr>
-          <p:cNvPr id="4" name="Text 2"/>
-          <p:cNvSpPr/>
-          <p:nvPr/>
-        </p:nvSpPr>
-        <p:spPr>
-          <a:xfrm>
-            <a:off x="731520" y="1600200"/>
-            <a:ext cx="457200" cy="457200"/>
+          <a:effectLst>
+            <a:outerShdw sx="100000" sy="100000" kx="0" ky="0" algn="bl" rotWithShape="0" blurRad="114300" dist="50800" dir="5400000">
+              <a:srgbClr val="000000">
+                <a:alpha val="45000"/>
+              </a:srgbClr>
+            </a:outerShdw>
+          </a:effectLst>
+        </p:spPr>
+      </p:sp>
+      <p:sp>
+        <p:nvSpPr>
+          <p:cNvPr id="7" name="Shape 5"/>
+          <p:cNvSpPr/>
+          <p:nvPr/>
+        </p:nvSpPr>
+        <p:spPr>
+          <a:xfrm>
+            <a:off x="868680" y="1700784"/>
+            <a:ext cx="365760" cy="365760"/>
+          </a:xfrm>
+          <a:prstGeom prst="ellipse">
+            <a:avLst/>
+          </a:prstGeom>
+          <a:solidFill>
+            <a:srgbClr val="10D6A3"/>
+          </a:solidFill>
+          <a:ln/>
+        </p:spPr>
+      </p:sp>
+      <p:sp>
+        <p:nvSpPr>
+          <p:cNvPr id="8" name="Text 6"/>
+          <p:cNvSpPr/>
+          <p:nvPr/>
+        </p:nvSpPr>
+        <p:spPr>
+          <a:xfrm>
+            <a:off x="868680" y="1700784"/>
+            <a:ext cx="365760" cy="365760"/>
           </a:xfrm>
           <a:prstGeom prst="rect">
             <a:avLst/>
@@ -6863,7 +8209,46 @@
               <a:buNone/>
             </a:pPr>
             <a:r>
-              <a:rPr lang="en-US" sz="1800" b="1" dirty="0">
+              <a:rPr lang="en-US" sz="1500" b="1" dirty="0">
+                <a:solidFill>
+                  <a:srgbClr val="0A1E33"/>
+                </a:solidFill>
+                <a:latin typeface="Calibri" pitchFamily="34" charset="0"/>
+                <a:ea typeface="Calibri" pitchFamily="34" charset="-122"/>
+                <a:cs typeface="Calibri" pitchFamily="34" charset="-120"/>
+              </a:rPr>
+              <a:t>✓</a:t>
+            </a:r>
+            <a:endParaRPr lang="en-US" sz="1500" dirty="0"/>
+          </a:p>
+        </p:txBody>
+      </p:sp>
+      <p:sp>
+        <p:nvSpPr>
+          <p:cNvPr id="9" name="Text 7"/>
+          <p:cNvSpPr/>
+          <p:nvPr/>
+        </p:nvSpPr>
+        <p:spPr>
+          <a:xfrm>
+            <a:off x="1463040" y="1554480"/>
+            <a:ext cx="9875520" cy="658368"/>
+          </a:xfrm>
+          <a:prstGeom prst="rect">
+            <a:avLst/>
+          </a:prstGeom>
+          <a:noFill/>
+          <a:ln/>
+        </p:spPr>
+        <p:txBody>
+          <a:bodyPr wrap="square" rtlCol="0" anchor="ctr"/>
+          <a:lstStyle/>
+          <a:p>
+            <a:pPr indent="0" marL="0">
+              <a:buNone/>
+            </a:pPr>
+            <a:r>
+              <a:rPr lang="en-US" sz="1500" dirty="0">
                 <a:solidFill>
                   <a:srgbClr val="FFFFFF"/>
                 </a:solidFill>
@@ -6871,88 +8256,76 @@
                 <a:ea typeface="Calibri" pitchFamily="34" charset="-122"/>
                 <a:cs typeface="Calibri" pitchFamily="34" charset="-120"/>
               </a:rPr>
-              <a:t>✓</a:t>
-            </a:r>
-            <a:endParaRPr lang="en-US" sz="1800" dirty="0"/>
-          </a:p>
-        </p:txBody>
-      </p:sp>
-      <p:sp>
-        <p:nvSpPr>
-          <p:cNvPr id="5" name="Text 3"/>
-          <p:cNvSpPr/>
-          <p:nvPr/>
-        </p:nvSpPr>
-        <p:spPr>
-          <a:xfrm>
-            <a:off x="1371600" y="1554480"/>
-            <a:ext cx="10058400" cy="548640"/>
-          </a:xfrm>
-          <a:prstGeom prst="rect">
-            <a:avLst/>
-          </a:prstGeom>
-          <a:noFill/>
-          <a:ln/>
-        </p:spPr>
-        <p:txBody>
-          <a:bodyPr wrap="square" rtlCol="0" anchor="ctr"/>
-          <a:lstStyle/>
-          <a:p>
-            <a:pPr indent="0" marL="0">
-              <a:buNone/>
-            </a:pPr>
-            <a:r>
-              <a:rPr lang="en-US" sz="1600" dirty="0">
-                <a:solidFill>
-                  <a:srgbClr val="1A2330"/>
-                </a:solidFill>
-                <a:latin typeface="Calibri" pitchFamily="34" charset="0"/>
-                <a:ea typeface="Calibri" pitchFamily="34" charset="-122"/>
-                <a:cs typeface="Calibri" pitchFamily="34" charset="-120"/>
-              </a:rPr>
               <a:t>Repositorio en GitHub: estructura y commits</a:t>
             </a:r>
-            <a:endParaRPr lang="en-US" sz="1600" dirty="0"/>
-          </a:p>
-        </p:txBody>
-      </p:sp>
-      <p:sp>
-        <p:nvSpPr>
-          <p:cNvPr id="6" name="Shape 4"/>
-          <p:cNvSpPr/>
-          <p:nvPr/>
-        </p:nvSpPr>
-        <p:spPr>
-          <a:xfrm>
-            <a:off x="731520" y="2377440"/>
-            <a:ext cx="457200" cy="457200"/>
+            <a:endParaRPr lang="en-US" sz="1500" dirty="0"/>
+          </a:p>
+        </p:txBody>
+      </p:sp>
+      <p:sp>
+        <p:nvSpPr>
+          <p:cNvPr id="10" name="Shape 8"/>
+          <p:cNvSpPr/>
+          <p:nvPr/>
+        </p:nvSpPr>
+        <p:spPr>
+          <a:xfrm>
+            <a:off x="640080" y="2340864"/>
+            <a:ext cx="10972800" cy="658368"/>
           </a:xfrm>
           <a:prstGeom prst="roundRect">
             <a:avLst>
-              <a:gd name="adj" fmla="val 16000"/>
+              <a:gd name="adj" fmla="val 13889"/>
             </a:avLst>
           </a:prstGeom>
           <a:solidFill>
-            <a:srgbClr val="02C39A"/>
+            <a:srgbClr val="102A46"/>
           </a:solidFill>
           <a:ln w="12700">
             <a:solidFill>
-              <a:srgbClr val="02C39A"/>
+              <a:srgbClr val="2A5578"/>
             </a:solidFill>
             <a:prstDash val="solid"/>
           </a:ln>
-        </p:spPr>
-      </p:sp>
-      <p:sp>
-        <p:nvSpPr>
-          <p:cNvPr id="7" name="Text 5"/>
-          <p:cNvSpPr/>
-          <p:nvPr/>
-        </p:nvSpPr>
-        <p:spPr>
-          <a:xfrm>
-            <a:off x="731520" y="2377440"/>
-            <a:ext cx="457200" cy="457200"/>
+          <a:effectLst>
+            <a:outerShdw sx="100000" sy="100000" kx="0" ky="0" algn="bl" rotWithShape="0" blurRad="114300" dist="50800" dir="5400000">
+              <a:srgbClr val="000000">
+                <a:alpha val="45000"/>
+              </a:srgbClr>
+            </a:outerShdw>
+          </a:effectLst>
+        </p:spPr>
+      </p:sp>
+      <p:sp>
+        <p:nvSpPr>
+          <p:cNvPr id="11" name="Shape 9"/>
+          <p:cNvSpPr/>
+          <p:nvPr/>
+        </p:nvSpPr>
+        <p:spPr>
+          <a:xfrm>
+            <a:off x="868680" y="2487168"/>
+            <a:ext cx="365760" cy="365760"/>
+          </a:xfrm>
+          <a:prstGeom prst="ellipse">
+            <a:avLst/>
+          </a:prstGeom>
+          <a:solidFill>
+            <a:srgbClr val="10D6A3"/>
+          </a:solidFill>
+          <a:ln/>
+        </p:spPr>
+      </p:sp>
+      <p:sp>
+        <p:nvSpPr>
+          <p:cNvPr id="12" name="Text 10"/>
+          <p:cNvSpPr/>
+          <p:nvPr/>
+        </p:nvSpPr>
+        <p:spPr>
+          <a:xfrm>
+            <a:off x="868680" y="2487168"/>
+            <a:ext cx="365760" cy="365760"/>
           </a:xfrm>
           <a:prstGeom prst="rect">
             <a:avLst/>
@@ -6968,7 +8341,46 @@
               <a:buNone/>
             </a:pPr>
             <a:r>
-              <a:rPr lang="en-US" sz="1800" b="1" dirty="0">
+              <a:rPr lang="en-US" sz="1500" b="1" dirty="0">
+                <a:solidFill>
+                  <a:srgbClr val="0A1E33"/>
+                </a:solidFill>
+                <a:latin typeface="Calibri" pitchFamily="34" charset="0"/>
+                <a:ea typeface="Calibri" pitchFamily="34" charset="-122"/>
+                <a:cs typeface="Calibri" pitchFamily="34" charset="-120"/>
+              </a:rPr>
+              <a:t>✓</a:t>
+            </a:r>
+            <a:endParaRPr lang="en-US" sz="1500" dirty="0"/>
+          </a:p>
+        </p:txBody>
+      </p:sp>
+      <p:sp>
+        <p:nvSpPr>
+          <p:cNvPr id="13" name="Text 11"/>
+          <p:cNvSpPr/>
+          <p:nvPr/>
+        </p:nvSpPr>
+        <p:spPr>
+          <a:xfrm>
+            <a:off x="1463040" y="2340864"/>
+            <a:ext cx="9875520" cy="658368"/>
+          </a:xfrm>
+          <a:prstGeom prst="rect">
+            <a:avLst/>
+          </a:prstGeom>
+          <a:noFill/>
+          <a:ln/>
+        </p:spPr>
+        <p:txBody>
+          <a:bodyPr wrap="square" rtlCol="0" anchor="ctr"/>
+          <a:lstStyle/>
+          <a:p>
+            <a:pPr indent="0" marL="0">
+              <a:buNone/>
+            </a:pPr>
+            <a:r>
+              <a:rPr lang="en-US" sz="1500" dirty="0">
                 <a:solidFill>
                   <a:srgbClr val="FFFFFF"/>
                 </a:solidFill>
@@ -6976,88 +8388,76 @@
                 <a:ea typeface="Calibri" pitchFamily="34" charset="-122"/>
                 <a:cs typeface="Calibri" pitchFamily="34" charset="-120"/>
               </a:rPr>
-              <a:t>✓</a:t>
-            </a:r>
-            <a:endParaRPr lang="en-US" sz="1800" dirty="0"/>
-          </a:p>
-        </p:txBody>
-      </p:sp>
-      <p:sp>
-        <p:nvSpPr>
-          <p:cNvPr id="8" name="Text 6"/>
-          <p:cNvSpPr/>
-          <p:nvPr/>
-        </p:nvSpPr>
-        <p:spPr>
-          <a:xfrm>
-            <a:off x="1371600" y="2331720"/>
-            <a:ext cx="10058400" cy="548640"/>
-          </a:xfrm>
-          <a:prstGeom prst="rect">
-            <a:avLst/>
-          </a:prstGeom>
-          <a:noFill/>
-          <a:ln/>
-        </p:spPr>
-        <p:txBody>
-          <a:bodyPr wrap="square" rtlCol="0" anchor="ctr"/>
-          <a:lstStyle/>
-          <a:p>
-            <a:pPr indent="0" marL="0">
-              <a:buNone/>
-            </a:pPr>
-            <a:r>
-              <a:rPr lang="en-US" sz="1600" dirty="0">
-                <a:solidFill>
-                  <a:srgbClr val="1A2330"/>
-                </a:solidFill>
-                <a:latin typeface="Calibri" pitchFamily="34" charset="0"/>
-                <a:ea typeface="Calibri" pitchFamily="34" charset="-122"/>
-                <a:cs typeface="Calibri" pitchFamily="34" charset="-120"/>
-              </a:rPr>
               <a:t>docker-compose levantando la plataforma en local</a:t>
             </a:r>
-            <a:endParaRPr lang="en-US" sz="1600" dirty="0"/>
-          </a:p>
-        </p:txBody>
-      </p:sp>
-      <p:sp>
-        <p:nvSpPr>
-          <p:cNvPr id="9" name="Shape 7"/>
-          <p:cNvSpPr/>
-          <p:nvPr/>
-        </p:nvSpPr>
-        <p:spPr>
-          <a:xfrm>
-            <a:off x="731520" y="3154680"/>
-            <a:ext cx="457200" cy="457200"/>
+            <a:endParaRPr lang="en-US" sz="1500" dirty="0"/>
+          </a:p>
+        </p:txBody>
+      </p:sp>
+      <p:sp>
+        <p:nvSpPr>
+          <p:cNvPr id="14" name="Shape 12"/>
+          <p:cNvSpPr/>
+          <p:nvPr/>
+        </p:nvSpPr>
+        <p:spPr>
+          <a:xfrm>
+            <a:off x="640080" y="3127248"/>
+            <a:ext cx="10972800" cy="658368"/>
           </a:xfrm>
           <a:prstGeom prst="roundRect">
             <a:avLst>
-              <a:gd name="adj" fmla="val 16000"/>
+              <a:gd name="adj" fmla="val 13889"/>
             </a:avLst>
           </a:prstGeom>
           <a:solidFill>
-            <a:srgbClr val="02C39A"/>
+            <a:srgbClr val="102A46"/>
           </a:solidFill>
           <a:ln w="12700">
             <a:solidFill>
-              <a:srgbClr val="02C39A"/>
+              <a:srgbClr val="2A5578"/>
             </a:solidFill>
             <a:prstDash val="solid"/>
           </a:ln>
-        </p:spPr>
-      </p:sp>
-      <p:sp>
-        <p:nvSpPr>
-          <p:cNvPr id="10" name="Text 8"/>
-          <p:cNvSpPr/>
-          <p:nvPr/>
-        </p:nvSpPr>
-        <p:spPr>
-          <a:xfrm>
-            <a:off x="731520" y="3154680"/>
-            <a:ext cx="457200" cy="457200"/>
+          <a:effectLst>
+            <a:outerShdw sx="100000" sy="100000" kx="0" ky="0" algn="bl" rotWithShape="0" blurRad="114300" dist="50800" dir="5400000">
+              <a:srgbClr val="000000">
+                <a:alpha val="45000"/>
+              </a:srgbClr>
+            </a:outerShdw>
+          </a:effectLst>
+        </p:spPr>
+      </p:sp>
+      <p:sp>
+        <p:nvSpPr>
+          <p:cNvPr id="15" name="Shape 13"/>
+          <p:cNvSpPr/>
+          <p:nvPr/>
+        </p:nvSpPr>
+        <p:spPr>
+          <a:xfrm>
+            <a:off x="868680" y="3273552"/>
+            <a:ext cx="365760" cy="365760"/>
+          </a:xfrm>
+          <a:prstGeom prst="ellipse">
+            <a:avLst/>
+          </a:prstGeom>
+          <a:solidFill>
+            <a:srgbClr val="10D6A3"/>
+          </a:solidFill>
+          <a:ln/>
+        </p:spPr>
+      </p:sp>
+      <p:sp>
+        <p:nvSpPr>
+          <p:cNvPr id="16" name="Text 14"/>
+          <p:cNvSpPr/>
+          <p:nvPr/>
+        </p:nvSpPr>
+        <p:spPr>
+          <a:xfrm>
+            <a:off x="868680" y="3273552"/>
+            <a:ext cx="365760" cy="365760"/>
           </a:xfrm>
           <a:prstGeom prst="rect">
             <a:avLst/>
@@ -7073,7 +8473,46 @@
               <a:buNone/>
             </a:pPr>
             <a:r>
-              <a:rPr lang="en-US" sz="1800" b="1" dirty="0">
+              <a:rPr lang="en-US" sz="1500" b="1" dirty="0">
+                <a:solidFill>
+                  <a:srgbClr val="0A1E33"/>
+                </a:solidFill>
+                <a:latin typeface="Calibri" pitchFamily="34" charset="0"/>
+                <a:ea typeface="Calibri" pitchFamily="34" charset="-122"/>
+                <a:cs typeface="Calibri" pitchFamily="34" charset="-120"/>
+              </a:rPr>
+              <a:t>✓</a:t>
+            </a:r>
+            <a:endParaRPr lang="en-US" sz="1500" dirty="0"/>
+          </a:p>
+        </p:txBody>
+      </p:sp>
+      <p:sp>
+        <p:nvSpPr>
+          <p:cNvPr id="17" name="Text 15"/>
+          <p:cNvSpPr/>
+          <p:nvPr/>
+        </p:nvSpPr>
+        <p:spPr>
+          <a:xfrm>
+            <a:off x="1463040" y="3127248"/>
+            <a:ext cx="9875520" cy="658368"/>
+          </a:xfrm>
+          <a:prstGeom prst="rect">
+            <a:avLst/>
+          </a:prstGeom>
+          <a:noFill/>
+          <a:ln/>
+        </p:spPr>
+        <p:txBody>
+          <a:bodyPr wrap="square" rtlCol="0" anchor="ctr"/>
+          <a:lstStyle/>
+          <a:p>
+            <a:pPr indent="0" marL="0">
+              <a:buNone/>
+            </a:pPr>
+            <a:r>
+              <a:rPr lang="en-US" sz="1500" dirty="0">
                 <a:solidFill>
                   <a:srgbClr val="FFFFFF"/>
                 </a:solidFill>
@@ -7081,88 +8520,76 @@
                 <a:ea typeface="Calibri" pitchFamily="34" charset="-122"/>
                 <a:cs typeface="Calibri" pitchFamily="34" charset="-120"/>
               </a:rPr>
-              <a:t>✓</a:t>
-            </a:r>
-            <a:endParaRPr lang="en-US" sz="1800" dirty="0"/>
-          </a:p>
-        </p:txBody>
-      </p:sp>
-      <p:sp>
-        <p:nvSpPr>
-          <p:cNvPr id="11" name="Text 9"/>
-          <p:cNvSpPr/>
-          <p:nvPr/>
-        </p:nvSpPr>
-        <p:spPr>
-          <a:xfrm>
-            <a:off x="1371600" y="3108960"/>
-            <a:ext cx="10058400" cy="548640"/>
-          </a:xfrm>
-          <a:prstGeom prst="rect">
-            <a:avLst/>
-          </a:prstGeom>
-          <a:noFill/>
-          <a:ln/>
-        </p:spPr>
-        <p:txBody>
-          <a:bodyPr wrap="square" rtlCol="0" anchor="ctr"/>
-          <a:lstStyle/>
-          <a:p>
-            <a:pPr indent="0" marL="0">
-              <a:buNone/>
-            </a:pPr>
-            <a:r>
-              <a:rPr lang="en-US" sz="1600" dirty="0">
-                <a:solidFill>
-                  <a:srgbClr val="1A2330"/>
-                </a:solidFill>
-                <a:latin typeface="Calibri" pitchFamily="34" charset="0"/>
-                <a:ea typeface="Calibri" pitchFamily="34" charset="-122"/>
-                <a:cs typeface="Calibri" pitchFamily="34" charset="-120"/>
-              </a:rPr>
-              <a:t>Pipeline en GitHub Actions ejecutándose (build → test → push → deploy)</a:t>
-            </a:r>
-            <a:endParaRPr lang="en-US" sz="1600" dirty="0"/>
-          </a:p>
-        </p:txBody>
-      </p:sp>
-      <p:sp>
-        <p:nvSpPr>
-          <p:cNvPr id="12" name="Shape 10"/>
-          <p:cNvSpPr/>
-          <p:nvPr/>
-        </p:nvSpPr>
-        <p:spPr>
-          <a:xfrm>
-            <a:off x="731520" y="3931920"/>
-            <a:ext cx="457200" cy="457200"/>
+              <a:t>Pipeline en Actions: build → test → push → deploy</a:t>
+            </a:r>
+            <a:endParaRPr lang="en-US" sz="1500" dirty="0"/>
+          </a:p>
+        </p:txBody>
+      </p:sp>
+      <p:sp>
+        <p:nvSpPr>
+          <p:cNvPr id="18" name="Shape 16"/>
+          <p:cNvSpPr/>
+          <p:nvPr/>
+        </p:nvSpPr>
+        <p:spPr>
+          <a:xfrm>
+            <a:off x="640080" y="3913632"/>
+            <a:ext cx="10972800" cy="658368"/>
           </a:xfrm>
           <a:prstGeom prst="roundRect">
             <a:avLst>
-              <a:gd name="adj" fmla="val 16000"/>
+              <a:gd name="adj" fmla="val 13889"/>
             </a:avLst>
           </a:prstGeom>
           <a:solidFill>
-            <a:srgbClr val="02C39A"/>
+            <a:srgbClr val="102A46"/>
           </a:solidFill>
           <a:ln w="12700">
             <a:solidFill>
-              <a:srgbClr val="02C39A"/>
+              <a:srgbClr val="2A5578"/>
             </a:solidFill>
             <a:prstDash val="solid"/>
           </a:ln>
-        </p:spPr>
-      </p:sp>
-      <p:sp>
-        <p:nvSpPr>
-          <p:cNvPr id="13" name="Text 11"/>
-          <p:cNvSpPr/>
-          <p:nvPr/>
-        </p:nvSpPr>
-        <p:spPr>
-          <a:xfrm>
-            <a:off x="731520" y="3931920"/>
-            <a:ext cx="457200" cy="457200"/>
+          <a:effectLst>
+            <a:outerShdw sx="100000" sy="100000" kx="0" ky="0" algn="bl" rotWithShape="0" blurRad="114300" dist="50800" dir="5400000">
+              <a:srgbClr val="000000">
+                <a:alpha val="45000"/>
+              </a:srgbClr>
+            </a:outerShdw>
+          </a:effectLst>
+        </p:spPr>
+      </p:sp>
+      <p:sp>
+        <p:nvSpPr>
+          <p:cNvPr id="19" name="Shape 17"/>
+          <p:cNvSpPr/>
+          <p:nvPr/>
+        </p:nvSpPr>
+        <p:spPr>
+          <a:xfrm>
+            <a:off x="868680" y="4059936"/>
+            <a:ext cx="365760" cy="365760"/>
+          </a:xfrm>
+          <a:prstGeom prst="ellipse">
+            <a:avLst/>
+          </a:prstGeom>
+          <a:solidFill>
+            <a:srgbClr val="10D6A3"/>
+          </a:solidFill>
+          <a:ln/>
+        </p:spPr>
+      </p:sp>
+      <p:sp>
+        <p:nvSpPr>
+          <p:cNvPr id="20" name="Text 18"/>
+          <p:cNvSpPr/>
+          <p:nvPr/>
+        </p:nvSpPr>
+        <p:spPr>
+          <a:xfrm>
+            <a:off x="868680" y="4059936"/>
+            <a:ext cx="365760" cy="365760"/>
           </a:xfrm>
           <a:prstGeom prst="rect">
             <a:avLst/>
@@ -7178,7 +8605,46 @@
               <a:buNone/>
             </a:pPr>
             <a:r>
-              <a:rPr lang="en-US" sz="1800" b="1" dirty="0">
+              <a:rPr lang="en-US" sz="1500" b="1" dirty="0">
+                <a:solidFill>
+                  <a:srgbClr val="0A1E33"/>
+                </a:solidFill>
+                <a:latin typeface="Calibri" pitchFamily="34" charset="0"/>
+                <a:ea typeface="Calibri" pitchFamily="34" charset="-122"/>
+                <a:cs typeface="Calibri" pitchFamily="34" charset="-120"/>
+              </a:rPr>
+              <a:t>✓</a:t>
+            </a:r>
+            <a:endParaRPr lang="en-US" sz="1500" dirty="0"/>
+          </a:p>
+        </p:txBody>
+      </p:sp>
+      <p:sp>
+        <p:nvSpPr>
+          <p:cNvPr id="21" name="Text 19"/>
+          <p:cNvSpPr/>
+          <p:nvPr/>
+        </p:nvSpPr>
+        <p:spPr>
+          <a:xfrm>
+            <a:off x="1463040" y="3913632"/>
+            <a:ext cx="9875520" cy="658368"/>
+          </a:xfrm>
+          <a:prstGeom prst="rect">
+            <a:avLst/>
+          </a:prstGeom>
+          <a:noFill/>
+          <a:ln/>
+        </p:spPr>
+        <p:txBody>
+          <a:bodyPr wrap="square" rtlCol="0" anchor="ctr"/>
+          <a:lstStyle/>
+          <a:p>
+            <a:pPr indent="0" marL="0">
+              <a:buNone/>
+            </a:pPr>
+            <a:r>
+              <a:rPr lang="en-US" sz="1500" dirty="0">
                 <a:solidFill>
                   <a:srgbClr val="FFFFFF"/>
                 </a:solidFill>
@@ -7186,88 +8652,76 @@
                 <a:ea typeface="Calibri" pitchFamily="34" charset="-122"/>
                 <a:cs typeface="Calibri" pitchFamily="34" charset="-120"/>
               </a:rPr>
-              <a:t>✓</a:t>
-            </a:r>
-            <a:endParaRPr lang="en-US" sz="1800" dirty="0"/>
-          </a:p>
-        </p:txBody>
-      </p:sp>
-      <p:sp>
-        <p:nvSpPr>
-          <p:cNvPr id="14" name="Text 12"/>
-          <p:cNvSpPr/>
-          <p:nvPr/>
-        </p:nvSpPr>
-        <p:spPr>
-          <a:xfrm>
-            <a:off x="1371600" y="3886200"/>
-            <a:ext cx="10058400" cy="548640"/>
-          </a:xfrm>
-          <a:prstGeom prst="rect">
-            <a:avLst/>
-          </a:prstGeom>
-          <a:noFill/>
-          <a:ln/>
-        </p:spPr>
-        <p:txBody>
-          <a:bodyPr wrap="square" rtlCol="0" anchor="ctr"/>
-          <a:lstStyle/>
-          <a:p>
-            <a:pPr indent="0" marL="0">
-              <a:buNone/>
-            </a:pPr>
-            <a:r>
-              <a:rPr lang="en-US" sz="1600" dirty="0">
-                <a:solidFill>
-                  <a:srgbClr val="1A2330"/>
-                </a:solidFill>
-                <a:latin typeface="Calibri" pitchFamily="34" charset="0"/>
-                <a:ea typeface="Calibri" pitchFamily="34" charset="-122"/>
-                <a:cs typeface="Calibri" pitchFamily="34" charset="-120"/>
-              </a:rPr>
               <a:t>Imágenes publicadas en Amazon ECR (con tags)</a:t>
             </a:r>
-            <a:endParaRPr lang="en-US" sz="1600" dirty="0"/>
-          </a:p>
-        </p:txBody>
-      </p:sp>
-      <p:sp>
-        <p:nvSpPr>
-          <p:cNvPr id="15" name="Shape 13"/>
-          <p:cNvSpPr/>
-          <p:nvPr/>
-        </p:nvSpPr>
-        <p:spPr>
-          <a:xfrm>
-            <a:off x="731520" y="4709160"/>
-            <a:ext cx="457200" cy="457200"/>
+            <a:endParaRPr lang="en-US" sz="1500" dirty="0"/>
+          </a:p>
+        </p:txBody>
+      </p:sp>
+      <p:sp>
+        <p:nvSpPr>
+          <p:cNvPr id="22" name="Shape 20"/>
+          <p:cNvSpPr/>
+          <p:nvPr/>
+        </p:nvSpPr>
+        <p:spPr>
+          <a:xfrm>
+            <a:off x="640080" y="4700016"/>
+            <a:ext cx="10972800" cy="658368"/>
           </a:xfrm>
           <a:prstGeom prst="roundRect">
             <a:avLst>
-              <a:gd name="adj" fmla="val 16000"/>
+              <a:gd name="adj" fmla="val 13889"/>
             </a:avLst>
           </a:prstGeom>
           <a:solidFill>
-            <a:srgbClr val="02C39A"/>
+            <a:srgbClr val="102A46"/>
           </a:solidFill>
           <a:ln w="12700">
             <a:solidFill>
-              <a:srgbClr val="02C39A"/>
+              <a:srgbClr val="2A5578"/>
             </a:solidFill>
             <a:prstDash val="solid"/>
           </a:ln>
-        </p:spPr>
-      </p:sp>
-      <p:sp>
-        <p:nvSpPr>
-          <p:cNvPr id="16" name="Text 14"/>
-          <p:cNvSpPr/>
-          <p:nvPr/>
-        </p:nvSpPr>
-        <p:spPr>
-          <a:xfrm>
-            <a:off x="731520" y="4709160"/>
-            <a:ext cx="457200" cy="457200"/>
+          <a:effectLst>
+            <a:outerShdw sx="100000" sy="100000" kx="0" ky="0" algn="bl" rotWithShape="0" blurRad="114300" dist="50800" dir="5400000">
+              <a:srgbClr val="000000">
+                <a:alpha val="45000"/>
+              </a:srgbClr>
+            </a:outerShdw>
+          </a:effectLst>
+        </p:spPr>
+      </p:sp>
+      <p:sp>
+        <p:nvSpPr>
+          <p:cNvPr id="23" name="Shape 21"/>
+          <p:cNvSpPr/>
+          <p:nvPr/>
+        </p:nvSpPr>
+        <p:spPr>
+          <a:xfrm>
+            <a:off x="868680" y="4846320"/>
+            <a:ext cx="365760" cy="365760"/>
+          </a:xfrm>
+          <a:prstGeom prst="ellipse">
+            <a:avLst/>
+          </a:prstGeom>
+          <a:solidFill>
+            <a:srgbClr val="10D6A3"/>
+          </a:solidFill>
+          <a:ln/>
+        </p:spPr>
+      </p:sp>
+      <p:sp>
+        <p:nvSpPr>
+          <p:cNvPr id="24" name="Text 22"/>
+          <p:cNvSpPr/>
+          <p:nvPr/>
+        </p:nvSpPr>
+        <p:spPr>
+          <a:xfrm>
+            <a:off x="868680" y="4846320"/>
+            <a:ext cx="365760" cy="365760"/>
           </a:xfrm>
           <a:prstGeom prst="rect">
             <a:avLst/>
@@ -7283,7 +8737,46 @@
               <a:buNone/>
             </a:pPr>
             <a:r>
-              <a:rPr lang="en-US" sz="1800" b="1" dirty="0">
+              <a:rPr lang="en-US" sz="1500" b="1" dirty="0">
+                <a:solidFill>
+                  <a:srgbClr val="0A1E33"/>
+                </a:solidFill>
+                <a:latin typeface="Calibri" pitchFamily="34" charset="0"/>
+                <a:ea typeface="Calibri" pitchFamily="34" charset="-122"/>
+                <a:cs typeface="Calibri" pitchFamily="34" charset="-120"/>
+              </a:rPr>
+              <a:t>✓</a:t>
+            </a:r>
+            <a:endParaRPr lang="en-US" sz="1500" dirty="0"/>
+          </a:p>
+        </p:txBody>
+      </p:sp>
+      <p:sp>
+        <p:nvSpPr>
+          <p:cNvPr id="25" name="Text 23"/>
+          <p:cNvSpPr/>
+          <p:nvPr/>
+        </p:nvSpPr>
+        <p:spPr>
+          <a:xfrm>
+            <a:off x="1463040" y="4700016"/>
+            <a:ext cx="9875520" cy="658368"/>
+          </a:xfrm>
+          <a:prstGeom prst="rect">
+            <a:avLst/>
+          </a:prstGeom>
+          <a:noFill/>
+          <a:ln/>
+        </p:spPr>
+        <p:txBody>
+          <a:bodyPr wrap="square" rtlCol="0" anchor="ctr"/>
+          <a:lstStyle/>
+          <a:p>
+            <a:pPr indent="0" marL="0">
+              <a:buNone/>
+            </a:pPr>
+            <a:r>
+              <a:rPr lang="en-US" sz="1500" dirty="0">
                 <a:solidFill>
                   <a:srgbClr val="FFFFFF"/>
                 </a:solidFill>
@@ -7291,88 +8784,76 @@
                 <a:ea typeface="Calibri" pitchFamily="34" charset="-122"/>
                 <a:cs typeface="Calibri" pitchFamily="34" charset="-120"/>
               </a:rPr>
-              <a:t>✓</a:t>
-            </a:r>
-            <a:endParaRPr lang="en-US" sz="1800" dirty="0"/>
-          </a:p>
-        </p:txBody>
-      </p:sp>
-      <p:sp>
-        <p:nvSpPr>
-          <p:cNvPr id="17" name="Text 15"/>
-          <p:cNvSpPr/>
-          <p:nvPr/>
-        </p:nvSpPr>
-        <p:spPr>
-          <a:xfrm>
-            <a:off x="1371600" y="4663440"/>
-            <a:ext cx="10058400" cy="548640"/>
-          </a:xfrm>
-          <a:prstGeom prst="rect">
-            <a:avLst/>
-          </a:prstGeom>
-          <a:noFill/>
-          <a:ln/>
-        </p:spPr>
-        <p:txBody>
-          <a:bodyPr wrap="square" rtlCol="0" anchor="ctr"/>
-          <a:lstStyle/>
-          <a:p>
-            <a:pPr indent="0" marL="0">
-              <a:buNone/>
-            </a:pPr>
-            <a:r>
-              <a:rPr lang="en-US" sz="1600" dirty="0">
-                <a:solidFill>
-                  <a:srgbClr val="1A2330"/>
-                </a:solidFill>
-                <a:latin typeface="Calibri" pitchFamily="34" charset="0"/>
-                <a:ea typeface="Calibri" pitchFamily="34" charset="-122"/>
-                <a:cs typeface="Calibri" pitchFamily="34" charset="-120"/>
-              </a:rPr>
               <a:t>La tienda funcionando por la URL del LoadBalancer</a:t>
             </a:r>
-            <a:endParaRPr lang="en-US" sz="1600" dirty="0"/>
-          </a:p>
-        </p:txBody>
-      </p:sp>
-      <p:sp>
-        <p:nvSpPr>
-          <p:cNvPr id="18" name="Shape 16"/>
-          <p:cNvSpPr/>
-          <p:nvPr/>
-        </p:nvSpPr>
-        <p:spPr>
-          <a:xfrm>
-            <a:off x="731520" y="5486400"/>
-            <a:ext cx="457200" cy="457200"/>
+            <a:endParaRPr lang="en-US" sz="1500" dirty="0"/>
+          </a:p>
+        </p:txBody>
+      </p:sp>
+      <p:sp>
+        <p:nvSpPr>
+          <p:cNvPr id="26" name="Shape 24"/>
+          <p:cNvSpPr/>
+          <p:nvPr/>
+        </p:nvSpPr>
+        <p:spPr>
+          <a:xfrm>
+            <a:off x="640080" y="5486400"/>
+            <a:ext cx="10972800" cy="658368"/>
           </a:xfrm>
           <a:prstGeom prst="roundRect">
             <a:avLst>
-              <a:gd name="adj" fmla="val 16000"/>
+              <a:gd name="adj" fmla="val 13889"/>
             </a:avLst>
           </a:prstGeom>
           <a:solidFill>
-            <a:srgbClr val="02C39A"/>
+            <a:srgbClr val="102A46"/>
           </a:solidFill>
           <a:ln w="12700">
             <a:solidFill>
-              <a:srgbClr val="02C39A"/>
+              <a:srgbClr val="2A5578"/>
             </a:solidFill>
             <a:prstDash val="solid"/>
           </a:ln>
-        </p:spPr>
-      </p:sp>
-      <p:sp>
-        <p:nvSpPr>
-          <p:cNvPr id="19" name="Text 17"/>
-          <p:cNvSpPr/>
-          <p:nvPr/>
-        </p:nvSpPr>
-        <p:spPr>
-          <a:xfrm>
-            <a:off x="731520" y="5486400"/>
-            <a:ext cx="457200" cy="457200"/>
+          <a:effectLst>
+            <a:outerShdw sx="100000" sy="100000" kx="0" ky="0" algn="bl" rotWithShape="0" blurRad="114300" dist="50800" dir="5400000">
+              <a:srgbClr val="000000">
+                <a:alpha val="45000"/>
+              </a:srgbClr>
+            </a:outerShdw>
+          </a:effectLst>
+        </p:spPr>
+      </p:sp>
+      <p:sp>
+        <p:nvSpPr>
+          <p:cNvPr id="27" name="Shape 25"/>
+          <p:cNvSpPr/>
+          <p:nvPr/>
+        </p:nvSpPr>
+        <p:spPr>
+          <a:xfrm>
+            <a:off x="868680" y="5632704"/>
+            <a:ext cx="365760" cy="365760"/>
+          </a:xfrm>
+          <a:prstGeom prst="ellipse">
+            <a:avLst/>
+          </a:prstGeom>
+          <a:solidFill>
+            <a:srgbClr val="10D6A3"/>
+          </a:solidFill>
+          <a:ln/>
+        </p:spPr>
+      </p:sp>
+      <p:sp>
+        <p:nvSpPr>
+          <p:cNvPr id="28" name="Text 26"/>
+          <p:cNvSpPr/>
+          <p:nvPr/>
+        </p:nvSpPr>
+        <p:spPr>
+          <a:xfrm>
+            <a:off x="868680" y="5632704"/>
+            <a:ext cx="365760" cy="365760"/>
           </a:xfrm>
           <a:prstGeom prst="rect">
             <a:avLst/>
@@ -7388,7 +8869,46 @@
               <a:buNone/>
             </a:pPr>
             <a:r>
-              <a:rPr lang="en-US" sz="1800" b="1" dirty="0">
+              <a:rPr lang="en-US" sz="1500" b="1" dirty="0">
+                <a:solidFill>
+                  <a:srgbClr val="0A1E33"/>
+                </a:solidFill>
+                <a:latin typeface="Calibri" pitchFamily="34" charset="0"/>
+                <a:ea typeface="Calibri" pitchFamily="34" charset="-122"/>
+                <a:cs typeface="Calibri" pitchFamily="34" charset="-120"/>
+              </a:rPr>
+              <a:t>✓</a:t>
+            </a:r>
+            <a:endParaRPr lang="en-US" sz="1500" dirty="0"/>
+          </a:p>
+        </p:txBody>
+      </p:sp>
+      <p:sp>
+        <p:nvSpPr>
+          <p:cNvPr id="29" name="Text 27"/>
+          <p:cNvSpPr/>
+          <p:nvPr/>
+        </p:nvSpPr>
+        <p:spPr>
+          <a:xfrm>
+            <a:off x="1463040" y="5486400"/>
+            <a:ext cx="9875520" cy="658368"/>
+          </a:xfrm>
+          <a:prstGeom prst="rect">
+            <a:avLst/>
+          </a:prstGeom>
+          <a:noFill/>
+          <a:ln/>
+        </p:spPr>
+        <p:txBody>
+          <a:bodyPr wrap="square" rtlCol="0" anchor="ctr"/>
+          <a:lstStyle/>
+          <a:p>
+            <a:pPr indent="0" marL="0">
+              <a:buNone/>
+            </a:pPr>
+            <a:r>
+              <a:rPr lang="en-US" sz="1500" dirty="0">
                 <a:solidFill>
                   <a:srgbClr val="FFFFFF"/>
                 </a:solidFill>
@@ -7396,48 +8916,9 @@
                 <a:ea typeface="Calibri" pitchFamily="34" charset="-122"/>
                 <a:cs typeface="Calibri" pitchFamily="34" charset="-120"/>
               </a:rPr>
-              <a:t>✓</a:t>
-            </a:r>
-            <a:endParaRPr lang="en-US" sz="1800" dirty="0"/>
-          </a:p>
-        </p:txBody>
-      </p:sp>
-      <p:sp>
-        <p:nvSpPr>
-          <p:cNvPr id="20" name="Text 18"/>
-          <p:cNvSpPr/>
-          <p:nvPr/>
-        </p:nvSpPr>
-        <p:spPr>
-          <a:xfrm>
-            <a:off x="1371600" y="5440680"/>
-            <a:ext cx="10058400" cy="548640"/>
-          </a:xfrm>
-          <a:prstGeom prst="rect">
-            <a:avLst/>
-          </a:prstGeom>
-          <a:noFill/>
-          <a:ln/>
-        </p:spPr>
-        <p:txBody>
-          <a:bodyPr wrap="square" rtlCol="0" anchor="ctr"/>
-          <a:lstStyle/>
-          <a:p>
-            <a:pPr indent="0" marL="0">
-              <a:buNone/>
-            </a:pPr>
-            <a:r>
-              <a:rPr lang="en-US" sz="1600" dirty="0">
-                <a:solidFill>
-                  <a:srgbClr val="1A2330"/>
-                </a:solidFill>
-                <a:latin typeface="Calibri" pitchFamily="34" charset="0"/>
-                <a:ea typeface="Calibri" pitchFamily="34" charset="-122"/>
-                <a:cs typeface="Calibri" pitchFamily="34" charset="-120"/>
-              </a:rPr>
               <a:t>Pods y servicios en la consola de AWS / kubectl</a:t>
             </a:r>
-            <a:endParaRPr lang="en-US" sz="1600" dirty="0"/>
+            <a:endParaRPr lang="en-US" sz="1500" dirty="0"/>
           </a:p>
         </p:txBody>
       </p:sp>
